--- a/docs/evidence/live_deployment/LIVE01-05_EMS_ReadyKit_WebApp.pptx
+++ b/docs/evidence/live_deployment/LIVE01-05_EMS_ReadyKit_WebApp.pptx
@@ -5,7 +5,7 @@
     <p:sldMasterId id="2147483648" r:id="rId1"/>
   </p:sldMasterIdLst>
   <p:notesMasterIdLst>
-    <p:notesMasterId r:id="rId23"/>
+    <p:notesMasterId r:id="rId27"/>
   </p:notesMasterIdLst>
   <p:sldIdLst>
     <p:sldId id="256" r:id="rId2"/>
@@ -26,9 +26,13 @@
     <p:sldId id="265" r:id="rId17"/>
     <p:sldId id="275" r:id="rId18"/>
     <p:sldId id="276" r:id="rId19"/>
-    <p:sldId id="266" r:id="rId20"/>
-    <p:sldId id="267" r:id="rId21"/>
-    <p:sldId id="268" r:id="rId22"/>
+    <p:sldId id="277" r:id="rId20"/>
+    <p:sldId id="278" r:id="rId21"/>
+    <p:sldId id="279" r:id="rId22"/>
+    <p:sldId id="280" r:id="rId23"/>
+    <p:sldId id="266" r:id="rId24"/>
+    <p:sldId id="267" r:id="rId25"/>
+    <p:sldId id="268" r:id="rId26"/>
   </p:sldIdLst>
   <p:sldSz cx="9144000" cy="5143500" type="screen16x9"/>
   <p:notesSz cx="5143500" cy="9144000"/>
@@ -225,7 +229,7 @@
           <a:p>
             <a:fld id="{5282F153-3F37-0F45-9E97-73ACFA13230C}" type="datetimeFigureOut">
               <a:rPr lang="en-US"/>
-              <a:t>6/26/2026</a:t>
+              <a:t>7/2/2026</a:t>
             </a:fld>
             <a:endParaRPr lang="en-US"/>
           </a:p>
@@ -654,7 +658,7 @@
             </a:pPr>
             <a:r>
               <a:rPr lang="en-US" dirty="0"/>
-              <a:t>Once submitted the app will give you feedback that it was saved.  You can start another check, or return to the home dashboard.</a:t>
+              <a:t>Once submitted the app will give you feedback that it was saved.  You can start another check or return to the home dashboard.</a:t>
             </a:r>
           </a:p>
         </p:txBody>
@@ -2089,7 +2093,7 @@
             </a:pPr>
             <a:r>
               <a:rPr lang="en-US" dirty="0"/>
-              <a:t>Items can be individually uploaded</a:t>
+              <a:t>Items can be individually added</a:t>
             </a:r>
           </a:p>
           <a:p>
@@ -2099,7 +2103,7 @@
             </a:pPr>
             <a:r>
               <a:rPr lang="en-US" dirty="0"/>
-              <a:t>Or items can be mass uploaded.  Makes it easier to set up a new station.</a:t>
+              <a:t>Items can be mass uploaded.  Makes it easier to set up a new station</a:t>
             </a:r>
           </a:p>
           <a:p>
@@ -2109,7 +2113,7 @@
             </a:pPr>
             <a:r>
               <a:rPr lang="en-US" dirty="0"/>
-              <a:t>Items can be searched and filtered.</a:t>
+              <a:t>Items can be searched and filtered</a:t>
             </a:r>
           </a:p>
           <a:p>
@@ -2119,13 +2123,38 @@
             </a:pPr>
             <a:r>
               <a:rPr lang="en-US" dirty="0"/>
-              <a:t>Filters include Airway, Wound Care, PPE, Diagnostic, Medications, Documents</a:t>
-            </a:r>
-            <a:r>
-              <a:rPr lang="en-US"/>
-              <a:t>, Vehicle Ops</a:t>
-            </a:r>
-            <a:endParaRPr lang="en-US" dirty="0"/>
+              <a:t>Filters include Airway, Wound Care, PPE, Diagnostic, Medications, Documents, Vehicle Ops</a:t>
+            </a:r>
+          </a:p>
+          <a:p>
+            <a:pPr marL="628650" lvl="1" indent="-171450">
+              <a:buFont typeface="Arial" panose="020B0604020202020204" pitchFamily="34" charset="0"/>
+              <a:buChar char="•"/>
+            </a:pPr>
+            <a:r>
+              <a:rPr lang="en-US" dirty="0"/>
+              <a:t>Items can be marked inactive – and they are filtered out for normal operations</a:t>
+            </a:r>
+          </a:p>
+          <a:p>
+            <a:pPr marL="171450" lvl="0" indent="-171450">
+              <a:buFont typeface="Arial" panose="020B0604020202020204" pitchFamily="34" charset="0"/>
+              <a:buChar char="•"/>
+            </a:pPr>
+            <a:r>
+              <a:rPr lang="en-US" dirty="0"/>
+              <a:t>Individual items show where they are used.</a:t>
+            </a:r>
+          </a:p>
+          <a:p>
+            <a:pPr marL="171450" lvl="0" indent="-171450">
+              <a:buFont typeface="Arial" panose="020B0604020202020204" pitchFamily="34" charset="0"/>
+              <a:buChar char="•"/>
+            </a:pPr>
+            <a:r>
+              <a:rPr lang="en-US" dirty="0"/>
+              <a:t>You can assign items from the inventory catalog for easy of use.</a:t>
+            </a:r>
           </a:p>
           <a:p>
             <a:pPr marL="171450" indent="-171450">
@@ -2243,7 +2272,13 @@
   <p:cSld>
     <p:spTree>
       <p:nvGrpSpPr>
-        <p:cNvPr id="1" name=""/>
+        <p:cNvPr id="1" name="">
+          <a:extLst>
+            <a:ext uri="{FF2B5EF4-FFF2-40B4-BE49-F238E27FC236}">
+              <a16:creationId xmlns:a16="http://schemas.microsoft.com/office/drawing/2014/main" id="{74C9A7A7-7B9D-33E0-CD4E-2636969A10F1}"/>
+            </a:ext>
+          </a:extLst>
+        </p:cNvPr>
         <p:cNvGrpSpPr/>
         <p:nvPr/>
       </p:nvGrpSpPr>
@@ -2257,7 +2292,13 @@
       </p:grpSpPr>
       <p:sp>
         <p:nvSpPr>
-          <p:cNvPr id="2" name="Slide Image Placeholder 1"/>
+          <p:cNvPr id="2" name="Slide Image Placeholder 1">
+            <a:extLst>
+              <a:ext uri="{FF2B5EF4-FFF2-40B4-BE49-F238E27FC236}">
+                <a16:creationId xmlns:a16="http://schemas.microsoft.com/office/drawing/2014/main" id="{7172CEBD-C14E-C6E7-79E4-BFB0B70CDD1C}"/>
+              </a:ext>
+            </a:extLst>
+          </p:cNvPr>
           <p:cNvSpPr>
             <a:spLocks noGrp="1" noRot="1" noChangeAspect="1"/>
           </p:cNvSpPr>
@@ -2269,7 +2310,13 @@
       </p:sp>
       <p:sp>
         <p:nvSpPr>
-          <p:cNvPr id="3" name="Notes Placeholder 2"/>
+          <p:cNvPr id="3" name="Notes Placeholder 2">
+            <a:extLst>
+              <a:ext uri="{FF2B5EF4-FFF2-40B4-BE49-F238E27FC236}">
+                <a16:creationId xmlns:a16="http://schemas.microsoft.com/office/drawing/2014/main" id="{005032D9-8DDC-A9DF-B84A-458551B299D0}"/>
+              </a:ext>
+            </a:extLst>
+          </p:cNvPr>
           <p:cNvSpPr>
             <a:spLocks noGrp="1"/>
           </p:cNvSpPr>
@@ -2282,13 +2329,22 @@
           <a:bodyPr/>
           <a:lstStyle/>
           <a:p>
-            <a:endParaRPr lang="en-US" dirty="0"/>
-          </a:p>
-        </p:txBody>
-      </p:sp>
-      <p:sp>
-        <p:nvSpPr>
-          <p:cNvPr id="4" name="Slide Number Placeholder 3"/>
+            <a:r>
+              <a:rPr lang="en-US" dirty="0"/>
+              <a:t>Vehicles can be managed from this view.</a:t>
+            </a:r>
+          </a:p>
+        </p:txBody>
+      </p:sp>
+      <p:sp>
+        <p:nvSpPr>
+          <p:cNvPr id="4" name="Slide Number Placeholder 3">
+            <a:extLst>
+              <a:ext uri="{FF2B5EF4-FFF2-40B4-BE49-F238E27FC236}">
+                <a16:creationId xmlns:a16="http://schemas.microsoft.com/office/drawing/2014/main" id="{0F26B59F-324B-A93D-8EB9-20B95A62E111}"/>
+              </a:ext>
+            </a:extLst>
+          </p:cNvPr>
           <p:cNvSpPr>
             <a:spLocks noGrp="1"/>
           </p:cNvSpPr>
@@ -2301,18 +2357,78 @@
           <a:bodyPr/>
           <a:lstStyle/>
           <a:p>
+            <a:pPr marL="0" marR="0" lvl="0" indent="0" algn="r" defTabSz="914400" rtl="0" eaLnBrk="1" fontAlgn="auto" latinLnBrk="0" hangingPunct="1">
+              <a:lnSpc>
+                <a:spcPct val="100000"/>
+              </a:lnSpc>
+              <a:spcBef>
+                <a:spcPts val="0"/>
+              </a:spcBef>
+              <a:spcAft>
+                <a:spcPts val="0"/>
+              </a:spcAft>
+              <a:buClrTx/>
+              <a:buSzTx/>
+              <a:buFontTx/>
+              <a:buNone/>
+              <a:tabLst/>
+              <a:defRPr/>
+            </a:pPr>
             <a:fld id="{F7021451-1387-4CA6-816F-3879F97B5CBC}" type="slidenum">
-              <a:rPr lang="en-US"/>
+              <a:rPr kumimoji="0" lang="en-US" sz="1200" b="0" i="0" u="none" strike="noStrike" kern="1200" cap="none" spc="0" normalizeH="0" baseline="0" noProof="0">
+                <a:ln>
+                  <a:noFill/>
+                </a:ln>
+                <a:solidFill>
+                  <a:prstClr val="black"/>
+                </a:solidFill>
+                <a:effectLst/>
+                <a:uLnTx/>
+                <a:uFillTx/>
+                <a:latin typeface="Calibri" panose="020F0502020204030204"/>
+                <a:ea typeface="+mn-ea"/>
+                <a:cs typeface="+mn-cs"/>
+              </a:rPr>
+              <a:pPr marL="0" marR="0" lvl="0" indent="0" algn="r" defTabSz="914400" rtl="0" eaLnBrk="1" fontAlgn="auto" latinLnBrk="0" hangingPunct="1">
+                <a:lnSpc>
+                  <a:spcPct val="100000"/>
+                </a:lnSpc>
+                <a:spcBef>
+                  <a:spcPts val="0"/>
+                </a:spcBef>
+                <a:spcAft>
+                  <a:spcPts val="0"/>
+                </a:spcAft>
+                <a:buClrTx/>
+                <a:buSzTx/>
+                <a:buFontTx/>
+                <a:buNone/>
+                <a:tabLst/>
+                <a:defRPr/>
+              </a:pPr>
               <a:t>19</a:t>
             </a:fld>
-            <a:endParaRPr lang="en-US"/>
+            <a:endParaRPr kumimoji="0" lang="en-US" sz="1200" b="0" i="0" u="none" strike="noStrike" kern="1200" cap="none" spc="0" normalizeH="0" baseline="0" noProof="0">
+              <a:ln>
+                <a:noFill/>
+              </a:ln>
+              <a:solidFill>
+                <a:prstClr val="black"/>
+              </a:solidFill>
+              <a:effectLst/>
+              <a:uLnTx/>
+              <a:uFillTx/>
+              <a:latin typeface="Calibri" panose="020F0502020204030204"/>
+              <a:ea typeface="+mn-ea"/>
+              <a:cs typeface="+mn-cs"/>
+            </a:endParaRPr>
           </a:p>
         </p:txBody>
       </p:sp>
     </p:spTree>
     <p:extLst>
       <p:ext uri="{BB962C8B-B14F-4D97-AF65-F5344CB8AC3E}">
-        <p14:creationId xmlns:p14="http://schemas.microsoft.com/office/powerpoint/2010/main" val="1024086991"/>
+        <p14:creationId xmlns:p14="http://schemas.microsoft.com/office/powerpoint/2010/main" val="559597174"/>
       </p:ext>
     </p:extLst>
   </p:cSld>
@@ -2411,7 +2527,13 @@
   <p:cSld>
     <p:spTree>
       <p:nvGrpSpPr>
-        <p:cNvPr id="1" name=""/>
+        <p:cNvPr id="1" name="">
+          <a:extLst>
+            <a:ext uri="{FF2B5EF4-FFF2-40B4-BE49-F238E27FC236}">
+              <a16:creationId xmlns:a16="http://schemas.microsoft.com/office/drawing/2014/main" id="{A2C4F782-8580-703A-8A6E-4DC39593BB71}"/>
+            </a:ext>
+          </a:extLst>
+        </p:cNvPr>
         <p:cNvGrpSpPr/>
         <p:nvPr/>
       </p:nvGrpSpPr>
@@ -2425,7 +2547,13 @@
       </p:grpSpPr>
       <p:sp>
         <p:nvSpPr>
-          <p:cNvPr id="2" name="Slide Image Placeholder 1"/>
+          <p:cNvPr id="2" name="Slide Image Placeholder 1">
+            <a:extLst>
+              <a:ext uri="{FF2B5EF4-FFF2-40B4-BE49-F238E27FC236}">
+                <a16:creationId xmlns:a16="http://schemas.microsoft.com/office/drawing/2014/main" id="{02435079-9E0F-EA22-D655-F97382389EC6}"/>
+              </a:ext>
+            </a:extLst>
+          </p:cNvPr>
           <p:cNvSpPr>
             <a:spLocks noGrp="1" noRot="1" noChangeAspect="1"/>
           </p:cNvSpPr>
@@ -2437,7 +2565,13 @@
       </p:sp>
       <p:sp>
         <p:nvSpPr>
-          <p:cNvPr id="3" name="Notes Placeholder 2"/>
+          <p:cNvPr id="3" name="Notes Placeholder 2">
+            <a:extLst>
+              <a:ext uri="{FF2B5EF4-FFF2-40B4-BE49-F238E27FC236}">
+                <a16:creationId xmlns:a16="http://schemas.microsoft.com/office/drawing/2014/main" id="{91C4E928-6DAA-16F5-E689-A7343D5A147C}"/>
+              </a:ext>
+            </a:extLst>
+          </p:cNvPr>
           <p:cNvSpPr>
             <a:spLocks noGrp="1"/>
           </p:cNvSpPr>
@@ -2450,13 +2584,22 @@
           <a:bodyPr/>
           <a:lstStyle/>
           <a:p>
-            <a:endParaRPr lang="en-US" dirty="0"/>
-          </a:p>
-        </p:txBody>
-      </p:sp>
-      <p:sp>
-        <p:nvSpPr>
-          <p:cNvPr id="4" name="Slide Number Placeholder 3"/>
+            <a:r>
+              <a:rPr lang="en-US" dirty="0"/>
+              <a:t>Jump bags can be managed from this view.  This includes Ambulance jump bags, pediatrics and medical first responder bags.</a:t>
+            </a:r>
+          </a:p>
+        </p:txBody>
+      </p:sp>
+      <p:sp>
+        <p:nvSpPr>
+          <p:cNvPr id="4" name="Slide Number Placeholder 3">
+            <a:extLst>
+              <a:ext uri="{FF2B5EF4-FFF2-40B4-BE49-F238E27FC236}">
+                <a16:creationId xmlns:a16="http://schemas.microsoft.com/office/drawing/2014/main" id="{02B0C9CE-F125-46E7-4953-79700EDFF872}"/>
+              </a:ext>
+            </a:extLst>
+          </p:cNvPr>
           <p:cNvSpPr>
             <a:spLocks noGrp="1"/>
           </p:cNvSpPr>
@@ -2469,18 +2612,78 @@
           <a:bodyPr/>
           <a:lstStyle/>
           <a:p>
+            <a:pPr marL="0" marR="0" lvl="0" indent="0" algn="r" defTabSz="914400" rtl="0" eaLnBrk="1" fontAlgn="auto" latinLnBrk="0" hangingPunct="1">
+              <a:lnSpc>
+                <a:spcPct val="100000"/>
+              </a:lnSpc>
+              <a:spcBef>
+                <a:spcPts val="0"/>
+              </a:spcBef>
+              <a:spcAft>
+                <a:spcPts val="0"/>
+              </a:spcAft>
+              <a:buClrTx/>
+              <a:buSzTx/>
+              <a:buFontTx/>
+              <a:buNone/>
+              <a:tabLst/>
+              <a:defRPr/>
+            </a:pPr>
             <a:fld id="{F7021451-1387-4CA6-816F-3879F97B5CBC}" type="slidenum">
-              <a:rPr lang="en-US"/>
+              <a:rPr kumimoji="0" lang="en-US" sz="1200" b="0" i="0" u="none" strike="noStrike" kern="1200" cap="none" spc="0" normalizeH="0" baseline="0" noProof="0">
+                <a:ln>
+                  <a:noFill/>
+                </a:ln>
+                <a:solidFill>
+                  <a:prstClr val="black"/>
+                </a:solidFill>
+                <a:effectLst/>
+                <a:uLnTx/>
+                <a:uFillTx/>
+                <a:latin typeface="Calibri" panose="020F0502020204030204"/>
+                <a:ea typeface="+mn-ea"/>
+                <a:cs typeface="+mn-cs"/>
+              </a:rPr>
+              <a:pPr marL="0" marR="0" lvl="0" indent="0" algn="r" defTabSz="914400" rtl="0" eaLnBrk="1" fontAlgn="auto" latinLnBrk="0" hangingPunct="1">
+                <a:lnSpc>
+                  <a:spcPct val="100000"/>
+                </a:lnSpc>
+                <a:spcBef>
+                  <a:spcPts val="0"/>
+                </a:spcBef>
+                <a:spcAft>
+                  <a:spcPts val="0"/>
+                </a:spcAft>
+                <a:buClrTx/>
+                <a:buSzTx/>
+                <a:buFontTx/>
+                <a:buNone/>
+                <a:tabLst/>
+                <a:defRPr/>
+              </a:pPr>
               <a:t>20</a:t>
             </a:fld>
-            <a:endParaRPr lang="en-US"/>
+            <a:endParaRPr kumimoji="0" lang="en-US" sz="1200" b="0" i="0" u="none" strike="noStrike" kern="1200" cap="none" spc="0" normalizeH="0" baseline="0" noProof="0">
+              <a:ln>
+                <a:noFill/>
+              </a:ln>
+              <a:solidFill>
+                <a:prstClr val="black"/>
+              </a:solidFill>
+              <a:effectLst/>
+              <a:uLnTx/>
+              <a:uFillTx/>
+              <a:latin typeface="Calibri" panose="020F0502020204030204"/>
+              <a:ea typeface="+mn-ea"/>
+              <a:cs typeface="+mn-cs"/>
+            </a:endParaRPr>
           </a:p>
         </p:txBody>
       </p:sp>
     </p:spTree>
     <p:extLst>
       <p:ext uri="{BB962C8B-B14F-4D97-AF65-F5344CB8AC3E}">
-        <p14:creationId xmlns:p14="http://schemas.microsoft.com/office/powerpoint/2010/main" val="1024086991"/>
+        <p14:creationId xmlns:p14="http://schemas.microsoft.com/office/powerpoint/2010/main" val="2783895110"/>
       </p:ext>
     </p:extLst>
   </p:cSld>
@@ -2491,6 +2694,345 @@
 </file>
 
 <file path=ppt/notesSlides/notesSlide21.xml><?xml version="1.0" encoding="utf-8"?>
+<p:notes xmlns:a="http://schemas.openxmlformats.org/drawingml/2006/main" xmlns:r="http://schemas.openxmlformats.org/officeDocument/2006/relationships" xmlns:p="http://schemas.openxmlformats.org/presentationml/2006/main">
+  <p:cSld>
+    <p:spTree>
+      <p:nvGrpSpPr>
+        <p:cNvPr id="1" name="">
+          <a:extLst>
+            <a:ext uri="{FF2B5EF4-FFF2-40B4-BE49-F238E27FC236}">
+              <a16:creationId xmlns:a16="http://schemas.microsoft.com/office/drawing/2014/main" id="{D2F7EFBE-3B42-F234-3B74-0496BD429677}"/>
+            </a:ext>
+          </a:extLst>
+        </p:cNvPr>
+        <p:cNvGrpSpPr/>
+        <p:nvPr/>
+      </p:nvGrpSpPr>
+      <p:grpSpPr>
+        <a:xfrm>
+          <a:off x="0" y="0"/>
+          <a:ext cx="0" cy="0"/>
+          <a:chOff x="0" y="0"/>
+          <a:chExt cx="0" cy="0"/>
+        </a:xfrm>
+      </p:grpSpPr>
+      <p:sp>
+        <p:nvSpPr>
+          <p:cNvPr id="2" name="Slide Image Placeholder 1">
+            <a:extLst>
+              <a:ext uri="{FF2B5EF4-FFF2-40B4-BE49-F238E27FC236}">
+                <a16:creationId xmlns:a16="http://schemas.microsoft.com/office/drawing/2014/main" id="{E4DA2A29-6FB0-0245-6BF3-4E95984CAAE2}"/>
+              </a:ext>
+            </a:extLst>
+          </p:cNvPr>
+          <p:cNvSpPr>
+            <a:spLocks noGrp="1" noRot="1" noChangeAspect="1"/>
+          </p:cNvSpPr>
+          <p:nvPr>
+            <p:ph type="sldImg"/>
+          </p:nvPr>
+        </p:nvSpPr>
+        <p:spPr/>
+      </p:sp>
+      <p:sp>
+        <p:nvSpPr>
+          <p:cNvPr id="3" name="Notes Placeholder 2">
+            <a:extLst>
+              <a:ext uri="{FF2B5EF4-FFF2-40B4-BE49-F238E27FC236}">
+                <a16:creationId xmlns:a16="http://schemas.microsoft.com/office/drawing/2014/main" id="{49FBA8EB-790E-9447-CFD1-6001D60356B1}"/>
+              </a:ext>
+            </a:extLst>
+          </p:cNvPr>
+          <p:cNvSpPr>
+            <a:spLocks noGrp="1"/>
+          </p:cNvSpPr>
+          <p:nvPr>
+            <p:ph type="body" idx="1"/>
+          </p:nvPr>
+        </p:nvSpPr>
+        <p:spPr/>
+        <p:txBody>
+          <a:bodyPr/>
+          <a:lstStyle/>
+          <a:p>
+            <a:r>
+              <a:rPr lang="en-US" dirty="0"/>
+              <a:t>Station Supplies in the Station Administration sets up the inventory to be fed from the station to the ambulances and jump bags.</a:t>
+            </a:r>
+          </a:p>
+        </p:txBody>
+      </p:sp>
+      <p:sp>
+        <p:nvSpPr>
+          <p:cNvPr id="4" name="Slide Number Placeholder 3">
+            <a:extLst>
+              <a:ext uri="{FF2B5EF4-FFF2-40B4-BE49-F238E27FC236}">
+                <a16:creationId xmlns:a16="http://schemas.microsoft.com/office/drawing/2014/main" id="{ED7958C0-29DB-262A-9DC7-597A3691AE04}"/>
+              </a:ext>
+            </a:extLst>
+          </p:cNvPr>
+          <p:cNvSpPr>
+            <a:spLocks noGrp="1"/>
+          </p:cNvSpPr>
+          <p:nvPr>
+            <p:ph type="sldNum" sz="quarter" idx="10"/>
+          </p:nvPr>
+        </p:nvSpPr>
+        <p:spPr/>
+        <p:txBody>
+          <a:bodyPr/>
+          <a:lstStyle/>
+          <a:p>
+            <a:pPr marL="0" marR="0" lvl="0" indent="0" algn="r" defTabSz="914400" rtl="0" eaLnBrk="1" fontAlgn="auto" latinLnBrk="0" hangingPunct="1">
+              <a:lnSpc>
+                <a:spcPct val="100000"/>
+              </a:lnSpc>
+              <a:spcBef>
+                <a:spcPts val="0"/>
+              </a:spcBef>
+              <a:spcAft>
+                <a:spcPts val="0"/>
+              </a:spcAft>
+              <a:buClrTx/>
+              <a:buSzTx/>
+              <a:buFontTx/>
+              <a:buNone/>
+              <a:tabLst/>
+              <a:defRPr/>
+            </a:pPr>
+            <a:fld id="{F7021451-1387-4CA6-816F-3879F97B5CBC}" type="slidenum">
+              <a:rPr kumimoji="0" lang="en-US" sz="1200" b="0" i="0" u="none" strike="noStrike" kern="1200" cap="none" spc="0" normalizeH="0" baseline="0" noProof="0">
+                <a:ln>
+                  <a:noFill/>
+                </a:ln>
+                <a:solidFill>
+                  <a:prstClr val="black"/>
+                </a:solidFill>
+                <a:effectLst/>
+                <a:uLnTx/>
+                <a:uFillTx/>
+                <a:latin typeface="Calibri" panose="020F0502020204030204"/>
+                <a:ea typeface="+mn-ea"/>
+                <a:cs typeface="+mn-cs"/>
+              </a:rPr>
+              <a:pPr marL="0" marR="0" lvl="0" indent="0" algn="r" defTabSz="914400" rtl="0" eaLnBrk="1" fontAlgn="auto" latinLnBrk="0" hangingPunct="1">
+                <a:lnSpc>
+                  <a:spcPct val="100000"/>
+                </a:lnSpc>
+                <a:spcBef>
+                  <a:spcPts val="0"/>
+                </a:spcBef>
+                <a:spcAft>
+                  <a:spcPts val="0"/>
+                </a:spcAft>
+                <a:buClrTx/>
+                <a:buSzTx/>
+                <a:buFontTx/>
+                <a:buNone/>
+                <a:tabLst/>
+                <a:defRPr/>
+              </a:pPr>
+              <a:t>21</a:t>
+            </a:fld>
+            <a:endParaRPr kumimoji="0" lang="en-US" sz="1200" b="0" i="0" u="none" strike="noStrike" kern="1200" cap="none" spc="0" normalizeH="0" baseline="0" noProof="0">
+              <a:ln>
+                <a:noFill/>
+              </a:ln>
+              <a:solidFill>
+                <a:prstClr val="black"/>
+              </a:solidFill>
+              <a:effectLst/>
+              <a:uLnTx/>
+              <a:uFillTx/>
+              <a:latin typeface="Calibri" panose="020F0502020204030204"/>
+              <a:ea typeface="+mn-ea"/>
+              <a:cs typeface="+mn-cs"/>
+            </a:endParaRPr>
+          </a:p>
+        </p:txBody>
+      </p:sp>
+    </p:spTree>
+    <p:extLst>
+      <p:ext uri="{BB962C8B-B14F-4D97-AF65-F5344CB8AC3E}">
+        <p14:creationId xmlns:p14="http://schemas.microsoft.com/office/powerpoint/2010/main" val="1987801550"/>
+      </p:ext>
+    </p:extLst>
+  </p:cSld>
+  <p:clrMapOvr>
+    <a:masterClrMapping/>
+  </p:clrMapOvr>
+</p:notes>
+</file>
+
+<file path=ppt/notesSlides/notesSlide22.xml><?xml version="1.0" encoding="utf-8"?>
+<p:notes xmlns:a="http://schemas.openxmlformats.org/drawingml/2006/main" xmlns:r="http://schemas.openxmlformats.org/officeDocument/2006/relationships" xmlns:p="http://schemas.openxmlformats.org/presentationml/2006/main">
+  <p:cSld>
+    <p:spTree>
+      <p:nvGrpSpPr>
+        <p:cNvPr id="1" name="">
+          <a:extLst>
+            <a:ext uri="{FF2B5EF4-FFF2-40B4-BE49-F238E27FC236}">
+              <a16:creationId xmlns:a16="http://schemas.microsoft.com/office/drawing/2014/main" id="{E2BF0162-377F-2387-016A-AD48932F2C59}"/>
+            </a:ext>
+          </a:extLst>
+        </p:cNvPr>
+        <p:cNvGrpSpPr/>
+        <p:nvPr/>
+      </p:nvGrpSpPr>
+      <p:grpSpPr>
+        <a:xfrm>
+          <a:off x="0" y="0"/>
+          <a:ext cx="0" cy="0"/>
+          <a:chOff x="0" y="0"/>
+          <a:chExt cx="0" cy="0"/>
+        </a:xfrm>
+      </p:grpSpPr>
+      <p:sp>
+        <p:nvSpPr>
+          <p:cNvPr id="2" name="Slide Image Placeholder 1">
+            <a:extLst>
+              <a:ext uri="{FF2B5EF4-FFF2-40B4-BE49-F238E27FC236}">
+                <a16:creationId xmlns:a16="http://schemas.microsoft.com/office/drawing/2014/main" id="{11FDE5AF-77B8-9ED9-28F3-05779CC65905}"/>
+              </a:ext>
+            </a:extLst>
+          </p:cNvPr>
+          <p:cNvSpPr>
+            <a:spLocks noGrp="1" noRot="1" noChangeAspect="1"/>
+          </p:cNvSpPr>
+          <p:nvPr>
+            <p:ph type="sldImg"/>
+          </p:nvPr>
+        </p:nvSpPr>
+        <p:spPr/>
+      </p:sp>
+      <p:sp>
+        <p:nvSpPr>
+          <p:cNvPr id="3" name="Notes Placeholder 2">
+            <a:extLst>
+              <a:ext uri="{FF2B5EF4-FFF2-40B4-BE49-F238E27FC236}">
+                <a16:creationId xmlns:a16="http://schemas.microsoft.com/office/drawing/2014/main" id="{7A28FF98-EEAA-986F-E6E5-80A276305DE1}"/>
+              </a:ext>
+            </a:extLst>
+          </p:cNvPr>
+          <p:cNvSpPr>
+            <a:spLocks noGrp="1"/>
+          </p:cNvSpPr>
+          <p:nvPr>
+            <p:ph type="body" idx="1"/>
+          </p:nvPr>
+        </p:nvSpPr>
+        <p:spPr/>
+        <p:txBody>
+          <a:bodyPr/>
+          <a:lstStyle/>
+          <a:p>
+            <a:endParaRPr lang="en-US" dirty="0"/>
+          </a:p>
+        </p:txBody>
+      </p:sp>
+      <p:sp>
+        <p:nvSpPr>
+          <p:cNvPr id="4" name="Slide Number Placeholder 3">
+            <a:extLst>
+              <a:ext uri="{FF2B5EF4-FFF2-40B4-BE49-F238E27FC236}">
+                <a16:creationId xmlns:a16="http://schemas.microsoft.com/office/drawing/2014/main" id="{76066B95-42EE-44E3-E26D-D6D12F2FC91D}"/>
+              </a:ext>
+            </a:extLst>
+          </p:cNvPr>
+          <p:cNvSpPr>
+            <a:spLocks noGrp="1"/>
+          </p:cNvSpPr>
+          <p:nvPr>
+            <p:ph type="sldNum" sz="quarter" idx="10"/>
+          </p:nvPr>
+        </p:nvSpPr>
+        <p:spPr/>
+        <p:txBody>
+          <a:bodyPr/>
+          <a:lstStyle/>
+          <a:p>
+            <a:pPr marL="0" marR="0" lvl="0" indent="0" algn="r" defTabSz="914400" rtl="0" eaLnBrk="1" fontAlgn="auto" latinLnBrk="0" hangingPunct="1">
+              <a:lnSpc>
+                <a:spcPct val="100000"/>
+              </a:lnSpc>
+              <a:spcBef>
+                <a:spcPts val="0"/>
+              </a:spcBef>
+              <a:spcAft>
+                <a:spcPts val="0"/>
+              </a:spcAft>
+              <a:buClrTx/>
+              <a:buSzTx/>
+              <a:buFontTx/>
+              <a:buNone/>
+              <a:tabLst/>
+              <a:defRPr/>
+            </a:pPr>
+            <a:fld id="{F7021451-1387-4CA6-816F-3879F97B5CBC}" type="slidenum">
+              <a:rPr kumimoji="0" lang="en-US" sz="1200" b="0" i="0" u="none" strike="noStrike" kern="1200" cap="none" spc="0" normalizeH="0" baseline="0" noProof="0">
+                <a:ln>
+                  <a:noFill/>
+                </a:ln>
+                <a:solidFill>
+                  <a:prstClr val="black"/>
+                </a:solidFill>
+                <a:effectLst/>
+                <a:uLnTx/>
+                <a:uFillTx/>
+                <a:latin typeface="Calibri" panose="020F0502020204030204"/>
+                <a:ea typeface="+mn-ea"/>
+                <a:cs typeface="+mn-cs"/>
+              </a:rPr>
+              <a:pPr marL="0" marR="0" lvl="0" indent="0" algn="r" defTabSz="914400" rtl="0" eaLnBrk="1" fontAlgn="auto" latinLnBrk="0" hangingPunct="1">
+                <a:lnSpc>
+                  <a:spcPct val="100000"/>
+                </a:lnSpc>
+                <a:spcBef>
+                  <a:spcPts val="0"/>
+                </a:spcBef>
+                <a:spcAft>
+                  <a:spcPts val="0"/>
+                </a:spcAft>
+                <a:buClrTx/>
+                <a:buSzTx/>
+                <a:buFontTx/>
+                <a:buNone/>
+                <a:tabLst/>
+                <a:defRPr/>
+              </a:pPr>
+              <a:t>22</a:t>
+            </a:fld>
+            <a:endParaRPr kumimoji="0" lang="en-US" sz="1200" b="0" i="0" u="none" strike="noStrike" kern="1200" cap="none" spc="0" normalizeH="0" baseline="0" noProof="0">
+              <a:ln>
+                <a:noFill/>
+              </a:ln>
+              <a:solidFill>
+                <a:prstClr val="black"/>
+              </a:solidFill>
+              <a:effectLst/>
+              <a:uLnTx/>
+              <a:uFillTx/>
+              <a:latin typeface="Calibri" panose="020F0502020204030204"/>
+              <a:ea typeface="+mn-ea"/>
+              <a:cs typeface="+mn-cs"/>
+            </a:endParaRPr>
+          </a:p>
+        </p:txBody>
+      </p:sp>
+    </p:spTree>
+    <p:extLst>
+      <p:ext uri="{BB962C8B-B14F-4D97-AF65-F5344CB8AC3E}">
+        <p14:creationId xmlns:p14="http://schemas.microsoft.com/office/powerpoint/2010/main" val="239134958"/>
+      </p:ext>
+    </p:extLst>
+  </p:cSld>
+  <p:clrMapOvr>
+    <a:masterClrMapping/>
+  </p:clrMapOvr>
+</p:notes>
+</file>
+
+<file path=ppt/notesSlides/notesSlide23.xml><?xml version="1.0" encoding="utf-8"?>
 <p:notes xmlns:a="http://schemas.openxmlformats.org/drawingml/2006/main" xmlns:r="http://schemas.openxmlformats.org/officeDocument/2006/relationships" xmlns:p="http://schemas.openxmlformats.org/presentationml/2006/main">
   <p:cSld>
     <p:spTree>
@@ -2555,7 +3097,175 @@
           <a:p>
             <a:fld id="{F7021451-1387-4CA6-816F-3879F97B5CBC}" type="slidenum">
               <a:rPr lang="en-US"/>
-              <a:t>21</a:t>
+              <a:t>23</a:t>
+            </a:fld>
+            <a:endParaRPr lang="en-US"/>
+          </a:p>
+        </p:txBody>
+      </p:sp>
+    </p:spTree>
+    <p:extLst>
+      <p:ext uri="{BB962C8B-B14F-4D97-AF65-F5344CB8AC3E}">
+        <p14:creationId xmlns:p14="http://schemas.microsoft.com/office/powerpoint/2010/main" val="1024086991"/>
+      </p:ext>
+    </p:extLst>
+  </p:cSld>
+  <p:clrMapOvr>
+    <a:masterClrMapping/>
+  </p:clrMapOvr>
+</p:notes>
+</file>
+
+<file path=ppt/notesSlides/notesSlide24.xml><?xml version="1.0" encoding="utf-8"?>
+<p:notes xmlns:a="http://schemas.openxmlformats.org/drawingml/2006/main" xmlns:r="http://schemas.openxmlformats.org/officeDocument/2006/relationships" xmlns:p="http://schemas.openxmlformats.org/presentationml/2006/main">
+  <p:cSld>
+    <p:spTree>
+      <p:nvGrpSpPr>
+        <p:cNvPr id="1" name=""/>
+        <p:cNvGrpSpPr/>
+        <p:nvPr/>
+      </p:nvGrpSpPr>
+      <p:grpSpPr>
+        <a:xfrm>
+          <a:off x="0" y="0"/>
+          <a:ext cx="0" cy="0"/>
+          <a:chOff x="0" y="0"/>
+          <a:chExt cx="0" cy="0"/>
+        </a:xfrm>
+      </p:grpSpPr>
+      <p:sp>
+        <p:nvSpPr>
+          <p:cNvPr id="2" name="Slide Image Placeholder 1"/>
+          <p:cNvSpPr>
+            <a:spLocks noGrp="1" noRot="1" noChangeAspect="1"/>
+          </p:cNvSpPr>
+          <p:nvPr>
+            <p:ph type="sldImg"/>
+          </p:nvPr>
+        </p:nvSpPr>
+        <p:spPr/>
+      </p:sp>
+      <p:sp>
+        <p:nvSpPr>
+          <p:cNvPr id="3" name="Notes Placeholder 2"/>
+          <p:cNvSpPr>
+            <a:spLocks noGrp="1"/>
+          </p:cNvSpPr>
+          <p:nvPr>
+            <p:ph type="body" idx="1"/>
+          </p:nvPr>
+        </p:nvSpPr>
+        <p:spPr/>
+        <p:txBody>
+          <a:bodyPr/>
+          <a:lstStyle/>
+          <a:p>
+            <a:endParaRPr lang="en-US" dirty="0"/>
+          </a:p>
+        </p:txBody>
+      </p:sp>
+      <p:sp>
+        <p:nvSpPr>
+          <p:cNvPr id="4" name="Slide Number Placeholder 3"/>
+          <p:cNvSpPr>
+            <a:spLocks noGrp="1"/>
+          </p:cNvSpPr>
+          <p:nvPr>
+            <p:ph type="sldNum" sz="quarter" idx="10"/>
+          </p:nvPr>
+        </p:nvSpPr>
+        <p:spPr/>
+        <p:txBody>
+          <a:bodyPr/>
+          <a:lstStyle/>
+          <a:p>
+            <a:fld id="{F7021451-1387-4CA6-816F-3879F97B5CBC}" type="slidenum">
+              <a:rPr lang="en-US"/>
+              <a:t>24</a:t>
+            </a:fld>
+            <a:endParaRPr lang="en-US"/>
+          </a:p>
+        </p:txBody>
+      </p:sp>
+    </p:spTree>
+    <p:extLst>
+      <p:ext uri="{BB962C8B-B14F-4D97-AF65-F5344CB8AC3E}">
+        <p14:creationId xmlns:p14="http://schemas.microsoft.com/office/powerpoint/2010/main" val="1024086991"/>
+      </p:ext>
+    </p:extLst>
+  </p:cSld>
+  <p:clrMapOvr>
+    <a:masterClrMapping/>
+  </p:clrMapOvr>
+</p:notes>
+</file>
+
+<file path=ppt/notesSlides/notesSlide25.xml><?xml version="1.0" encoding="utf-8"?>
+<p:notes xmlns:a="http://schemas.openxmlformats.org/drawingml/2006/main" xmlns:r="http://schemas.openxmlformats.org/officeDocument/2006/relationships" xmlns:p="http://schemas.openxmlformats.org/presentationml/2006/main">
+  <p:cSld>
+    <p:spTree>
+      <p:nvGrpSpPr>
+        <p:cNvPr id="1" name=""/>
+        <p:cNvGrpSpPr/>
+        <p:nvPr/>
+      </p:nvGrpSpPr>
+      <p:grpSpPr>
+        <a:xfrm>
+          <a:off x="0" y="0"/>
+          <a:ext cx="0" cy="0"/>
+          <a:chOff x="0" y="0"/>
+          <a:chExt cx="0" cy="0"/>
+        </a:xfrm>
+      </p:grpSpPr>
+      <p:sp>
+        <p:nvSpPr>
+          <p:cNvPr id="2" name="Slide Image Placeholder 1"/>
+          <p:cNvSpPr>
+            <a:spLocks noGrp="1" noRot="1" noChangeAspect="1"/>
+          </p:cNvSpPr>
+          <p:nvPr>
+            <p:ph type="sldImg"/>
+          </p:nvPr>
+        </p:nvSpPr>
+        <p:spPr/>
+      </p:sp>
+      <p:sp>
+        <p:nvSpPr>
+          <p:cNvPr id="3" name="Notes Placeholder 2"/>
+          <p:cNvSpPr>
+            <a:spLocks noGrp="1"/>
+          </p:cNvSpPr>
+          <p:nvPr>
+            <p:ph type="body" idx="1"/>
+          </p:nvPr>
+        </p:nvSpPr>
+        <p:spPr/>
+        <p:txBody>
+          <a:bodyPr/>
+          <a:lstStyle/>
+          <a:p>
+            <a:endParaRPr lang="en-US" dirty="0"/>
+          </a:p>
+        </p:txBody>
+      </p:sp>
+      <p:sp>
+        <p:nvSpPr>
+          <p:cNvPr id="4" name="Slide Number Placeholder 3"/>
+          <p:cNvSpPr>
+            <a:spLocks noGrp="1"/>
+          </p:cNvSpPr>
+          <p:nvPr>
+            <p:ph type="sldNum" sz="quarter" idx="10"/>
+          </p:nvPr>
+        </p:nvSpPr>
+        <p:spPr/>
+        <p:txBody>
+          <a:bodyPr/>
+          <a:lstStyle/>
+          <a:p>
+            <a:fld id="{F7021451-1387-4CA6-816F-3879F97B5CBC}" type="slidenum">
+              <a:rPr lang="en-US"/>
+              <a:t>25</a:t>
             </a:fld>
             <a:endParaRPr lang="en-US"/>
           </a:p>
@@ -6629,7 +7339,7 @@
                 <a:ea typeface="Trebuchet MS" pitchFamily="34" charset="-122"/>
                 <a:cs typeface="Trebuchet MS" pitchFamily="34" charset="-120"/>
               </a:rPr>
-              <a:t>Tracking Inventory</a:t>
+              <a:t>Station Inventory</a:t>
             </a:r>
             <a:endParaRPr lang="en-US" sz="2500" dirty="0"/>
           </a:p>
@@ -10551,20 +11261,122 @@
       </p:grpSpPr>
       <p:sp>
         <p:nvSpPr>
-          <p:cNvPr id="3" name="Text 1">
+          <p:cNvPr id="2" name="TextBox 1">
             <a:extLst>
               <a:ext uri="{FF2B5EF4-FFF2-40B4-BE49-F238E27FC236}">
-                <a16:creationId xmlns:a16="http://schemas.microsoft.com/office/drawing/2014/main" id="{6F07CB9C-216D-9601-8FA7-9190C5B665C6}"/>
+                <a16:creationId xmlns:a16="http://schemas.microsoft.com/office/drawing/2014/main" id="{50357D2B-085F-A3F0-6E04-D291BE599C23}"/>
               </a:ext>
             </a:extLst>
           </p:cNvPr>
-          <p:cNvSpPr/>
-          <p:nvPr/>
-        </p:nvSpPr>
-        <p:spPr>
-          <a:xfrm>
-            <a:off x="2723323" y="183874"/>
-            <a:ext cx="6152322" cy="413070"/>
+          <p:cNvSpPr txBox="1"/>
+          <p:nvPr/>
+        </p:nvSpPr>
+        <p:spPr>
+          <a:xfrm rot="16200000">
+            <a:off x="3133450" y="3584240"/>
+            <a:ext cx="1771490" cy="369332"/>
+          </a:xfrm>
+          <a:prstGeom prst="rect">
+            <a:avLst/>
+          </a:prstGeom>
+          <a:solidFill>
+            <a:schemeClr val="bg1">
+              <a:lumMod val="85000"/>
+            </a:schemeClr>
+          </a:solidFill>
+        </p:spPr>
+        <p:txBody>
+          <a:bodyPr wrap="square" rtlCol="0">
+            <a:spAutoFit/>
+          </a:bodyPr>
+          <a:lstStyle/>
+          <a:p>
+            <a:r>
+              <a:rPr lang="en-US" dirty="0"/>
+              <a:t>CSV Add</a:t>
+            </a:r>
+          </a:p>
+        </p:txBody>
+      </p:sp>
+      <p:sp>
+        <p:nvSpPr>
+          <p:cNvPr id="15" name="Shape 13">
+            <a:extLst>
+              <a:ext uri="{FF2B5EF4-FFF2-40B4-BE49-F238E27FC236}">
+                <a16:creationId xmlns:a16="http://schemas.microsoft.com/office/drawing/2014/main" id="{F8A32F2D-C68B-6847-5EDB-F0A9B520F25E}"/>
+              </a:ext>
+            </a:extLst>
+          </p:cNvPr>
+          <p:cNvSpPr/>
+          <p:nvPr/>
+        </p:nvSpPr>
+        <p:spPr>
+          <a:xfrm>
+            <a:off x="548640" y="4855464"/>
+            <a:ext cx="73152" cy="73152"/>
+          </a:xfrm>
+          <a:prstGeom prst="ellipse">
+            <a:avLst/>
+          </a:prstGeom>
+          <a:solidFill>
+            <a:srgbClr val="D81E2C"/>
+          </a:solidFill>
+          <a:ln/>
+        </p:spPr>
+        <p:txBody>
+          <a:bodyPr/>
+          <a:lstStyle/>
+          <a:p>
+            <a:pPr marL="0" marR="0" lvl="0" indent="0" algn="l" defTabSz="914400" rtl="0" eaLnBrk="1" fontAlgn="auto" latinLnBrk="0" hangingPunct="1">
+              <a:lnSpc>
+                <a:spcPct val="100000"/>
+              </a:lnSpc>
+              <a:spcBef>
+                <a:spcPts val="0"/>
+              </a:spcBef>
+              <a:spcAft>
+                <a:spcPts val="0"/>
+              </a:spcAft>
+              <a:buClrTx/>
+              <a:buSzTx/>
+              <a:buFontTx/>
+              <a:buNone/>
+              <a:tabLst/>
+              <a:defRPr/>
+            </a:pPr>
+            <a:endParaRPr kumimoji="0" lang="en-US" sz="1800" b="0" i="0" u="none" strike="noStrike" kern="1200" cap="none" spc="0" normalizeH="0" baseline="0" noProof="0">
+              <a:ln>
+                <a:noFill/>
+              </a:ln>
+              <a:solidFill>
+                <a:prstClr val="black"/>
+              </a:solidFill>
+              <a:effectLst/>
+              <a:uLnTx/>
+              <a:uFillTx/>
+              <a:latin typeface="Calibri" panose="020F0502020204030204"/>
+              <a:ea typeface="+mn-ea"/>
+              <a:cs typeface="+mn-cs"/>
+            </a:endParaRPr>
+          </a:p>
+        </p:txBody>
+      </p:sp>
+      <p:sp>
+        <p:nvSpPr>
+          <p:cNvPr id="16" name="Text 14">
+            <a:extLst>
+              <a:ext uri="{FF2B5EF4-FFF2-40B4-BE49-F238E27FC236}">
+                <a16:creationId xmlns:a16="http://schemas.microsoft.com/office/drawing/2014/main" id="{308844E4-AC26-B31F-459E-D50FB508B478}"/>
+              </a:ext>
+            </a:extLst>
+          </p:cNvPr>
+          <p:cNvSpPr/>
+          <p:nvPr/>
+        </p:nvSpPr>
+        <p:spPr>
+          <a:xfrm>
+            <a:off x="676656" y="4736592"/>
+            <a:ext cx="3657600" cy="292608"/>
           </a:xfrm>
           <a:prstGeom prst="rect">
             <a:avLst/>
@@ -10573,7 +11385,85 @@
           <a:ln/>
         </p:spPr>
         <p:txBody>
-          <a:bodyPr wrap="square" lIns="0" tIns="0" rIns="0" bIns="0" rtlCol="0" anchor="t"/>
+          <a:bodyPr wrap="square" lIns="0" tIns="0" rIns="0" bIns="0" rtlCol="0" anchor="ctr"/>
+          <a:lstStyle/>
+          <a:p>
+            <a:pPr marL="0" marR="0" lvl="0" indent="0" algn="l" defTabSz="914400" rtl="0" eaLnBrk="1" fontAlgn="auto" latinLnBrk="0" hangingPunct="1">
+              <a:lnSpc>
+                <a:spcPct val="100000"/>
+              </a:lnSpc>
+              <a:spcBef>
+                <a:spcPts val="0"/>
+              </a:spcBef>
+              <a:spcAft>
+                <a:spcPts val="0"/>
+              </a:spcAft>
+              <a:buClrTx/>
+              <a:buSzTx/>
+              <a:buFontTx/>
+              <a:buNone/>
+              <a:tabLst/>
+              <a:defRPr/>
+            </a:pPr>
+            <a:r>
+              <a:rPr kumimoji="0" lang="en-US" sz="950" b="0" i="0" u="none" strike="noStrike" kern="1200" cap="none" spc="0" normalizeH="0" baseline="0" noProof="0" dirty="0">
+                <a:ln>
+                  <a:noFill/>
+                </a:ln>
+                <a:solidFill>
+                  <a:srgbClr val="8A929C"/>
+                </a:solidFill>
+                <a:effectLst/>
+                <a:uLnTx/>
+                <a:uFillTx/>
+                <a:latin typeface="Calibri" pitchFamily="34" charset="0"/>
+                <a:ea typeface="Calibri" pitchFamily="34" charset="-122"/>
+                <a:cs typeface="Calibri" pitchFamily="34" charset="-120"/>
+              </a:rPr>
+              <a:t>EMS ReadyKit</a:t>
+            </a:r>
+            <a:endParaRPr kumimoji="0" lang="en-US" sz="950" b="0" i="0" u="none" strike="noStrike" kern="1200" cap="none" spc="0" normalizeH="0" baseline="0" noProof="0" dirty="0">
+              <a:ln>
+                <a:noFill/>
+              </a:ln>
+              <a:solidFill>
+                <a:prstClr val="black"/>
+              </a:solidFill>
+              <a:effectLst/>
+              <a:uLnTx/>
+              <a:uFillTx/>
+              <a:latin typeface="Calibri" panose="020F0502020204030204"/>
+              <a:ea typeface="+mn-ea"/>
+              <a:cs typeface="+mn-cs"/>
+            </a:endParaRPr>
+          </a:p>
+        </p:txBody>
+      </p:sp>
+      <p:sp>
+        <p:nvSpPr>
+          <p:cNvPr id="17" name="Text 15">
+            <a:extLst>
+              <a:ext uri="{FF2B5EF4-FFF2-40B4-BE49-F238E27FC236}">
+                <a16:creationId xmlns:a16="http://schemas.microsoft.com/office/drawing/2014/main" id="{25788A1D-1511-F1BB-3E4C-377FD35EDA4D}"/>
+              </a:ext>
+            </a:extLst>
+          </p:cNvPr>
+          <p:cNvSpPr/>
+          <p:nvPr/>
+        </p:nvSpPr>
+        <p:spPr>
+          <a:xfrm>
+            <a:off x="8138160" y="4736592"/>
+            <a:ext cx="457200" cy="292608"/>
+          </a:xfrm>
+          <a:prstGeom prst="rect">
+            <a:avLst/>
+          </a:prstGeom>
+          <a:noFill/>
+          <a:ln/>
+        </p:spPr>
+        <p:txBody>
+          <a:bodyPr wrap="square" lIns="0" tIns="0" rIns="0" bIns="0" rtlCol="0" anchor="ctr"/>
           <a:lstStyle/>
           <a:p>
             <a:pPr marL="0" marR="0" lvl="0" indent="0" algn="r" defTabSz="914400" rtl="0" eaLnBrk="1" fontAlgn="auto" latinLnBrk="0" hangingPunct="1">
@@ -10594,225 +11484,6 @@
               <a:defRPr/>
             </a:pPr>
             <a:r>
-              <a:rPr kumimoji="0" lang="en-US" sz="2500" b="1" i="0" u="none" strike="noStrike" kern="1200" cap="none" spc="0" normalizeH="0" baseline="0" noProof="0" dirty="0">
-                <a:ln>
-                  <a:noFill/>
-                </a:ln>
-                <a:solidFill>
-                  <a:srgbClr val="23262B"/>
-                </a:solidFill>
-                <a:effectLst/>
-                <a:uLnTx/>
-                <a:uFillTx/>
-                <a:latin typeface="Trebuchet MS" pitchFamily="34" charset="0"/>
-                <a:ea typeface="Trebuchet MS" pitchFamily="34" charset="-122"/>
-                <a:cs typeface="Trebuchet MS" pitchFamily="34" charset="-120"/>
-              </a:rPr>
-              <a:t>Station Administration - Members</a:t>
-            </a:r>
-            <a:endParaRPr kumimoji="0" lang="en-US" sz="2500" b="0" i="0" u="none" strike="noStrike" kern="1200" cap="none" spc="0" normalizeH="0" baseline="0" noProof="0" dirty="0">
-              <a:ln>
-                <a:noFill/>
-              </a:ln>
-              <a:solidFill>
-                <a:prstClr val="black"/>
-              </a:solidFill>
-              <a:effectLst/>
-              <a:uLnTx/>
-              <a:uFillTx/>
-              <a:latin typeface="Calibri" panose="020F0502020204030204"/>
-              <a:ea typeface="+mn-ea"/>
-              <a:cs typeface="+mn-cs"/>
-            </a:endParaRPr>
-          </a:p>
-        </p:txBody>
-      </p:sp>
-      <p:sp>
-        <p:nvSpPr>
-          <p:cNvPr id="15" name="Shape 13">
-            <a:extLst>
-              <a:ext uri="{FF2B5EF4-FFF2-40B4-BE49-F238E27FC236}">
-                <a16:creationId xmlns:a16="http://schemas.microsoft.com/office/drawing/2014/main" id="{F8A32F2D-C68B-6847-5EDB-F0A9B520F25E}"/>
-              </a:ext>
-            </a:extLst>
-          </p:cNvPr>
-          <p:cNvSpPr/>
-          <p:nvPr/>
-        </p:nvSpPr>
-        <p:spPr>
-          <a:xfrm>
-            <a:off x="548640" y="4855464"/>
-            <a:ext cx="73152" cy="73152"/>
-          </a:xfrm>
-          <a:prstGeom prst="ellipse">
-            <a:avLst/>
-          </a:prstGeom>
-          <a:solidFill>
-            <a:srgbClr val="D81E2C"/>
-          </a:solidFill>
-          <a:ln/>
-        </p:spPr>
-        <p:txBody>
-          <a:bodyPr/>
-          <a:lstStyle/>
-          <a:p>
-            <a:pPr marL="0" marR="0" lvl="0" indent="0" algn="l" defTabSz="914400" rtl="0" eaLnBrk="1" fontAlgn="auto" latinLnBrk="0" hangingPunct="1">
-              <a:lnSpc>
-                <a:spcPct val="100000"/>
-              </a:lnSpc>
-              <a:spcBef>
-                <a:spcPts val="0"/>
-              </a:spcBef>
-              <a:spcAft>
-                <a:spcPts val="0"/>
-              </a:spcAft>
-              <a:buClrTx/>
-              <a:buSzTx/>
-              <a:buFontTx/>
-              <a:buNone/>
-              <a:tabLst/>
-              <a:defRPr/>
-            </a:pPr>
-            <a:endParaRPr kumimoji="0" lang="en-US" sz="1800" b="0" i="0" u="none" strike="noStrike" kern="1200" cap="none" spc="0" normalizeH="0" baseline="0" noProof="0">
-              <a:ln>
-                <a:noFill/>
-              </a:ln>
-              <a:solidFill>
-                <a:prstClr val="black"/>
-              </a:solidFill>
-              <a:effectLst/>
-              <a:uLnTx/>
-              <a:uFillTx/>
-              <a:latin typeface="Calibri" panose="020F0502020204030204"/>
-              <a:ea typeface="+mn-ea"/>
-              <a:cs typeface="+mn-cs"/>
-            </a:endParaRPr>
-          </a:p>
-        </p:txBody>
-      </p:sp>
-      <p:sp>
-        <p:nvSpPr>
-          <p:cNvPr id="16" name="Text 14">
-            <a:extLst>
-              <a:ext uri="{FF2B5EF4-FFF2-40B4-BE49-F238E27FC236}">
-                <a16:creationId xmlns:a16="http://schemas.microsoft.com/office/drawing/2014/main" id="{308844E4-AC26-B31F-459E-D50FB508B478}"/>
-              </a:ext>
-            </a:extLst>
-          </p:cNvPr>
-          <p:cNvSpPr/>
-          <p:nvPr/>
-        </p:nvSpPr>
-        <p:spPr>
-          <a:xfrm>
-            <a:off x="676656" y="4736592"/>
-            <a:ext cx="3657600" cy="292608"/>
-          </a:xfrm>
-          <a:prstGeom prst="rect">
-            <a:avLst/>
-          </a:prstGeom>
-          <a:noFill/>
-          <a:ln/>
-        </p:spPr>
-        <p:txBody>
-          <a:bodyPr wrap="square" lIns="0" tIns="0" rIns="0" bIns="0" rtlCol="0" anchor="ctr"/>
-          <a:lstStyle/>
-          <a:p>
-            <a:pPr marL="0" marR="0" lvl="0" indent="0" algn="l" defTabSz="914400" rtl="0" eaLnBrk="1" fontAlgn="auto" latinLnBrk="0" hangingPunct="1">
-              <a:lnSpc>
-                <a:spcPct val="100000"/>
-              </a:lnSpc>
-              <a:spcBef>
-                <a:spcPts val="0"/>
-              </a:spcBef>
-              <a:spcAft>
-                <a:spcPts val="0"/>
-              </a:spcAft>
-              <a:buClrTx/>
-              <a:buSzTx/>
-              <a:buFontTx/>
-              <a:buNone/>
-              <a:tabLst/>
-              <a:defRPr/>
-            </a:pPr>
-            <a:r>
-              <a:rPr kumimoji="0" lang="en-US" sz="950" b="0" i="0" u="none" strike="noStrike" kern="1200" cap="none" spc="0" normalizeH="0" baseline="0" noProof="0" dirty="0">
-                <a:ln>
-                  <a:noFill/>
-                </a:ln>
-                <a:solidFill>
-                  <a:srgbClr val="8A929C"/>
-                </a:solidFill>
-                <a:effectLst/>
-                <a:uLnTx/>
-                <a:uFillTx/>
-                <a:latin typeface="Calibri" pitchFamily="34" charset="0"/>
-                <a:ea typeface="Calibri" pitchFamily="34" charset="-122"/>
-                <a:cs typeface="Calibri" pitchFamily="34" charset="-120"/>
-              </a:rPr>
-              <a:t>EMS ReadyKit</a:t>
-            </a:r>
-            <a:endParaRPr kumimoji="0" lang="en-US" sz="950" b="0" i="0" u="none" strike="noStrike" kern="1200" cap="none" spc="0" normalizeH="0" baseline="0" noProof="0" dirty="0">
-              <a:ln>
-                <a:noFill/>
-              </a:ln>
-              <a:solidFill>
-                <a:prstClr val="black"/>
-              </a:solidFill>
-              <a:effectLst/>
-              <a:uLnTx/>
-              <a:uFillTx/>
-              <a:latin typeface="Calibri" panose="020F0502020204030204"/>
-              <a:ea typeface="+mn-ea"/>
-              <a:cs typeface="+mn-cs"/>
-            </a:endParaRPr>
-          </a:p>
-        </p:txBody>
-      </p:sp>
-      <p:sp>
-        <p:nvSpPr>
-          <p:cNvPr id="17" name="Text 15">
-            <a:extLst>
-              <a:ext uri="{FF2B5EF4-FFF2-40B4-BE49-F238E27FC236}">
-                <a16:creationId xmlns:a16="http://schemas.microsoft.com/office/drawing/2014/main" id="{25788A1D-1511-F1BB-3E4C-377FD35EDA4D}"/>
-              </a:ext>
-            </a:extLst>
-          </p:cNvPr>
-          <p:cNvSpPr/>
-          <p:nvPr/>
-        </p:nvSpPr>
-        <p:spPr>
-          <a:xfrm>
-            <a:off x="8138160" y="4736592"/>
-            <a:ext cx="457200" cy="292608"/>
-          </a:xfrm>
-          <a:prstGeom prst="rect">
-            <a:avLst/>
-          </a:prstGeom>
-          <a:noFill/>
-          <a:ln/>
-        </p:spPr>
-        <p:txBody>
-          <a:bodyPr wrap="square" lIns="0" tIns="0" rIns="0" bIns="0" rtlCol="0" anchor="ctr"/>
-          <a:lstStyle/>
-          <a:p>
-            <a:pPr marL="0" marR="0" lvl="0" indent="0" algn="r" defTabSz="914400" rtl="0" eaLnBrk="1" fontAlgn="auto" latinLnBrk="0" hangingPunct="1">
-              <a:lnSpc>
-                <a:spcPct val="100000"/>
-              </a:lnSpc>
-              <a:spcBef>
-                <a:spcPts val="0"/>
-              </a:spcBef>
-              <a:spcAft>
-                <a:spcPts val="0"/>
-              </a:spcAft>
-              <a:buClrTx/>
-              <a:buSzTx/>
-              <a:buFontTx/>
-              <a:buNone/>
-              <a:tabLst/>
-              <a:defRPr/>
-            </a:pPr>
-            <a:r>
               <a:rPr kumimoji="0" lang="en-US" sz="950" b="0" i="0" u="none" strike="noStrike" kern="1200" cap="none" spc="0" normalizeH="0" baseline="0" noProof="0" dirty="0">
                 <a:ln>
                   <a:noFill/>
@@ -10868,7 +11539,7 @@
         </p:blipFill>
         <p:spPr>
           <a:xfrm>
-            <a:off x="2337744" y="819471"/>
+            <a:off x="4203860" y="819471"/>
             <a:ext cx="1975839" cy="3835180"/>
           </a:xfrm>
           <a:prstGeom prst="rect">
@@ -10908,7 +11579,7 @@
         </p:blipFill>
         <p:spPr>
           <a:xfrm>
-            <a:off x="4757435" y="819471"/>
+            <a:off x="6623551" y="819471"/>
             <a:ext cx="1975839" cy="3839575"/>
           </a:xfrm>
           <a:prstGeom prst="rect">
@@ -10940,7 +11611,7 @@
         </p:nvSpPr>
         <p:spPr>
           <a:xfrm>
-            <a:off x="3433109" y="590007"/>
+            <a:off x="5299225" y="590007"/>
             <a:ext cx="861391" cy="182880"/>
           </a:xfrm>
           <a:prstGeom prst="roundRect">
@@ -11026,7 +11697,7 @@
         </p:nvSpPr>
         <p:spPr>
           <a:xfrm>
-            <a:off x="5871883" y="612600"/>
+            <a:off x="7737999" y="612600"/>
             <a:ext cx="861391" cy="182880"/>
           </a:xfrm>
           <a:prstGeom prst="roundRect">
@@ -11095,6 +11766,239 @@
               </a:rPr>
               <a:t>Supervisor</a:t>
             </a:r>
+          </a:p>
+        </p:txBody>
+      </p:sp>
+      <p:sp>
+        <p:nvSpPr>
+          <p:cNvPr id="4" name="TextBox 3">
+            <a:extLst>
+              <a:ext uri="{FF2B5EF4-FFF2-40B4-BE49-F238E27FC236}">
+                <a16:creationId xmlns:a16="http://schemas.microsoft.com/office/drawing/2014/main" id="{D91680A7-E187-E23D-C1D1-76151C66F857}"/>
+              </a:ext>
+            </a:extLst>
+          </p:cNvPr>
+          <p:cNvSpPr txBox="1"/>
+          <p:nvPr/>
+        </p:nvSpPr>
+        <p:spPr>
+          <a:xfrm rot="16200000">
+            <a:off x="3133449" y="1730808"/>
+            <a:ext cx="1771490" cy="369332"/>
+          </a:xfrm>
+          <a:prstGeom prst="rect">
+            <a:avLst/>
+          </a:prstGeom>
+          <a:solidFill>
+            <a:schemeClr val="bg1">
+              <a:lumMod val="85000"/>
+            </a:schemeClr>
+          </a:solidFill>
+        </p:spPr>
+        <p:txBody>
+          <a:bodyPr wrap="square" rtlCol="0">
+            <a:spAutoFit/>
+          </a:bodyPr>
+          <a:lstStyle/>
+          <a:p>
+            <a:r>
+              <a:rPr lang="en-US" dirty="0"/>
+              <a:t>Individual Add</a:t>
+            </a:r>
+          </a:p>
+        </p:txBody>
+      </p:sp>
+      <p:sp>
+        <p:nvSpPr>
+          <p:cNvPr id="5" name="Text 1">
+            <a:extLst>
+              <a:ext uri="{FF2B5EF4-FFF2-40B4-BE49-F238E27FC236}">
+                <a16:creationId xmlns:a16="http://schemas.microsoft.com/office/drawing/2014/main" id="{24B7AE2B-FA6A-09B5-DCC0-A2DB908B30BF}"/>
+              </a:ext>
+            </a:extLst>
+          </p:cNvPr>
+          <p:cNvSpPr/>
+          <p:nvPr/>
+        </p:nvSpPr>
+        <p:spPr>
+          <a:xfrm>
+            <a:off x="302311" y="749808"/>
+            <a:ext cx="3291840" cy="868680"/>
+          </a:xfrm>
+          <a:prstGeom prst="rect">
+            <a:avLst/>
+          </a:prstGeom>
+          <a:noFill/>
+          <a:ln/>
+        </p:spPr>
+        <p:txBody>
+          <a:bodyPr wrap="square" lIns="0" tIns="0" rIns="0" bIns="0" rtlCol="0" anchor="t"/>
+          <a:lstStyle/>
+          <a:p>
+            <a:pPr marL="0" indent="0" algn="l">
+              <a:lnSpc>
+                <a:spcPct val="100000"/>
+              </a:lnSpc>
+              <a:buNone/>
+            </a:pPr>
+            <a:r>
+              <a:rPr lang="en-US" sz="2500" b="1" dirty="0">
+                <a:solidFill>
+                  <a:srgbClr val="23262B"/>
+                </a:solidFill>
+                <a:latin typeface="Trebuchet MS" pitchFamily="34" charset="0"/>
+                <a:ea typeface="Trebuchet MS" pitchFamily="34" charset="-122"/>
+                <a:cs typeface="Trebuchet MS" pitchFamily="34" charset="-120"/>
+              </a:rPr>
+              <a:t>Members</a:t>
+            </a:r>
+            <a:endParaRPr lang="en-US" sz="2500" dirty="0"/>
+          </a:p>
+        </p:txBody>
+      </p:sp>
+      <p:sp>
+        <p:nvSpPr>
+          <p:cNvPr id="6" name="Text 2">
+            <a:extLst>
+              <a:ext uri="{FF2B5EF4-FFF2-40B4-BE49-F238E27FC236}">
+                <a16:creationId xmlns:a16="http://schemas.microsoft.com/office/drawing/2014/main" id="{84BABF80-244E-9F91-3113-0642F72DAF81}"/>
+              </a:ext>
+            </a:extLst>
+          </p:cNvPr>
+          <p:cNvSpPr/>
+          <p:nvPr/>
+        </p:nvSpPr>
+        <p:spPr>
+          <a:xfrm>
+            <a:off x="302311" y="1691640"/>
+            <a:ext cx="3291840" cy="685800"/>
+          </a:xfrm>
+          <a:prstGeom prst="rect">
+            <a:avLst/>
+          </a:prstGeom>
+          <a:noFill/>
+          <a:ln/>
+        </p:spPr>
+        <p:txBody>
+          <a:bodyPr wrap="square" lIns="0" tIns="0" rIns="0" bIns="0" rtlCol="0" anchor="t"/>
+          <a:lstStyle/>
+          <a:p>
+            <a:pPr marL="0" indent="0" algn="l">
+              <a:lnSpc>
+                <a:spcPct val="112000"/>
+              </a:lnSpc>
+              <a:buNone/>
+            </a:pPr>
+            <a:r>
+              <a:rPr lang="en-US" sz="1300" dirty="0">
+                <a:solidFill>
+                  <a:srgbClr val="555E6B"/>
+                </a:solidFill>
+                <a:latin typeface="Calibri" pitchFamily="34" charset="0"/>
+                <a:ea typeface="Calibri" pitchFamily="34" charset="-122"/>
+                <a:cs typeface="Calibri" pitchFamily="34" charset="-120"/>
+              </a:rPr>
+              <a:t>Members can be added individually or using a CSV template when setting up a station.</a:t>
+            </a:r>
+            <a:endParaRPr lang="en-US" sz="1300" dirty="0"/>
+          </a:p>
+        </p:txBody>
+      </p:sp>
+      <p:sp>
+        <p:nvSpPr>
+          <p:cNvPr id="8" name="Text 3">
+            <a:extLst>
+              <a:ext uri="{FF2B5EF4-FFF2-40B4-BE49-F238E27FC236}">
+                <a16:creationId xmlns:a16="http://schemas.microsoft.com/office/drawing/2014/main" id="{74E9EA96-FA60-6087-3DB9-20827A3CEE5D}"/>
+              </a:ext>
+            </a:extLst>
+          </p:cNvPr>
+          <p:cNvSpPr/>
+          <p:nvPr/>
+        </p:nvSpPr>
+        <p:spPr>
+          <a:xfrm>
+            <a:off x="302311" y="2468880"/>
+            <a:ext cx="3291840" cy="2011680"/>
+          </a:xfrm>
+          <a:prstGeom prst="rect">
+            <a:avLst/>
+          </a:prstGeom>
+          <a:noFill/>
+          <a:ln/>
+        </p:spPr>
+        <p:txBody>
+          <a:bodyPr wrap="square" lIns="0" tIns="0" rIns="0" bIns="0" rtlCol="0" anchor="t"/>
+          <a:lstStyle/>
+          <a:p>
+            <a:pPr marL="177800" indent="-177800" algn="l">
+              <a:spcAft>
+                <a:spcPts val="800"/>
+              </a:spcAft>
+              <a:buSzPct val="100000"/>
+              <a:buChar char="–"/>
+            </a:pPr>
+            <a:r>
+              <a:rPr lang="en-US" sz="1250" dirty="0">
+                <a:solidFill>
+                  <a:srgbClr val="23262B"/>
+                </a:solidFill>
+                <a:latin typeface="Calibri" pitchFamily="34" charset="0"/>
+                <a:ea typeface="Calibri" pitchFamily="34" charset="-122"/>
+                <a:cs typeface="Calibri" pitchFamily="34" charset="-120"/>
+              </a:rPr>
+              <a:t>Central dashboard for member management</a:t>
+            </a:r>
+            <a:endParaRPr lang="en-US" sz="1250" dirty="0"/>
+          </a:p>
+          <a:p>
+            <a:pPr marL="177800" indent="-177800" algn="l">
+              <a:spcAft>
+                <a:spcPts val="800"/>
+              </a:spcAft>
+              <a:buSzPct val="100000"/>
+              <a:buChar char="–"/>
+            </a:pPr>
+            <a:r>
+              <a:rPr lang="en-US" sz="1250" dirty="0">
+                <a:solidFill>
+                  <a:srgbClr val="23262B"/>
+                </a:solidFill>
+                <a:latin typeface="Calibri" pitchFamily="34" charset="0"/>
+                <a:ea typeface="Calibri" pitchFamily="34" charset="-122"/>
+                <a:cs typeface="Calibri" pitchFamily="34" charset="-120"/>
+              </a:rPr>
+              <a:t>Can assign multiple roles per user</a:t>
+            </a:r>
+          </a:p>
+          <a:p>
+            <a:pPr marL="177800" indent="-177800" algn="l">
+              <a:spcAft>
+                <a:spcPts val="800"/>
+              </a:spcAft>
+              <a:buSzPct val="100000"/>
+              <a:buChar char="–"/>
+            </a:pPr>
+            <a:r>
+              <a:rPr lang="en-US" sz="1250" dirty="0">
+                <a:solidFill>
+                  <a:srgbClr val="23262B"/>
+                </a:solidFill>
+                <a:latin typeface="Calibri" pitchFamily="34" charset="0"/>
+                <a:ea typeface="Calibri" pitchFamily="34" charset="-122"/>
+                <a:cs typeface="Calibri" pitchFamily="34" charset="-120"/>
+              </a:rPr>
+              <a:t>Emails must be unique per user. </a:t>
+            </a:r>
+          </a:p>
+          <a:p>
+            <a:pPr algn="l">
+              <a:spcAft>
+                <a:spcPts val="800"/>
+              </a:spcAft>
+              <a:buSzPct val="100000"/>
+            </a:pPr>
+            <a:endParaRPr lang="en-US" sz="1250" dirty="0"/>
           </a:p>
         </p:txBody>
       </p:sp>
@@ -11144,6 +12048,84 @@
       </p:grpSpPr>
       <p:sp>
         <p:nvSpPr>
+          <p:cNvPr id="22" name="TextBox 21">
+            <a:extLst>
+              <a:ext uri="{FF2B5EF4-FFF2-40B4-BE49-F238E27FC236}">
+                <a16:creationId xmlns:a16="http://schemas.microsoft.com/office/drawing/2014/main" id="{B6A02FD4-A8D8-C3DC-639B-1F2546F2094C}"/>
+              </a:ext>
+            </a:extLst>
+          </p:cNvPr>
+          <p:cNvSpPr txBox="1"/>
+          <p:nvPr/>
+        </p:nvSpPr>
+        <p:spPr>
+          <a:xfrm rot="16200000">
+            <a:off x="4258699" y="2742787"/>
+            <a:ext cx="3081572" cy="369332"/>
+          </a:xfrm>
+          <a:prstGeom prst="rect">
+            <a:avLst/>
+          </a:prstGeom>
+          <a:solidFill>
+            <a:schemeClr val="bg1">
+              <a:lumMod val="85000"/>
+            </a:schemeClr>
+          </a:solidFill>
+        </p:spPr>
+        <p:txBody>
+          <a:bodyPr wrap="square" rtlCol="0">
+            <a:spAutoFit/>
+          </a:bodyPr>
+          <a:lstStyle/>
+          <a:p>
+            <a:r>
+              <a:rPr lang="en-US" dirty="0"/>
+              <a:t>Location assignment</a:t>
+            </a:r>
+          </a:p>
+        </p:txBody>
+      </p:sp>
+      <p:sp>
+        <p:nvSpPr>
+          <p:cNvPr id="14" name="TextBox 13">
+            <a:extLst>
+              <a:ext uri="{FF2B5EF4-FFF2-40B4-BE49-F238E27FC236}">
+                <a16:creationId xmlns:a16="http://schemas.microsoft.com/office/drawing/2014/main" id="{19295E02-1763-C202-4D07-AE44E412FF0B}"/>
+              </a:ext>
+            </a:extLst>
+          </p:cNvPr>
+          <p:cNvSpPr txBox="1"/>
+          <p:nvPr/>
+        </p:nvSpPr>
+        <p:spPr>
+          <a:xfrm rot="16200000">
+            <a:off x="2332708" y="3762848"/>
+            <a:ext cx="1184987" cy="369332"/>
+          </a:xfrm>
+          <a:prstGeom prst="rect">
+            <a:avLst/>
+          </a:prstGeom>
+          <a:solidFill>
+            <a:schemeClr val="bg1">
+              <a:lumMod val="85000"/>
+            </a:schemeClr>
+          </a:solidFill>
+        </p:spPr>
+        <p:txBody>
+          <a:bodyPr wrap="square" rtlCol="0">
+            <a:spAutoFit/>
+          </a:bodyPr>
+          <a:lstStyle/>
+          <a:p>
+            <a:r>
+              <a:rPr lang="en-US" dirty="0"/>
+              <a:t>Location</a:t>
+            </a:r>
+          </a:p>
+        </p:txBody>
+      </p:sp>
+      <p:sp>
+        <p:nvSpPr>
           <p:cNvPr id="3" name="Text 1">
             <a:extLst>
               <a:ext uri="{FF2B5EF4-FFF2-40B4-BE49-F238E27FC236}">
@@ -11439,46 +12421,6 @@
           </a:p>
         </p:txBody>
       </p:sp>
-      <p:pic>
-        <p:nvPicPr>
-          <p:cNvPr id="9" name="Picture 8">
-            <a:extLst>
-              <a:ext uri="{FF2B5EF4-FFF2-40B4-BE49-F238E27FC236}">
-                <a16:creationId xmlns:a16="http://schemas.microsoft.com/office/drawing/2014/main" id="{E586FB66-9975-14FB-800B-921566FE5FF1}"/>
-              </a:ext>
-            </a:extLst>
-          </p:cNvPr>
-          <p:cNvPicPr>
-            <a:picLocks noChangeAspect="1"/>
-          </p:cNvPicPr>
-          <p:nvPr/>
-        </p:nvPicPr>
-        <p:blipFill>
-          <a:blip r:embed="rId3"/>
-          <a:stretch>
-            <a:fillRect/>
-          </a:stretch>
-        </p:blipFill>
-        <p:spPr>
-          <a:xfrm>
-            <a:off x="4757435" y="819471"/>
-            <a:ext cx="1975839" cy="3839575"/>
-          </a:xfrm>
-          <a:prstGeom prst="rect">
-            <a:avLst/>
-          </a:prstGeom>
-          <a:ln>
-            <a:noFill/>
-          </a:ln>
-          <a:effectLst>
-            <a:outerShdw blurRad="292100" dist="139700" dir="2700000" algn="tl" rotWithShape="0">
-              <a:srgbClr val="333333">
-                <a:alpha val="65000"/>
-              </a:srgbClr>
-            </a:outerShdw>
-          </a:effectLst>
-        </p:spPr>
-      </p:pic>
       <p:sp>
         <p:nvSpPr>
           <p:cNvPr id="10" name="Rectangle: Rounded Corners 9">
@@ -11579,7 +12521,7 @@
         </p:nvSpPr>
         <p:spPr>
           <a:xfrm>
-            <a:off x="5871883" y="612600"/>
+            <a:off x="4217389" y="600211"/>
             <a:ext cx="861391" cy="182880"/>
           </a:xfrm>
           <a:prstGeom prst="roundRect">
@@ -11666,6 +12608,46 @@
           <p:nvPr/>
         </p:nvPicPr>
         <p:blipFill>
+          <a:blip r:embed="rId3"/>
+          <a:stretch>
+            <a:fillRect/>
+          </a:stretch>
+        </p:blipFill>
+        <p:spPr>
+          <a:xfrm>
+            <a:off x="354268" y="819472"/>
+            <a:ext cx="1950250" cy="3835180"/>
+          </a:xfrm>
+          <a:prstGeom prst="rect">
+            <a:avLst/>
+          </a:prstGeom>
+          <a:ln>
+            <a:noFill/>
+          </a:ln>
+          <a:effectLst>
+            <a:outerShdw blurRad="292100" dist="139700" dir="2700000" algn="tl" rotWithShape="0">
+              <a:srgbClr val="333333">
+                <a:alpha val="65000"/>
+              </a:srgbClr>
+            </a:outerShdw>
+          </a:effectLst>
+        </p:spPr>
+      </p:pic>
+      <p:pic>
+        <p:nvPicPr>
+          <p:cNvPr id="5" name="Picture 4">
+            <a:extLst>
+              <a:ext uri="{FF2B5EF4-FFF2-40B4-BE49-F238E27FC236}">
+                <a16:creationId xmlns:a16="http://schemas.microsoft.com/office/drawing/2014/main" id="{9BBD90FB-0966-B03E-0EC6-9073A90246B4}"/>
+              </a:ext>
+            </a:extLst>
+          </p:cNvPr>
+          <p:cNvPicPr>
+            <a:picLocks noChangeAspect="1"/>
+          </p:cNvPicPr>
+          <p:nvPr/>
+        </p:nvPicPr>
+        <p:blipFill>
           <a:blip r:embed="rId4"/>
           <a:stretch>
             <a:fillRect/>
@@ -11673,8 +12655,316 @@
         </p:blipFill>
         <p:spPr>
           <a:xfrm>
-            <a:off x="354268" y="819472"/>
-            <a:ext cx="1950250" cy="3835180"/>
+            <a:off x="3109868" y="819472"/>
+            <a:ext cx="1968912" cy="3835180"/>
+          </a:xfrm>
+          <a:prstGeom prst="rect">
+            <a:avLst/>
+          </a:prstGeom>
+          <a:ln>
+            <a:noFill/>
+          </a:ln>
+          <a:effectLst>
+            <a:outerShdw blurRad="292100" dist="139700" dir="2700000" algn="tl" rotWithShape="0">
+              <a:srgbClr val="333333">
+                <a:alpha val="65000"/>
+              </a:srgbClr>
+            </a:outerShdw>
+          </a:effectLst>
+        </p:spPr>
+      </p:pic>
+      <p:grpSp>
+        <p:nvGrpSpPr>
+          <p:cNvPr id="6" name="Group 5">
+            <a:extLst>
+              <a:ext uri="{FF2B5EF4-FFF2-40B4-BE49-F238E27FC236}">
+                <a16:creationId xmlns:a16="http://schemas.microsoft.com/office/drawing/2014/main" id="{E5A75756-A247-3433-02B3-B94FE3E16C73}"/>
+              </a:ext>
+            </a:extLst>
+          </p:cNvPr>
+          <p:cNvGrpSpPr/>
+          <p:nvPr/>
+        </p:nvGrpSpPr>
+        <p:grpSpPr>
+          <a:xfrm>
+            <a:off x="3788728" y="1254211"/>
+            <a:ext cx="305596" cy="539287"/>
+            <a:chOff x="1205000" y="3935000"/>
+            <a:chExt cx="323000" cy="570000"/>
+          </a:xfrm>
+        </p:grpSpPr>
+        <p:sp>
+          <p:nvSpPr>
+            <p:cNvPr id="7" name="Click Line 1">
+              <a:extLst>
+                <a:ext uri="{FF2B5EF4-FFF2-40B4-BE49-F238E27FC236}">
+                  <a16:creationId xmlns:a16="http://schemas.microsoft.com/office/drawing/2014/main" id="{9F4F9236-0C05-1409-8E56-4B6CE655C15B}"/>
+                </a:ext>
+              </a:extLst>
+            </p:cNvPr>
+            <p:cNvSpPr/>
+            <p:nvPr/>
+          </p:nvSpPr>
+          <p:spPr>
+            <a:xfrm>
+              <a:off x="1300000" y="3935000"/>
+              <a:ext cx="1" cy="70000"/>
+            </a:xfrm>
+            <a:prstGeom prst="line">
+              <a:avLst/>
+            </a:prstGeom>
+            <a:ln w="22000" cap="rnd">
+              <a:solidFill>
+                <a:schemeClr val="tx1"/>
+              </a:solidFill>
+            </a:ln>
+          </p:spPr>
+          <p:txBody>
+            <a:bodyPr/>
+            <a:lstStyle/>
+            <a:p>
+              <a:endParaRPr lang="en-US"/>
+            </a:p>
+          </p:txBody>
+        </p:sp>
+        <p:sp>
+          <p:nvSpPr>
+            <p:cNvPr id="8" name="Click Line 2">
+              <a:extLst>
+                <a:ext uri="{FF2B5EF4-FFF2-40B4-BE49-F238E27FC236}">
+                  <a16:creationId xmlns:a16="http://schemas.microsoft.com/office/drawing/2014/main" id="{3B373988-7E6C-FEBB-5E79-F5E0D9E14B92}"/>
+                </a:ext>
+              </a:extLst>
+            </p:cNvPr>
+            <p:cNvSpPr/>
+            <p:nvPr/>
+          </p:nvSpPr>
+          <p:spPr>
+            <a:xfrm flipH="1">
+              <a:off x="1205000" y="3960000"/>
+              <a:ext cx="55000" cy="55000"/>
+            </a:xfrm>
+            <a:prstGeom prst="line">
+              <a:avLst/>
+            </a:prstGeom>
+            <a:ln w="22000" cap="rnd">
+              <a:solidFill>
+                <a:schemeClr val="tx1"/>
+              </a:solidFill>
+            </a:ln>
+          </p:spPr>
+          <p:txBody>
+            <a:bodyPr/>
+            <a:lstStyle/>
+            <a:p>
+              <a:endParaRPr lang="en-US"/>
+            </a:p>
+          </p:txBody>
+        </p:sp>
+        <p:sp>
+          <p:nvSpPr>
+            <p:cNvPr id="12" name="Click Line 3">
+              <a:extLst>
+                <a:ext uri="{FF2B5EF4-FFF2-40B4-BE49-F238E27FC236}">
+                  <a16:creationId xmlns:a16="http://schemas.microsoft.com/office/drawing/2014/main" id="{8705E890-53CB-2B2F-1DDF-6D60C21C6563}"/>
+                </a:ext>
+              </a:extLst>
+            </p:cNvPr>
+            <p:cNvSpPr/>
+            <p:nvPr/>
+          </p:nvSpPr>
+          <p:spPr>
+            <a:xfrm>
+              <a:off x="1345000" y="3960000"/>
+              <a:ext cx="55000" cy="55000"/>
+            </a:xfrm>
+            <a:prstGeom prst="line">
+              <a:avLst/>
+            </a:prstGeom>
+            <a:ln w="22000" cap="rnd">
+              <a:solidFill>
+                <a:schemeClr val="tx1"/>
+              </a:solidFill>
+            </a:ln>
+          </p:spPr>
+          <p:txBody>
+            <a:bodyPr/>
+            <a:lstStyle/>
+            <a:p>
+              <a:endParaRPr lang="en-US"/>
+            </a:p>
+          </p:txBody>
+        </p:sp>
+        <p:sp>
+          <p:nvSpPr>
+            <p:cNvPr id="13" name="Click Cursor">
+              <a:extLst>
+                <a:ext uri="{FF2B5EF4-FFF2-40B4-BE49-F238E27FC236}">
+                  <a16:creationId xmlns:a16="http://schemas.microsoft.com/office/drawing/2014/main" id="{26678928-F626-503D-8FF9-FB3604D2765C}"/>
+                </a:ext>
+              </a:extLst>
+            </p:cNvPr>
+            <p:cNvSpPr/>
+            <p:nvPr/>
+          </p:nvSpPr>
+          <p:spPr>
+            <a:xfrm>
+              <a:off x="1300000" y="4075000"/>
+              <a:ext cx="228000" cy="430000"/>
+            </a:xfrm>
+            <a:custGeom>
+              <a:avLst/>
+              <a:gdLst/>
+              <a:ahLst/>
+              <a:cxnLst/>
+              <a:rect l="0" t="0" r="0" b="0"/>
+              <a:pathLst>
+                <a:path w="980" h="1850">
+                  <a:moveTo>
+                    <a:pt x="0" y="0"/>
+                  </a:moveTo>
+                  <a:lnTo>
+                    <a:pt x="0" y="1600"/>
+                  </a:lnTo>
+                  <a:lnTo>
+                    <a:pt x="370" y="1230"/>
+                  </a:lnTo>
+                  <a:lnTo>
+                    <a:pt x="590" y="1850"/>
+                  </a:lnTo>
+                  <a:lnTo>
+                    <a:pt x="790" y="1770"/>
+                  </a:lnTo>
+                  <a:lnTo>
+                    <a:pt x="570" y="1150"/>
+                  </a:lnTo>
+                  <a:lnTo>
+                    <a:pt x="980" y="1150"/>
+                  </a:lnTo>
+                  <a:close/>
+                </a:path>
+              </a:pathLst>
+            </a:custGeom>
+            <a:solidFill>
+              <a:srgbClr val="23262B"/>
+            </a:solidFill>
+            <a:ln w="19050">
+              <a:solidFill>
+                <a:schemeClr val="bg1"/>
+              </a:solidFill>
+            </a:ln>
+          </p:spPr>
+          <p:txBody>
+            <a:bodyPr/>
+            <a:lstStyle/>
+            <a:p>
+              <a:endParaRPr lang="en-US"/>
+            </a:p>
+          </p:txBody>
+        </p:sp>
+      </p:grpSp>
+      <p:sp>
+        <p:nvSpPr>
+          <p:cNvPr id="18" name="TextBox 17">
+            <a:extLst>
+              <a:ext uri="{FF2B5EF4-FFF2-40B4-BE49-F238E27FC236}">
+                <a16:creationId xmlns:a16="http://schemas.microsoft.com/office/drawing/2014/main" id="{F2465337-3FB3-37EB-DAAC-45B478610AA9}"/>
+              </a:ext>
+            </a:extLst>
+          </p:cNvPr>
+          <p:cNvSpPr txBox="1"/>
+          <p:nvPr/>
+        </p:nvSpPr>
+        <p:spPr>
+          <a:xfrm rot="16200000">
+            <a:off x="2564234" y="2754831"/>
+            <a:ext cx="687510" cy="369332"/>
+          </a:xfrm>
+          <a:prstGeom prst="rect">
+            <a:avLst/>
+          </a:prstGeom>
+          <a:solidFill>
+            <a:schemeClr val="bg1">
+              <a:lumMod val="85000"/>
+            </a:schemeClr>
+          </a:solidFill>
+        </p:spPr>
+        <p:txBody>
+          <a:bodyPr wrap="square" rtlCol="0">
+            <a:spAutoFit/>
+          </a:bodyPr>
+          <a:lstStyle/>
+          <a:p>
+            <a:r>
+              <a:rPr lang="en-US" dirty="0"/>
+              <a:t>Item</a:t>
+            </a:r>
+          </a:p>
+        </p:txBody>
+      </p:sp>
+      <p:sp>
+        <p:nvSpPr>
+          <p:cNvPr id="19" name="TextBox 18">
+            <a:extLst>
+              <a:ext uri="{FF2B5EF4-FFF2-40B4-BE49-F238E27FC236}">
+                <a16:creationId xmlns:a16="http://schemas.microsoft.com/office/drawing/2014/main" id="{5D413143-8670-5950-99D0-A5D83DE7A34B}"/>
+              </a:ext>
+            </a:extLst>
+          </p:cNvPr>
+          <p:cNvSpPr txBox="1"/>
+          <p:nvPr/>
+        </p:nvSpPr>
+        <p:spPr>
+          <a:xfrm rot="16200000">
+            <a:off x="2237095" y="1629893"/>
+            <a:ext cx="1341788" cy="369332"/>
+          </a:xfrm>
+          <a:prstGeom prst="rect">
+            <a:avLst/>
+          </a:prstGeom>
+          <a:solidFill>
+            <a:schemeClr val="bg1">
+              <a:lumMod val="85000"/>
+            </a:schemeClr>
+          </a:solidFill>
+        </p:spPr>
+        <p:txBody>
+          <a:bodyPr wrap="square" rtlCol="0">
+            <a:spAutoFit/>
+          </a:bodyPr>
+          <a:lstStyle/>
+          <a:p>
+            <a:r>
+              <a:rPr lang="en-US" dirty="0"/>
+              <a:t>Filter</a:t>
+            </a:r>
+          </a:p>
+        </p:txBody>
+      </p:sp>
+      <p:pic>
+        <p:nvPicPr>
+          <p:cNvPr id="21" name="Picture 20">
+            <a:extLst>
+              <a:ext uri="{FF2B5EF4-FFF2-40B4-BE49-F238E27FC236}">
+                <a16:creationId xmlns:a16="http://schemas.microsoft.com/office/drawing/2014/main" id="{F0F4AC81-1BE8-CC41-B3A2-2BFD6B571272}"/>
+              </a:ext>
+            </a:extLst>
+          </p:cNvPr>
+          <p:cNvPicPr>
+            <a:picLocks noChangeAspect="1"/>
+          </p:cNvPicPr>
+          <p:nvPr/>
+        </p:nvPicPr>
+        <p:blipFill>
+          <a:blip r:embed="rId5"/>
+          <a:stretch>
+            <a:fillRect/>
+          </a:stretch>
+        </p:blipFill>
+        <p:spPr>
+          <a:xfrm>
+            <a:off x="5958775" y="819472"/>
+            <a:ext cx="1973943" cy="3854112"/>
           </a:xfrm>
           <a:prstGeom prst="rect">
             <a:avLst/>
@@ -11706,18 +12996,24 @@
 
 <file path=ppt/slides/slide19.xml><?xml version="1.0" encoding="utf-8"?>
 <p:sld xmlns:a="http://schemas.openxmlformats.org/drawingml/2006/main" xmlns:r="http://schemas.openxmlformats.org/officeDocument/2006/relationships" xmlns:p="http://schemas.openxmlformats.org/presentationml/2006/main">
-  <p:cSld name="Slide 11">
+  <p:cSld>
     <p:bg>
       <p:bgPr>
         <a:solidFill>
-          <a:srgbClr val="23262B"/>
+          <a:srgbClr val="F6F5F2"/>
         </a:solidFill>
         <a:effectLst/>
       </p:bgPr>
     </p:bg>
     <p:spTree>
       <p:nvGrpSpPr>
-        <p:cNvPr id="1" name=""/>
+        <p:cNvPr id="1" name="">
+          <a:extLst>
+            <a:ext uri="{FF2B5EF4-FFF2-40B4-BE49-F238E27FC236}">
+              <a16:creationId xmlns:a16="http://schemas.microsoft.com/office/drawing/2014/main" id="{16F005E5-8E95-9C5C-B34B-E4EDC2F0D1AE}"/>
+            </a:ext>
+          </a:extLst>
+        </p:cNvPr>
         <p:cNvGrpSpPr/>
         <p:nvPr/>
       </p:nvGrpSpPr>
@@ -11731,16 +13027,22 @@
       </p:grpSpPr>
       <p:sp>
         <p:nvSpPr>
-          <p:cNvPr id="2" name="Shape 0"/>
-          <p:cNvSpPr/>
-          <p:nvPr/>
-        </p:nvSpPr>
-        <p:spPr>
-          <a:xfrm>
-            <a:off x="0" y="0"/>
-            <a:ext cx="164592" cy="5143500"/>
-          </a:xfrm>
-          <a:prstGeom prst="rect">
+          <p:cNvPr id="15" name="Shape 13">
+            <a:extLst>
+              <a:ext uri="{FF2B5EF4-FFF2-40B4-BE49-F238E27FC236}">
+                <a16:creationId xmlns:a16="http://schemas.microsoft.com/office/drawing/2014/main" id="{5E0191EE-BB96-0332-99FD-759AD0B251AA}"/>
+              </a:ext>
+            </a:extLst>
+          </p:cNvPr>
+          <p:cNvSpPr/>
+          <p:nvPr/>
+        </p:nvSpPr>
+        <p:spPr>
+          <a:xfrm>
+            <a:off x="548640" y="4855464"/>
+            <a:ext cx="73152" cy="73152"/>
+          </a:xfrm>
+          <a:prstGeom prst="ellipse">
             <a:avLst/>
           </a:prstGeom>
           <a:solidFill>
@@ -11752,20 +13054,56 @@
           <a:bodyPr/>
           <a:lstStyle/>
           <a:p>
-            <a:endParaRPr lang="en-US"/>
-          </a:p>
-        </p:txBody>
-      </p:sp>
-      <p:sp>
-        <p:nvSpPr>
-          <p:cNvPr id="3" name="Text 1"/>
-          <p:cNvSpPr/>
-          <p:nvPr/>
-        </p:nvSpPr>
-        <p:spPr>
-          <a:xfrm>
-            <a:off x="548640" y="457200"/>
-            <a:ext cx="4572000" cy="274320"/>
+            <a:pPr marL="0" marR="0" lvl="0" indent="0" algn="l" defTabSz="914400" rtl="0" eaLnBrk="1" fontAlgn="auto" latinLnBrk="0" hangingPunct="1">
+              <a:lnSpc>
+                <a:spcPct val="100000"/>
+              </a:lnSpc>
+              <a:spcBef>
+                <a:spcPts val="0"/>
+              </a:spcBef>
+              <a:spcAft>
+                <a:spcPts val="0"/>
+              </a:spcAft>
+              <a:buClrTx/>
+              <a:buSzTx/>
+              <a:buFontTx/>
+              <a:buNone/>
+              <a:tabLst/>
+              <a:defRPr/>
+            </a:pPr>
+            <a:endParaRPr kumimoji="0" lang="en-US" sz="1800" b="0" i="0" u="none" strike="noStrike" kern="1200" cap="none" spc="0" normalizeH="0" baseline="0" noProof="0">
+              <a:ln>
+                <a:noFill/>
+              </a:ln>
+              <a:solidFill>
+                <a:prstClr val="black"/>
+              </a:solidFill>
+              <a:effectLst/>
+              <a:uLnTx/>
+              <a:uFillTx/>
+              <a:latin typeface="Calibri" panose="020F0502020204030204"/>
+              <a:ea typeface="+mn-ea"/>
+              <a:cs typeface="+mn-cs"/>
+            </a:endParaRPr>
+          </a:p>
+        </p:txBody>
+      </p:sp>
+      <p:sp>
+        <p:nvSpPr>
+          <p:cNvPr id="16" name="Text 14">
+            <a:extLst>
+              <a:ext uri="{FF2B5EF4-FFF2-40B4-BE49-F238E27FC236}">
+                <a16:creationId xmlns:a16="http://schemas.microsoft.com/office/drawing/2014/main" id="{2AD30AE3-3076-1D8A-1847-6C570FF25061}"/>
+              </a:ext>
+            </a:extLst>
+          </p:cNvPr>
+          <p:cNvSpPr/>
+          <p:nvPr/>
+        </p:nvSpPr>
+        <p:spPr>
+          <a:xfrm>
+            <a:off x="676656" y="4736592"/>
+            <a:ext cx="3657600" cy="292608"/>
           </a:xfrm>
           <a:prstGeom prst="rect">
             <a:avLst/>
@@ -11777,34 +13115,323 @@
           <a:bodyPr wrap="square" lIns="0" tIns="0" rIns="0" bIns="0" rtlCol="0" anchor="ctr"/>
           <a:lstStyle/>
           <a:p>
-            <a:pPr marL="0" indent="0" algn="l">
+            <a:pPr marL="0" marR="0" lvl="0" indent="0" algn="l" defTabSz="914400" rtl="0" eaLnBrk="1" fontAlgn="auto" latinLnBrk="0" hangingPunct="1">
+              <a:lnSpc>
+                <a:spcPct val="100000"/>
+              </a:lnSpc>
+              <a:spcBef>
+                <a:spcPts val="0"/>
+              </a:spcBef>
+              <a:spcAft>
+                <a:spcPts val="0"/>
+              </a:spcAft>
+              <a:buClrTx/>
+              <a:buSzTx/>
+              <a:buFontTx/>
               <a:buNone/>
-            </a:pPr>
-            <a:r>
-              <a:rPr lang="en-US" sz="1100" b="1" kern="0" spc="300" dirty="0">
+              <a:tabLst/>
+              <a:defRPr/>
+            </a:pPr>
+            <a:r>
+              <a:rPr kumimoji="0" lang="en-US" sz="950" b="0" i="0" u="none" strike="noStrike" kern="1200" cap="none" spc="0" normalizeH="0" baseline="0" noProof="0" dirty="0">
+                <a:ln>
+                  <a:noFill/>
+                </a:ln>
                 <a:solidFill>
-                  <a:srgbClr val="FF8A91"/>
+                  <a:srgbClr val="8A929C"/>
                 </a:solidFill>
+                <a:effectLst/>
+                <a:uLnTx/>
+                <a:uFillTx/>
+                <a:latin typeface="Calibri" pitchFamily="34" charset="0"/>
+                <a:ea typeface="Calibri" pitchFamily="34" charset="-122"/>
+                <a:cs typeface="Calibri" pitchFamily="34" charset="-120"/>
+              </a:rPr>
+              <a:t>EMS ReadyKit</a:t>
+            </a:r>
+            <a:endParaRPr kumimoji="0" lang="en-US" sz="950" b="0" i="0" u="none" strike="noStrike" kern="1200" cap="none" spc="0" normalizeH="0" baseline="0" noProof="0" dirty="0">
+              <a:ln>
+                <a:noFill/>
+              </a:ln>
+              <a:solidFill>
+                <a:prstClr val="black"/>
+              </a:solidFill>
+              <a:effectLst/>
+              <a:uLnTx/>
+              <a:uFillTx/>
+              <a:latin typeface="Calibri" panose="020F0502020204030204"/>
+              <a:ea typeface="+mn-ea"/>
+              <a:cs typeface="+mn-cs"/>
+            </a:endParaRPr>
+          </a:p>
+        </p:txBody>
+      </p:sp>
+      <p:sp>
+        <p:nvSpPr>
+          <p:cNvPr id="17" name="Text 15">
+            <a:extLst>
+              <a:ext uri="{FF2B5EF4-FFF2-40B4-BE49-F238E27FC236}">
+                <a16:creationId xmlns:a16="http://schemas.microsoft.com/office/drawing/2014/main" id="{32904B11-BF85-647D-1838-5C4326884AE3}"/>
+              </a:ext>
+            </a:extLst>
+          </p:cNvPr>
+          <p:cNvSpPr/>
+          <p:nvPr/>
+        </p:nvSpPr>
+        <p:spPr>
+          <a:xfrm>
+            <a:off x="8138160" y="4736592"/>
+            <a:ext cx="457200" cy="292608"/>
+          </a:xfrm>
+          <a:prstGeom prst="rect">
+            <a:avLst/>
+          </a:prstGeom>
+          <a:noFill/>
+          <a:ln/>
+        </p:spPr>
+        <p:txBody>
+          <a:bodyPr wrap="square" lIns="0" tIns="0" rIns="0" bIns="0" rtlCol="0" anchor="ctr"/>
+          <a:lstStyle/>
+          <a:p>
+            <a:pPr marL="0" marR="0" lvl="0" indent="0" algn="r" defTabSz="914400" rtl="0" eaLnBrk="1" fontAlgn="auto" latinLnBrk="0" hangingPunct="1">
+              <a:lnSpc>
+                <a:spcPct val="100000"/>
+              </a:lnSpc>
+              <a:spcBef>
+                <a:spcPts val="0"/>
+              </a:spcBef>
+              <a:spcAft>
+                <a:spcPts val="0"/>
+              </a:spcAft>
+              <a:buClrTx/>
+              <a:buSzTx/>
+              <a:buFontTx/>
+              <a:buNone/>
+              <a:tabLst/>
+              <a:defRPr/>
+            </a:pPr>
+            <a:r>
+              <a:rPr kumimoji="0" lang="en-US" sz="950" b="0" i="0" u="none" strike="noStrike" kern="1200" cap="none" spc="0" normalizeH="0" baseline="0" noProof="0" dirty="0">
+                <a:ln>
+                  <a:noFill/>
+                </a:ln>
+                <a:solidFill>
+                  <a:srgbClr val="8A929C"/>
+                </a:solidFill>
+                <a:effectLst/>
+                <a:uLnTx/>
+                <a:uFillTx/>
                 <a:latin typeface="Consolas" pitchFamily="34" charset="0"/>
                 <a:ea typeface="Consolas" pitchFamily="34" charset="-122"/>
                 <a:cs typeface="Consolas" pitchFamily="34" charset="-120"/>
               </a:rPr>
-              <a:t>UNDER THE HOOD</a:t>
-            </a:r>
-            <a:endParaRPr lang="en-US" sz="1100" dirty="0"/>
-          </a:p>
-        </p:txBody>
-      </p:sp>
-      <p:sp>
-        <p:nvSpPr>
-          <p:cNvPr id="4" name="Text 2"/>
-          <p:cNvSpPr/>
-          <p:nvPr/>
-        </p:nvSpPr>
-        <p:spPr>
-          <a:xfrm>
-            <a:off x="548640" y="749808"/>
-            <a:ext cx="8229600" cy="548640"/>
+              <a:t>10</a:t>
+            </a:r>
+            <a:endParaRPr kumimoji="0" lang="en-US" sz="950" b="0" i="0" u="none" strike="noStrike" kern="1200" cap="none" spc="0" normalizeH="0" baseline="0" noProof="0" dirty="0">
+              <a:ln>
+                <a:noFill/>
+              </a:ln>
+              <a:solidFill>
+                <a:prstClr val="black"/>
+              </a:solidFill>
+              <a:effectLst/>
+              <a:uLnTx/>
+              <a:uFillTx/>
+              <a:latin typeface="Calibri" panose="020F0502020204030204"/>
+              <a:ea typeface="+mn-ea"/>
+              <a:cs typeface="+mn-cs"/>
+            </a:endParaRPr>
+          </a:p>
+        </p:txBody>
+      </p:sp>
+      <p:sp>
+        <p:nvSpPr>
+          <p:cNvPr id="10" name="Rectangle: Rounded Corners 9">
+            <a:extLst>
+              <a:ext uri="{FF2B5EF4-FFF2-40B4-BE49-F238E27FC236}">
+                <a16:creationId xmlns:a16="http://schemas.microsoft.com/office/drawing/2014/main" id="{D595F7B0-64F0-AA31-7274-9981001CAB4E}"/>
+              </a:ext>
+            </a:extLst>
+          </p:cNvPr>
+          <p:cNvSpPr/>
+          <p:nvPr/>
+        </p:nvSpPr>
+        <p:spPr>
+          <a:xfrm>
+            <a:off x="5299225" y="590007"/>
+            <a:ext cx="861391" cy="182880"/>
+          </a:xfrm>
+          <a:prstGeom prst="roundRect">
+            <a:avLst/>
+          </a:prstGeom>
+          <a:solidFill>
+            <a:srgbClr val="D81E2C"/>
+          </a:solidFill>
+          <a:ln>
+            <a:solidFill>
+              <a:schemeClr val="bg1"/>
+            </a:solidFill>
+          </a:ln>
+        </p:spPr>
+        <p:style>
+          <a:lnRef idx="2">
+            <a:schemeClr val="accent1">
+              <a:shade val="15000"/>
+            </a:schemeClr>
+          </a:lnRef>
+          <a:fillRef idx="1">
+            <a:schemeClr val="accent1"/>
+          </a:fillRef>
+          <a:effectRef idx="0">
+            <a:schemeClr val="accent1"/>
+          </a:effectRef>
+          <a:fontRef idx="minor">
+            <a:schemeClr val="lt1"/>
+          </a:fontRef>
+        </p:style>
+        <p:txBody>
+          <a:bodyPr rtlCol="0" anchor="ctr"/>
+          <a:lstStyle/>
+          <a:p>
+            <a:pPr marL="0" marR="0" lvl="0" indent="0" algn="ctr" defTabSz="914400" rtl="0" eaLnBrk="1" fontAlgn="auto" latinLnBrk="0" hangingPunct="1">
+              <a:lnSpc>
+                <a:spcPct val="100000"/>
+              </a:lnSpc>
+              <a:spcBef>
+                <a:spcPts val="0"/>
+              </a:spcBef>
+              <a:spcAft>
+                <a:spcPts val="0"/>
+              </a:spcAft>
+              <a:buClrTx/>
+              <a:buSzTx/>
+              <a:buFontTx/>
+              <a:buNone/>
+              <a:tabLst/>
+              <a:defRPr/>
+            </a:pPr>
+            <a:r>
+              <a:rPr kumimoji="0" lang="en-US" sz="1000" b="0" i="0" u="none" strike="noStrike" kern="1200" cap="none" spc="0" normalizeH="0" baseline="0" noProof="0" dirty="0">
+                <a:ln>
+                  <a:noFill/>
+                </a:ln>
+                <a:solidFill>
+                  <a:prstClr val="white"/>
+                </a:solidFill>
+                <a:effectLst/>
+                <a:uLnTx/>
+                <a:uFillTx/>
+                <a:latin typeface="Calibri" panose="020F0502020204030204"/>
+                <a:ea typeface="+mn-ea"/>
+                <a:cs typeface="+mn-cs"/>
+              </a:rPr>
+              <a:t>Supervisor</a:t>
+            </a:r>
+          </a:p>
+        </p:txBody>
+      </p:sp>
+      <p:sp>
+        <p:nvSpPr>
+          <p:cNvPr id="11" name="Rectangle: Rounded Corners 10">
+            <a:extLst>
+              <a:ext uri="{FF2B5EF4-FFF2-40B4-BE49-F238E27FC236}">
+                <a16:creationId xmlns:a16="http://schemas.microsoft.com/office/drawing/2014/main" id="{0B436066-32FF-B6B8-0BD4-B19EB766D5A2}"/>
+              </a:ext>
+            </a:extLst>
+          </p:cNvPr>
+          <p:cNvSpPr/>
+          <p:nvPr/>
+        </p:nvSpPr>
+        <p:spPr>
+          <a:xfrm>
+            <a:off x="7737999" y="612600"/>
+            <a:ext cx="861391" cy="182880"/>
+          </a:xfrm>
+          <a:prstGeom prst="roundRect">
+            <a:avLst/>
+          </a:prstGeom>
+          <a:solidFill>
+            <a:srgbClr val="D81E2C"/>
+          </a:solidFill>
+          <a:ln>
+            <a:solidFill>
+              <a:schemeClr val="bg1"/>
+            </a:solidFill>
+          </a:ln>
+        </p:spPr>
+        <p:style>
+          <a:lnRef idx="2">
+            <a:schemeClr val="accent1">
+              <a:shade val="15000"/>
+            </a:schemeClr>
+          </a:lnRef>
+          <a:fillRef idx="1">
+            <a:schemeClr val="accent1"/>
+          </a:fillRef>
+          <a:effectRef idx="0">
+            <a:schemeClr val="accent1"/>
+          </a:effectRef>
+          <a:fontRef idx="minor">
+            <a:schemeClr val="lt1"/>
+          </a:fontRef>
+        </p:style>
+        <p:txBody>
+          <a:bodyPr rtlCol="0" anchor="ctr"/>
+          <a:lstStyle/>
+          <a:p>
+            <a:pPr marL="0" marR="0" lvl="0" indent="0" algn="ctr" defTabSz="914400" rtl="0" eaLnBrk="1" fontAlgn="auto" latinLnBrk="0" hangingPunct="1">
+              <a:lnSpc>
+                <a:spcPct val="100000"/>
+              </a:lnSpc>
+              <a:spcBef>
+                <a:spcPts val="0"/>
+              </a:spcBef>
+              <a:spcAft>
+                <a:spcPts val="0"/>
+              </a:spcAft>
+              <a:buClrTx/>
+              <a:buSzTx/>
+              <a:buFontTx/>
+              <a:buNone/>
+              <a:tabLst/>
+              <a:defRPr/>
+            </a:pPr>
+            <a:r>
+              <a:rPr kumimoji="0" lang="en-US" sz="1000" b="0" i="0" u="none" strike="noStrike" kern="1200" cap="none" spc="0" normalizeH="0" baseline="0" noProof="0" dirty="0">
+                <a:ln>
+                  <a:noFill/>
+                </a:ln>
+                <a:solidFill>
+                  <a:prstClr val="white"/>
+                </a:solidFill>
+                <a:effectLst/>
+                <a:uLnTx/>
+                <a:uFillTx/>
+                <a:latin typeface="Calibri" panose="020F0502020204030204"/>
+                <a:ea typeface="+mn-ea"/>
+                <a:cs typeface="+mn-cs"/>
+              </a:rPr>
+              <a:t>Supervisor</a:t>
+            </a:r>
+          </a:p>
+        </p:txBody>
+      </p:sp>
+      <p:sp>
+        <p:nvSpPr>
+          <p:cNvPr id="5" name="Text 1">
+            <a:extLst>
+              <a:ext uri="{FF2B5EF4-FFF2-40B4-BE49-F238E27FC236}">
+                <a16:creationId xmlns:a16="http://schemas.microsoft.com/office/drawing/2014/main" id="{CE3F8C60-D34F-0847-7634-C2C853B1D55F}"/>
+              </a:ext>
+            </a:extLst>
+          </p:cNvPr>
+          <p:cNvSpPr/>
+          <p:nvPr/>
+        </p:nvSpPr>
+        <p:spPr>
+          <a:xfrm>
+            <a:off x="302311" y="749808"/>
+            <a:ext cx="3291840" cy="868680"/>
           </a:xfrm>
           <a:prstGeom prst="rect">
             <a:avLst/>
@@ -11813,37 +13440,76 @@
           <a:ln/>
         </p:spPr>
         <p:txBody>
-          <a:bodyPr wrap="square" lIns="0" tIns="0" rIns="0" bIns="0" rtlCol="0" anchor="ctr"/>
-          <a:lstStyle/>
-          <a:p>
-            <a:pPr marL="0" indent="0" algn="l">
+          <a:bodyPr wrap="square" lIns="0" tIns="0" rIns="0" bIns="0" rtlCol="0" anchor="t"/>
+          <a:lstStyle/>
+          <a:p>
+            <a:pPr marL="0" marR="0" lvl="0" indent="0" algn="l" defTabSz="914400" rtl="0" eaLnBrk="1" fontAlgn="auto" latinLnBrk="0" hangingPunct="1">
+              <a:lnSpc>
+                <a:spcPct val="100000"/>
+              </a:lnSpc>
+              <a:spcBef>
+                <a:spcPts val="0"/>
+              </a:spcBef>
+              <a:spcAft>
+                <a:spcPts val="0"/>
+              </a:spcAft>
+              <a:buClrTx/>
+              <a:buSzTx/>
+              <a:buFontTx/>
               <a:buNone/>
-            </a:pPr>
-            <a:r>
-              <a:rPr lang="en-US" sz="2800" b="1" dirty="0">
+              <a:tabLst/>
+              <a:defRPr/>
+            </a:pPr>
+            <a:r>
+              <a:rPr kumimoji="0" lang="en-US" sz="2500" b="1" i="0" u="none" strike="noStrike" kern="1200" cap="none" spc="0" normalizeH="0" baseline="0" noProof="0" dirty="0">
+                <a:ln>
+                  <a:noFill/>
+                </a:ln>
                 <a:solidFill>
-                  <a:srgbClr val="FFFFFF"/>
+                  <a:srgbClr val="23262B"/>
                 </a:solidFill>
+                <a:effectLst/>
+                <a:uLnTx/>
+                <a:uFillTx/>
                 <a:latin typeface="Trebuchet MS" pitchFamily="34" charset="0"/>
                 <a:ea typeface="Trebuchet MS" pitchFamily="34" charset="-122"/>
                 <a:cs typeface="Trebuchet MS" pitchFamily="34" charset="-120"/>
               </a:rPr>
-              <a:t>Cloud architecture</a:t>
-            </a:r>
-            <a:endParaRPr lang="en-US" sz="2800" dirty="0"/>
-          </a:p>
-        </p:txBody>
-      </p:sp>
-      <p:sp>
-        <p:nvSpPr>
-          <p:cNvPr id="5" name="Text 3"/>
-          <p:cNvSpPr/>
-          <p:nvPr/>
-        </p:nvSpPr>
-        <p:spPr>
-          <a:xfrm>
-            <a:off x="548640" y="1298448"/>
-            <a:ext cx="8229600" cy="320040"/>
+              <a:t>Vehicles</a:t>
+            </a:r>
+            <a:endParaRPr kumimoji="0" lang="en-US" sz="2500" b="0" i="0" u="none" strike="noStrike" kern="1200" cap="none" spc="0" normalizeH="0" baseline="0" noProof="0" dirty="0">
+              <a:ln>
+                <a:noFill/>
+              </a:ln>
+              <a:solidFill>
+                <a:prstClr val="black"/>
+              </a:solidFill>
+              <a:effectLst/>
+              <a:uLnTx/>
+              <a:uFillTx/>
+              <a:latin typeface="Calibri" panose="020F0502020204030204"/>
+              <a:ea typeface="+mn-ea"/>
+              <a:cs typeface="+mn-cs"/>
+            </a:endParaRPr>
+          </a:p>
+        </p:txBody>
+      </p:sp>
+      <p:sp>
+        <p:nvSpPr>
+          <p:cNvPr id="6" name="Text 2">
+            <a:extLst>
+              <a:ext uri="{FF2B5EF4-FFF2-40B4-BE49-F238E27FC236}">
+                <a16:creationId xmlns:a16="http://schemas.microsoft.com/office/drawing/2014/main" id="{AE584E8F-7B88-B3AE-C809-E191878B93B3}"/>
+              </a:ext>
+            </a:extLst>
+          </p:cNvPr>
+          <p:cNvSpPr/>
+          <p:nvPr/>
+        </p:nvSpPr>
+        <p:spPr>
+          <a:xfrm>
+            <a:off x="302311" y="1691640"/>
+            <a:ext cx="3291840" cy="685800"/>
           </a:xfrm>
           <a:prstGeom prst="rect">
             <a:avLst/>
@@ -11852,1161 +13518,420 @@
           <a:ln/>
         </p:spPr>
         <p:txBody>
-          <a:bodyPr wrap="square" lIns="0" tIns="0" rIns="0" bIns="0" rtlCol="0" anchor="ctr"/>
-          <a:lstStyle/>
-          <a:p>
-            <a:pPr marL="0" indent="0" algn="l">
+          <a:bodyPr wrap="square" lIns="0" tIns="0" rIns="0" bIns="0" rtlCol="0" anchor="t"/>
+          <a:lstStyle/>
+          <a:p>
+            <a:pPr marL="0" marR="0" lvl="0" indent="0" algn="l" defTabSz="914400" rtl="0" eaLnBrk="1" fontAlgn="auto" latinLnBrk="0" hangingPunct="1">
+              <a:lnSpc>
+                <a:spcPct val="112000"/>
+              </a:lnSpc>
+              <a:spcBef>
+                <a:spcPts val="0"/>
+              </a:spcBef>
+              <a:spcAft>
+                <a:spcPts val="0"/>
+              </a:spcAft>
+              <a:buClrTx/>
+              <a:buSzTx/>
+              <a:buFontTx/>
               <a:buNone/>
-            </a:pPr>
-            <a:r>
-              <a:rPr lang="en-US" sz="1250" i="1" dirty="0">
+              <a:tabLst/>
+              <a:defRPr/>
+            </a:pPr>
+            <a:r>
+              <a:rPr kumimoji="0" lang="en-US" sz="1300" b="0" i="0" u="none" strike="noStrike" kern="1200" cap="none" spc="0" normalizeH="0" baseline="0" noProof="0" dirty="0">
+                <a:ln>
+                  <a:noFill/>
+                </a:ln>
                 <a:solidFill>
-                  <a:srgbClr val="AEB4BC"/>
+                  <a:srgbClr val="555E6B"/>
+                </a:solidFill>
+                <a:effectLst/>
+                <a:uLnTx/>
+                <a:uFillTx/>
+                <a:latin typeface="Calibri" pitchFamily="34" charset="0"/>
+                <a:ea typeface="Calibri" pitchFamily="34" charset="-122"/>
+                <a:cs typeface="Calibri" pitchFamily="34" charset="-120"/>
+              </a:rPr>
+              <a:t>Supervisors can add vehicles and update the items stored in them from a central interface</a:t>
+            </a:r>
+            <a:endParaRPr kumimoji="0" lang="en-US" sz="1300" b="0" i="0" u="none" strike="noStrike" kern="1200" cap="none" spc="0" normalizeH="0" baseline="0" noProof="0" dirty="0">
+              <a:ln>
+                <a:noFill/>
+              </a:ln>
+              <a:solidFill>
+                <a:prstClr val="black"/>
+              </a:solidFill>
+              <a:effectLst/>
+              <a:uLnTx/>
+              <a:uFillTx/>
+              <a:latin typeface="Calibri" panose="020F0502020204030204"/>
+              <a:ea typeface="+mn-ea"/>
+              <a:cs typeface="+mn-cs"/>
+            </a:endParaRPr>
+          </a:p>
+        </p:txBody>
+      </p:sp>
+      <p:sp>
+        <p:nvSpPr>
+          <p:cNvPr id="8" name="Text 3">
+            <a:extLst>
+              <a:ext uri="{FF2B5EF4-FFF2-40B4-BE49-F238E27FC236}">
+                <a16:creationId xmlns:a16="http://schemas.microsoft.com/office/drawing/2014/main" id="{5F9010FD-412F-D0DC-C080-2E9247DE1B72}"/>
+              </a:ext>
+            </a:extLst>
+          </p:cNvPr>
+          <p:cNvSpPr/>
+          <p:nvPr/>
+        </p:nvSpPr>
+        <p:spPr>
+          <a:xfrm>
+            <a:off x="302311" y="2468880"/>
+            <a:ext cx="3291840" cy="2011680"/>
+          </a:xfrm>
+          <a:prstGeom prst="rect">
+            <a:avLst/>
+          </a:prstGeom>
+          <a:noFill/>
+          <a:ln/>
+        </p:spPr>
+        <p:txBody>
+          <a:bodyPr wrap="square" lIns="0" tIns="0" rIns="0" bIns="0" rtlCol="0" anchor="t"/>
+          <a:lstStyle/>
+          <a:p>
+            <a:pPr marL="177800" marR="0" lvl="0" indent="-177800" algn="l" defTabSz="914400" rtl="0" eaLnBrk="1" fontAlgn="auto" latinLnBrk="0" hangingPunct="1">
+              <a:lnSpc>
+                <a:spcPct val="100000"/>
+              </a:lnSpc>
+              <a:spcBef>
+                <a:spcPts val="0"/>
+              </a:spcBef>
+              <a:spcAft>
+                <a:spcPts val="800"/>
+              </a:spcAft>
+              <a:buClrTx/>
+              <a:buSzPct val="100000"/>
+              <a:buFontTx/>
+              <a:buChar char="–"/>
+              <a:tabLst/>
+              <a:defRPr/>
+            </a:pPr>
+            <a:r>
+              <a:rPr kumimoji="0" lang="en-US" sz="1250" b="0" i="0" u="none" strike="noStrike" kern="1200" cap="none" spc="0" normalizeH="0" baseline="0" noProof="0" dirty="0">
+                <a:ln>
+                  <a:noFill/>
+                </a:ln>
+                <a:solidFill>
+                  <a:srgbClr val="23262B"/>
+                </a:solidFill>
+                <a:effectLst/>
+                <a:uLnTx/>
+                <a:uFillTx/>
+                <a:latin typeface="Calibri" pitchFamily="34" charset="0"/>
+                <a:ea typeface="Calibri" pitchFamily="34" charset="-122"/>
+                <a:cs typeface="Calibri" pitchFamily="34" charset="-120"/>
+              </a:rPr>
+              <a:t>Vehicles details can be added or edited</a:t>
+            </a:r>
+            <a:endParaRPr kumimoji="0" lang="en-US" sz="1250" b="0" i="0" u="none" strike="noStrike" kern="1200" cap="none" spc="0" normalizeH="0" baseline="0" noProof="0" dirty="0">
+              <a:ln>
+                <a:noFill/>
+              </a:ln>
+              <a:solidFill>
+                <a:prstClr val="black"/>
+              </a:solidFill>
+              <a:effectLst/>
+              <a:uLnTx/>
+              <a:uFillTx/>
+              <a:latin typeface="Calibri" panose="020F0502020204030204"/>
+              <a:ea typeface="+mn-ea"/>
+              <a:cs typeface="+mn-cs"/>
+            </a:endParaRPr>
+          </a:p>
+          <a:p>
+            <a:pPr marL="177800" marR="0" lvl="0" indent="-177800" algn="l" defTabSz="914400" rtl="0" eaLnBrk="1" fontAlgn="auto" latinLnBrk="0" hangingPunct="1">
+              <a:lnSpc>
+                <a:spcPct val="100000"/>
+              </a:lnSpc>
+              <a:spcBef>
+                <a:spcPts val="0"/>
+              </a:spcBef>
+              <a:spcAft>
+                <a:spcPts val="800"/>
+              </a:spcAft>
+              <a:buClrTx/>
+              <a:buSzPct val="100000"/>
+              <a:buFontTx/>
+              <a:buChar char="–"/>
+              <a:tabLst/>
+              <a:defRPr/>
+            </a:pPr>
+            <a:r>
+              <a:rPr kumimoji="0" lang="en-US" sz="1250" b="0" i="0" u="none" strike="noStrike" kern="1200" cap="none" spc="0" normalizeH="0" baseline="0" noProof="0" dirty="0">
+                <a:ln>
+                  <a:noFill/>
+                </a:ln>
+                <a:solidFill>
+                  <a:srgbClr val="23262B"/>
+                </a:solidFill>
+                <a:effectLst/>
+                <a:uLnTx/>
+                <a:uFillTx/>
+                <a:latin typeface="Calibri" pitchFamily="34" charset="0"/>
+                <a:ea typeface="Calibri" pitchFamily="34" charset="-122"/>
+                <a:cs typeface="Calibri" pitchFamily="34" charset="-120"/>
+              </a:rPr>
+              <a:t>Basic colors assigned</a:t>
+            </a:r>
+          </a:p>
+          <a:p>
+            <a:pPr marL="177800" marR="0" lvl="0" indent="-177800" algn="l" defTabSz="914400" rtl="0" eaLnBrk="1" fontAlgn="auto" latinLnBrk="0" hangingPunct="1">
+              <a:lnSpc>
+                <a:spcPct val="100000"/>
+              </a:lnSpc>
+              <a:spcBef>
+                <a:spcPts val="0"/>
+              </a:spcBef>
+              <a:spcAft>
+                <a:spcPts val="800"/>
+              </a:spcAft>
+              <a:buClrTx/>
+              <a:buSzPct val="100000"/>
+              <a:buFontTx/>
+              <a:buChar char="–"/>
+              <a:tabLst/>
+              <a:defRPr/>
+            </a:pPr>
+            <a:r>
+              <a:rPr kumimoji="0" lang="en-US" sz="1250" b="0" i="0" u="none" strike="noStrike" kern="1200" cap="none" spc="0" normalizeH="0" baseline="0" noProof="0" dirty="0">
+                <a:ln>
+                  <a:noFill/>
+                </a:ln>
+                <a:solidFill>
+                  <a:srgbClr val="23262B"/>
+                </a:solidFill>
+                <a:effectLst/>
+                <a:uLnTx/>
+                <a:uFillTx/>
+                <a:latin typeface="Calibri" pitchFamily="34" charset="0"/>
+                <a:ea typeface="Calibri" pitchFamily="34" charset="-122"/>
+                <a:cs typeface="Calibri" pitchFamily="34" charset="-120"/>
+              </a:rPr>
+              <a:t>Custom compartments created and edited</a:t>
+            </a:r>
+          </a:p>
+          <a:p>
+            <a:pPr marL="177800" marR="0" lvl="0" indent="-177800" algn="l" defTabSz="914400" rtl="0" eaLnBrk="1" fontAlgn="auto" latinLnBrk="0" hangingPunct="1">
+              <a:lnSpc>
+                <a:spcPct val="100000"/>
+              </a:lnSpc>
+              <a:spcBef>
+                <a:spcPts val="0"/>
+              </a:spcBef>
+              <a:spcAft>
+                <a:spcPts val="800"/>
+              </a:spcAft>
+              <a:buClrTx/>
+              <a:buSzPct val="100000"/>
+              <a:buFontTx/>
+              <a:buChar char="–"/>
+              <a:tabLst/>
+              <a:defRPr/>
+            </a:pPr>
+            <a:r>
+              <a:rPr lang="en-US" sz="1250" dirty="0">
+                <a:solidFill>
+                  <a:srgbClr val="23262B"/>
                 </a:solidFill>
                 <a:latin typeface="Calibri" pitchFamily="34" charset="0"/>
                 <a:ea typeface="Calibri" pitchFamily="34" charset="-122"/>
                 <a:cs typeface="Calibri" pitchFamily="34" charset="-120"/>
               </a:rPr>
-              <a:t>Representative architecture for a secure, multi-user web app.</a:t>
-            </a:r>
-            <a:endParaRPr lang="en-US" sz="1250" dirty="0"/>
-          </a:p>
-        </p:txBody>
-      </p:sp>
-      <p:sp>
-        <p:nvSpPr>
-          <p:cNvPr id="6" name="Shape 4"/>
-          <p:cNvSpPr/>
-          <p:nvPr/>
-        </p:nvSpPr>
-        <p:spPr>
-          <a:xfrm>
-            <a:off x="548640" y="1920240"/>
-            <a:ext cx="1828800" cy="1051560"/>
-          </a:xfrm>
-          <a:prstGeom prst="rect">
-            <a:avLst/>
-          </a:prstGeom>
-          <a:solidFill>
-            <a:srgbClr val="2E333B"/>
-          </a:solidFill>
-          <a:ln w="12700">
-            <a:solidFill>
-              <a:srgbClr val="3D434C"/>
-            </a:solidFill>
-            <a:prstDash val="solid"/>
-          </a:ln>
-        </p:spPr>
-        <p:txBody>
-          <a:bodyPr/>
-          <a:lstStyle/>
-          <a:p>
-            <a:endParaRPr lang="en-US"/>
-          </a:p>
-        </p:txBody>
-      </p:sp>
-      <p:sp>
-        <p:nvSpPr>
-          <p:cNvPr id="7" name="Shape 5"/>
-          <p:cNvSpPr/>
-          <p:nvPr/>
-        </p:nvSpPr>
-        <p:spPr>
-          <a:xfrm>
-            <a:off x="548640" y="1920240"/>
-            <a:ext cx="64008" cy="1051560"/>
-          </a:xfrm>
-          <a:prstGeom prst="rect">
-            <a:avLst/>
-          </a:prstGeom>
-          <a:solidFill>
-            <a:srgbClr val="D81E2C"/>
-          </a:solidFill>
-          <a:ln/>
-        </p:spPr>
-        <p:txBody>
-          <a:bodyPr/>
-          <a:lstStyle/>
-          <a:p>
-            <a:endParaRPr lang="en-US"/>
-          </a:p>
-        </p:txBody>
-      </p:sp>
-      <p:sp>
-        <p:nvSpPr>
-          <p:cNvPr id="8" name="Text 6"/>
-          <p:cNvSpPr/>
-          <p:nvPr/>
-        </p:nvSpPr>
-        <p:spPr>
-          <a:xfrm>
-            <a:off x="713232" y="2066544"/>
-            <a:ext cx="1554480" cy="365760"/>
-          </a:xfrm>
-          <a:prstGeom prst="rect">
-            <a:avLst/>
-          </a:prstGeom>
-          <a:noFill/>
-          <a:ln/>
-        </p:spPr>
-        <p:txBody>
-          <a:bodyPr wrap="square" lIns="0" tIns="0" rIns="0" bIns="0" rtlCol="0" anchor="ctr"/>
-          <a:lstStyle/>
-          <a:p>
-            <a:pPr marL="0" indent="0" algn="l">
-              <a:lnSpc>
-                <a:spcPct val="95000"/>
-              </a:lnSpc>
-              <a:buNone/>
-            </a:pPr>
-            <a:r>
-              <a:rPr lang="en-US" sz="1300" b="1" dirty="0">
-                <a:solidFill>
-                  <a:srgbClr val="FFFFFF"/>
-                </a:solidFill>
-                <a:latin typeface="Trebuchet MS" pitchFamily="34" charset="0"/>
-                <a:ea typeface="Trebuchet MS" pitchFamily="34" charset="-122"/>
-                <a:cs typeface="Trebuchet MS" pitchFamily="34" charset="-120"/>
-              </a:rPr>
-              <a:t>Crews &amp; supervisors</a:t>
-            </a:r>
-            <a:endParaRPr lang="en-US" sz="1300" dirty="0"/>
-          </a:p>
-        </p:txBody>
-      </p:sp>
-      <p:sp>
-        <p:nvSpPr>
-          <p:cNvPr id="9" name="Text 7"/>
-          <p:cNvSpPr/>
-          <p:nvPr/>
-        </p:nvSpPr>
-        <p:spPr>
-          <a:xfrm>
-            <a:off x="713232" y="2468880"/>
-            <a:ext cx="1554480" cy="411480"/>
-          </a:xfrm>
-          <a:prstGeom prst="rect">
-            <a:avLst/>
-          </a:prstGeom>
-          <a:noFill/>
-          <a:ln/>
-        </p:spPr>
-        <p:txBody>
-          <a:bodyPr wrap="square" lIns="0" tIns="0" rIns="0" bIns="0" rtlCol="0" anchor="t"/>
-          <a:lstStyle/>
-          <a:p>
-            <a:pPr marL="0" indent="0" algn="l">
+              <a:t>Items added to compartments with custom par levels</a:t>
+            </a:r>
+          </a:p>
+          <a:p>
+            <a:pPr marL="177800" marR="0" lvl="0" indent="-177800" algn="l" defTabSz="914400" rtl="0" eaLnBrk="1" fontAlgn="auto" latinLnBrk="0" hangingPunct="1">
               <a:lnSpc>
                 <a:spcPct val="100000"/>
               </a:lnSpc>
-              <a:buNone/>
-            </a:pPr>
-            <a:r>
-              <a:rPr lang="en-US" sz="1000" dirty="0">
+              <a:spcBef>
+                <a:spcPts val="0"/>
+              </a:spcBef>
+              <a:spcAft>
+                <a:spcPts val="800"/>
+              </a:spcAft>
+              <a:buClrTx/>
+              <a:buSzPct val="100000"/>
+              <a:buFontTx/>
+              <a:buChar char="–"/>
+              <a:tabLst/>
+              <a:defRPr/>
+            </a:pPr>
+            <a:r>
+              <a:rPr kumimoji="0" lang="en-US" sz="1250" b="0" i="0" u="none" strike="noStrike" kern="1200" cap="none" spc="0" normalizeH="0" baseline="0" noProof="0" dirty="0">
+                <a:ln>
+                  <a:noFill/>
+                </a:ln>
                 <a:solidFill>
-                  <a:srgbClr val="AEB4BC"/>
+                  <a:srgbClr val="23262B"/>
+                </a:solidFill>
+                <a:effectLst/>
+                <a:uLnTx/>
+                <a:uFillTx/>
+                <a:latin typeface="Calibri" pitchFamily="34" charset="0"/>
+                <a:ea typeface="Calibri" pitchFamily="34" charset="-122"/>
+                <a:cs typeface="Calibri" pitchFamily="34" charset="-120"/>
+              </a:rPr>
+              <a:t>Marked out of service and </a:t>
+            </a:r>
+            <a:r>
+              <a:rPr lang="en-US" sz="1250" dirty="0">
+                <a:solidFill>
+                  <a:srgbClr val="23262B"/>
                 </a:solidFill>
                 <a:latin typeface="Calibri" pitchFamily="34" charset="0"/>
                 <a:ea typeface="Calibri" pitchFamily="34" charset="-122"/>
                 <a:cs typeface="Calibri" pitchFamily="34" charset="-120"/>
               </a:rPr>
-              <a:t>Browser / mobile web</a:t>
-            </a:r>
-            <a:endParaRPr lang="en-US" sz="1000" dirty="0"/>
-          </a:p>
-        </p:txBody>
-      </p:sp>
-      <p:sp>
-        <p:nvSpPr>
-          <p:cNvPr id="10" name="Text 8"/>
-          <p:cNvSpPr/>
-          <p:nvPr/>
-        </p:nvSpPr>
-        <p:spPr>
-          <a:xfrm>
-            <a:off x="2359152" y="1920240"/>
-            <a:ext cx="338328" cy="1051560"/>
-          </a:xfrm>
-          <a:prstGeom prst="rect">
-            <a:avLst/>
-          </a:prstGeom>
-          <a:noFill/>
-          <a:ln/>
-        </p:spPr>
-        <p:txBody>
-          <a:bodyPr wrap="square" lIns="0" tIns="0" rIns="0" bIns="0" rtlCol="0" anchor="ctr"/>
-          <a:lstStyle/>
-          <a:p>
-            <a:pPr marL="0" indent="0" algn="ctr">
-              <a:buNone/>
-            </a:pPr>
-            <a:r>
-              <a:rPr lang="en-US" sz="2000" b="1" dirty="0">
-                <a:solidFill>
-                  <a:srgbClr val="D81E2C"/>
-                </a:solidFill>
-                <a:latin typeface="Trebuchet MS" pitchFamily="34" charset="0"/>
-                <a:ea typeface="Trebuchet MS" pitchFamily="34" charset="-122"/>
-                <a:cs typeface="Trebuchet MS" pitchFamily="34" charset="-120"/>
-              </a:rPr>
-              <a:t>→</a:t>
-            </a:r>
-            <a:endParaRPr lang="en-US" sz="2000" dirty="0"/>
-          </a:p>
-        </p:txBody>
-      </p:sp>
-      <p:sp>
-        <p:nvSpPr>
-          <p:cNvPr id="11" name="Shape 9"/>
-          <p:cNvSpPr/>
-          <p:nvPr/>
-        </p:nvSpPr>
-        <p:spPr>
-          <a:xfrm>
-            <a:off x="2679192" y="1920240"/>
-            <a:ext cx="1828800" cy="1051560"/>
-          </a:xfrm>
-          <a:prstGeom prst="rect">
-            <a:avLst/>
-          </a:prstGeom>
-          <a:solidFill>
-            <a:srgbClr val="2E333B"/>
-          </a:solidFill>
-          <a:ln w="12700">
-            <a:solidFill>
-              <a:srgbClr val="3D434C"/>
-            </a:solidFill>
-            <a:prstDash val="solid"/>
-          </a:ln>
-        </p:spPr>
-        <p:txBody>
-          <a:bodyPr/>
-          <a:lstStyle/>
-          <a:p>
-            <a:endParaRPr lang="en-US"/>
-          </a:p>
-        </p:txBody>
-      </p:sp>
-      <p:sp>
-        <p:nvSpPr>
-          <p:cNvPr id="12" name="Shape 10"/>
-          <p:cNvSpPr/>
-          <p:nvPr/>
-        </p:nvSpPr>
-        <p:spPr>
-          <a:xfrm>
-            <a:off x="2679192" y="1920240"/>
-            <a:ext cx="64008" cy="1051560"/>
-          </a:xfrm>
-          <a:prstGeom prst="rect">
-            <a:avLst/>
-          </a:prstGeom>
-          <a:solidFill>
-            <a:srgbClr val="D81E2C"/>
-          </a:solidFill>
-          <a:ln/>
-        </p:spPr>
-        <p:txBody>
-          <a:bodyPr/>
-          <a:lstStyle/>
-          <a:p>
-            <a:endParaRPr lang="en-US"/>
-          </a:p>
-        </p:txBody>
-      </p:sp>
-      <p:sp>
-        <p:nvSpPr>
-          <p:cNvPr id="13" name="Text 11"/>
-          <p:cNvSpPr/>
-          <p:nvPr/>
-        </p:nvSpPr>
-        <p:spPr>
-          <a:xfrm>
-            <a:off x="2843784" y="2066544"/>
-            <a:ext cx="1554480" cy="365760"/>
-          </a:xfrm>
-          <a:prstGeom prst="rect">
-            <a:avLst/>
-          </a:prstGeom>
-          <a:noFill/>
-          <a:ln/>
-        </p:spPr>
-        <p:txBody>
-          <a:bodyPr wrap="square" lIns="0" tIns="0" rIns="0" bIns="0" rtlCol="0" anchor="ctr"/>
-          <a:lstStyle/>
-          <a:p>
-            <a:pPr marL="0" indent="0" algn="l">
-              <a:lnSpc>
-                <a:spcPct val="95000"/>
-              </a:lnSpc>
-              <a:buNone/>
-            </a:pPr>
-            <a:r>
-              <a:rPr lang="en-US" sz="1300" b="1" dirty="0">
-                <a:solidFill>
-                  <a:srgbClr val="FFFFFF"/>
-                </a:solidFill>
-                <a:latin typeface="Trebuchet MS" pitchFamily="34" charset="0"/>
-                <a:ea typeface="Trebuchet MS" pitchFamily="34" charset="-122"/>
-                <a:cs typeface="Trebuchet MS" pitchFamily="34" charset="-120"/>
-              </a:rPr>
-              <a:t>Frontend</a:t>
-            </a:r>
-            <a:endParaRPr lang="en-US" sz="1300" dirty="0"/>
-          </a:p>
-        </p:txBody>
-      </p:sp>
-      <p:sp>
-        <p:nvSpPr>
-          <p:cNvPr id="14" name="Text 12"/>
-          <p:cNvSpPr/>
-          <p:nvPr/>
-        </p:nvSpPr>
-        <p:spPr>
-          <a:xfrm>
-            <a:off x="2843784" y="2468880"/>
-            <a:ext cx="1554480" cy="411480"/>
-          </a:xfrm>
-          <a:prstGeom prst="rect">
-            <a:avLst/>
-          </a:prstGeom>
-          <a:noFill/>
-          <a:ln/>
-        </p:spPr>
-        <p:txBody>
-          <a:bodyPr wrap="square" lIns="0" tIns="0" rIns="0" bIns="0" rtlCol="0" anchor="t"/>
-          <a:lstStyle/>
-          <a:p>
-            <a:pPr marL="0" indent="0" algn="l">
+              <a:t>returned to service</a:t>
+            </a:r>
+            <a:endParaRPr kumimoji="0" lang="en-US" sz="1250" b="0" i="0" u="none" strike="noStrike" kern="1200" cap="none" spc="0" normalizeH="0" baseline="0" noProof="0" dirty="0">
+              <a:ln>
+                <a:noFill/>
+              </a:ln>
+              <a:solidFill>
+                <a:srgbClr val="23262B"/>
+              </a:solidFill>
+              <a:effectLst/>
+              <a:uLnTx/>
+              <a:uFillTx/>
+              <a:latin typeface="Calibri" pitchFamily="34" charset="0"/>
+              <a:ea typeface="Calibri" pitchFamily="34" charset="-122"/>
+              <a:cs typeface="Calibri" pitchFamily="34" charset="-120"/>
+            </a:endParaRPr>
+          </a:p>
+          <a:p>
+            <a:pPr marL="0" marR="0" lvl="0" indent="0" algn="l" defTabSz="914400" rtl="0" eaLnBrk="1" fontAlgn="auto" latinLnBrk="0" hangingPunct="1">
               <a:lnSpc>
                 <a:spcPct val="100000"/>
               </a:lnSpc>
+              <a:spcBef>
+                <a:spcPts val="0"/>
+              </a:spcBef>
+              <a:spcAft>
+                <a:spcPts val="800"/>
+              </a:spcAft>
+              <a:buClrTx/>
+              <a:buSzPct val="100000"/>
+              <a:buFontTx/>
               <a:buNone/>
-            </a:pPr>
-            <a:r>
-              <a:rPr lang="en-US" sz="1000" dirty="0">
-                <a:solidFill>
-                  <a:srgbClr val="AEB4BC"/>
-                </a:solidFill>
-                <a:latin typeface="Calibri" pitchFamily="34" charset="0"/>
-                <a:ea typeface="Calibri" pitchFamily="34" charset="-122"/>
-                <a:cs typeface="Calibri" pitchFamily="34" charset="-120"/>
-              </a:rPr>
-              <a:t>Single-page web app</a:t>
-            </a:r>
-            <a:endParaRPr lang="en-US" sz="1000" dirty="0"/>
-          </a:p>
-        </p:txBody>
-      </p:sp>
-      <p:sp>
-        <p:nvSpPr>
-          <p:cNvPr id="15" name="Text 13"/>
-          <p:cNvSpPr/>
-          <p:nvPr/>
-        </p:nvSpPr>
-        <p:spPr>
-          <a:xfrm>
-            <a:off x="4489704" y="1920240"/>
-            <a:ext cx="338328" cy="1051560"/>
-          </a:xfrm>
-          <a:prstGeom prst="rect">
-            <a:avLst/>
-          </a:prstGeom>
-          <a:noFill/>
-          <a:ln/>
-        </p:spPr>
-        <p:txBody>
-          <a:bodyPr wrap="square" lIns="0" tIns="0" rIns="0" bIns="0" rtlCol="0" anchor="ctr"/>
-          <a:lstStyle/>
-          <a:p>
-            <a:pPr marL="0" indent="0" algn="ctr">
-              <a:buNone/>
-            </a:pPr>
-            <a:r>
-              <a:rPr lang="en-US" sz="2000" b="1" dirty="0">
-                <a:solidFill>
-                  <a:srgbClr val="D81E2C"/>
-                </a:solidFill>
-                <a:latin typeface="Trebuchet MS" pitchFamily="34" charset="0"/>
-                <a:ea typeface="Trebuchet MS" pitchFamily="34" charset="-122"/>
-                <a:cs typeface="Trebuchet MS" pitchFamily="34" charset="-120"/>
-              </a:rPr>
-              <a:t>→</a:t>
-            </a:r>
-            <a:endParaRPr lang="en-US" sz="2000" dirty="0"/>
-          </a:p>
-        </p:txBody>
-      </p:sp>
-      <p:sp>
-        <p:nvSpPr>
-          <p:cNvPr id="16" name="Shape 14"/>
-          <p:cNvSpPr/>
-          <p:nvPr/>
-        </p:nvSpPr>
-        <p:spPr>
-          <a:xfrm>
-            <a:off x="4809744" y="1920240"/>
-            <a:ext cx="1828800" cy="1051560"/>
-          </a:xfrm>
-          <a:prstGeom prst="rect">
-            <a:avLst/>
-          </a:prstGeom>
-          <a:solidFill>
-            <a:srgbClr val="2E333B"/>
-          </a:solidFill>
-          <a:ln w="12700">
-            <a:solidFill>
-              <a:srgbClr val="3D434C"/>
-            </a:solidFill>
-            <a:prstDash val="solid"/>
+              <a:tabLst/>
+              <a:defRPr/>
+            </a:pPr>
+            <a:endParaRPr kumimoji="0" lang="en-US" sz="1250" b="0" i="0" u="none" strike="noStrike" kern="1200" cap="none" spc="0" normalizeH="0" baseline="0" noProof="0" dirty="0">
+              <a:ln>
+                <a:noFill/>
+              </a:ln>
+              <a:solidFill>
+                <a:prstClr val="black"/>
+              </a:solidFill>
+              <a:effectLst/>
+              <a:uLnTx/>
+              <a:uFillTx/>
+              <a:latin typeface="Calibri" panose="020F0502020204030204"/>
+              <a:ea typeface="+mn-ea"/>
+              <a:cs typeface="+mn-cs"/>
+            </a:endParaRPr>
+          </a:p>
+        </p:txBody>
+      </p:sp>
+      <p:pic>
+        <p:nvPicPr>
+          <p:cNvPr id="12" name="Picture 11">
+            <a:extLst>
+              <a:ext uri="{FF2B5EF4-FFF2-40B4-BE49-F238E27FC236}">
+                <a16:creationId xmlns:a16="http://schemas.microsoft.com/office/drawing/2014/main" id="{D6132071-AF26-B2A5-E45E-A4C310C5550E}"/>
+              </a:ext>
+            </a:extLst>
+          </p:cNvPr>
+          <p:cNvPicPr>
+            <a:picLocks noChangeAspect="1"/>
+          </p:cNvPicPr>
+          <p:nvPr/>
+        </p:nvPicPr>
+        <p:blipFill>
+          <a:blip r:embed="rId3"/>
+          <a:stretch>
+            <a:fillRect/>
+          </a:stretch>
+        </p:blipFill>
+        <p:spPr>
+          <a:xfrm>
+            <a:off x="4184777" y="819471"/>
+            <a:ext cx="1975839" cy="3857814"/>
+          </a:xfrm>
+          <a:prstGeom prst="rect">
+            <a:avLst/>
+          </a:prstGeom>
+          <a:ln>
+            <a:noFill/>
           </a:ln>
-        </p:spPr>
-        <p:txBody>
-          <a:bodyPr/>
-          <a:lstStyle/>
-          <a:p>
-            <a:endParaRPr lang="en-US"/>
-          </a:p>
-        </p:txBody>
-      </p:sp>
-      <p:sp>
-        <p:nvSpPr>
-          <p:cNvPr id="17" name="Shape 15"/>
-          <p:cNvSpPr/>
-          <p:nvPr/>
-        </p:nvSpPr>
-        <p:spPr>
-          <a:xfrm>
-            <a:off x="4809744" y="1920240"/>
-            <a:ext cx="64008" cy="1051560"/>
-          </a:xfrm>
-          <a:prstGeom prst="rect">
-            <a:avLst/>
-          </a:prstGeom>
-          <a:solidFill>
-            <a:srgbClr val="D81E2C"/>
-          </a:solidFill>
-          <a:ln/>
-        </p:spPr>
-        <p:txBody>
-          <a:bodyPr/>
-          <a:lstStyle/>
-          <a:p>
-            <a:endParaRPr lang="en-US"/>
-          </a:p>
-        </p:txBody>
-      </p:sp>
-      <p:sp>
-        <p:nvSpPr>
-          <p:cNvPr id="18" name="Text 16"/>
-          <p:cNvSpPr/>
-          <p:nvPr/>
-        </p:nvSpPr>
-        <p:spPr>
-          <a:xfrm>
-            <a:off x="4974336" y="2066544"/>
-            <a:ext cx="1554480" cy="365760"/>
-          </a:xfrm>
-          <a:prstGeom prst="rect">
-            <a:avLst/>
-          </a:prstGeom>
-          <a:noFill/>
-          <a:ln/>
-        </p:spPr>
-        <p:txBody>
-          <a:bodyPr wrap="square" lIns="0" tIns="0" rIns="0" bIns="0" rtlCol="0" anchor="ctr"/>
-          <a:lstStyle/>
-          <a:p>
-            <a:pPr marL="0" indent="0" algn="l">
-              <a:lnSpc>
-                <a:spcPct val="95000"/>
-              </a:lnSpc>
-              <a:buNone/>
-            </a:pPr>
-            <a:r>
-              <a:rPr lang="en-US" sz="1300" b="1" dirty="0">
-                <a:solidFill>
-                  <a:srgbClr val="FFFFFF"/>
-                </a:solidFill>
-                <a:latin typeface="Trebuchet MS" pitchFamily="34" charset="0"/>
-                <a:ea typeface="Trebuchet MS" pitchFamily="34" charset="-122"/>
-                <a:cs typeface="Trebuchet MS" pitchFamily="34" charset="-120"/>
-              </a:rPr>
-              <a:t>API service</a:t>
-            </a:r>
-            <a:endParaRPr lang="en-US" sz="1300" dirty="0"/>
-          </a:p>
-        </p:txBody>
-      </p:sp>
-      <p:sp>
-        <p:nvSpPr>
-          <p:cNvPr id="19" name="Text 17"/>
-          <p:cNvSpPr/>
-          <p:nvPr/>
-        </p:nvSpPr>
-        <p:spPr>
-          <a:xfrm>
-            <a:off x="4974336" y="2468880"/>
-            <a:ext cx="1554480" cy="411480"/>
-          </a:xfrm>
-          <a:prstGeom prst="rect">
-            <a:avLst/>
-          </a:prstGeom>
-          <a:noFill/>
-          <a:ln/>
-        </p:spPr>
-        <p:txBody>
-          <a:bodyPr wrap="square" lIns="0" tIns="0" rIns="0" bIns="0" rtlCol="0" anchor="t"/>
-          <a:lstStyle/>
-          <a:p>
-            <a:pPr marL="0" indent="0" algn="l">
-              <a:lnSpc>
-                <a:spcPct val="100000"/>
-              </a:lnSpc>
-              <a:buNone/>
-            </a:pPr>
-            <a:r>
-              <a:rPr lang="en-US" sz="1000" dirty="0">
-                <a:solidFill>
-                  <a:srgbClr val="AEB4BC"/>
-                </a:solidFill>
-                <a:latin typeface="Calibri" pitchFamily="34" charset="0"/>
-                <a:ea typeface="Calibri" pitchFamily="34" charset="-122"/>
-                <a:cs typeface="Calibri" pitchFamily="34" charset="-120"/>
-              </a:rPr>
-              <a:t>Application &amp; business logic</a:t>
-            </a:r>
-            <a:endParaRPr lang="en-US" sz="1000" dirty="0"/>
-          </a:p>
-        </p:txBody>
-      </p:sp>
-      <p:sp>
-        <p:nvSpPr>
-          <p:cNvPr id="20" name="Text 18"/>
-          <p:cNvSpPr/>
-          <p:nvPr/>
-        </p:nvSpPr>
-        <p:spPr>
-          <a:xfrm>
-            <a:off x="6620256" y="1920240"/>
-            <a:ext cx="338328" cy="1051560"/>
-          </a:xfrm>
-          <a:prstGeom prst="rect">
-            <a:avLst/>
-          </a:prstGeom>
-          <a:noFill/>
-          <a:ln/>
-        </p:spPr>
-        <p:txBody>
-          <a:bodyPr wrap="square" lIns="0" tIns="0" rIns="0" bIns="0" rtlCol="0" anchor="ctr"/>
-          <a:lstStyle/>
-          <a:p>
-            <a:pPr marL="0" indent="0" algn="ctr">
-              <a:buNone/>
-            </a:pPr>
-            <a:r>
-              <a:rPr lang="en-US" sz="2000" b="1" dirty="0">
-                <a:solidFill>
-                  <a:srgbClr val="D81E2C"/>
-                </a:solidFill>
-                <a:latin typeface="Trebuchet MS" pitchFamily="34" charset="0"/>
-                <a:ea typeface="Trebuchet MS" pitchFamily="34" charset="-122"/>
-                <a:cs typeface="Trebuchet MS" pitchFamily="34" charset="-120"/>
-              </a:rPr>
-              <a:t>→</a:t>
-            </a:r>
-            <a:endParaRPr lang="en-US" sz="2000" dirty="0"/>
-          </a:p>
-        </p:txBody>
-      </p:sp>
-      <p:sp>
-        <p:nvSpPr>
-          <p:cNvPr id="21" name="Shape 19"/>
-          <p:cNvSpPr/>
-          <p:nvPr/>
-        </p:nvSpPr>
-        <p:spPr>
-          <a:xfrm>
-            <a:off x="6940296" y="1920240"/>
-            <a:ext cx="1828800" cy="1051560"/>
-          </a:xfrm>
-          <a:prstGeom prst="rect">
-            <a:avLst/>
-          </a:prstGeom>
-          <a:solidFill>
-            <a:srgbClr val="2E333B"/>
-          </a:solidFill>
-          <a:ln w="12700">
-            <a:solidFill>
-              <a:srgbClr val="3D434C"/>
-            </a:solidFill>
-            <a:prstDash val="solid"/>
+          <a:effectLst>
+            <a:outerShdw blurRad="292100" dist="139700" dir="2700000" algn="tl" rotWithShape="0">
+              <a:srgbClr val="333333">
+                <a:alpha val="65000"/>
+              </a:srgbClr>
+            </a:outerShdw>
+          </a:effectLst>
+        </p:spPr>
+      </p:pic>
+      <p:pic>
+        <p:nvPicPr>
+          <p:cNvPr id="14" name="Picture 13">
+            <a:extLst>
+              <a:ext uri="{FF2B5EF4-FFF2-40B4-BE49-F238E27FC236}">
+                <a16:creationId xmlns:a16="http://schemas.microsoft.com/office/drawing/2014/main" id="{92740ED0-EB61-BBA2-54DF-27B4789F8043}"/>
+              </a:ext>
+            </a:extLst>
+          </p:cNvPr>
+          <p:cNvPicPr>
+            <a:picLocks noChangeAspect="1"/>
+          </p:cNvPicPr>
+          <p:nvPr/>
+        </p:nvPicPr>
+        <p:blipFill>
+          <a:blip r:embed="rId4"/>
+          <a:stretch>
+            <a:fillRect/>
+          </a:stretch>
+        </p:blipFill>
+        <p:spPr>
+          <a:xfrm>
+            <a:off x="6619521" y="819470"/>
+            <a:ext cx="1975839" cy="3857815"/>
+          </a:xfrm>
+          <a:prstGeom prst="rect">
+            <a:avLst/>
+          </a:prstGeom>
+          <a:ln>
+            <a:noFill/>
           </a:ln>
-        </p:spPr>
-        <p:txBody>
-          <a:bodyPr/>
-          <a:lstStyle/>
-          <a:p>
-            <a:endParaRPr lang="en-US"/>
-          </a:p>
-        </p:txBody>
-      </p:sp>
-      <p:sp>
-        <p:nvSpPr>
-          <p:cNvPr id="22" name="Shape 20"/>
-          <p:cNvSpPr/>
-          <p:nvPr/>
-        </p:nvSpPr>
-        <p:spPr>
-          <a:xfrm>
-            <a:off x="6940296" y="1920240"/>
-            <a:ext cx="64008" cy="1051560"/>
-          </a:xfrm>
-          <a:prstGeom prst="rect">
-            <a:avLst/>
-          </a:prstGeom>
-          <a:solidFill>
-            <a:srgbClr val="D81E2C"/>
-          </a:solidFill>
-          <a:ln/>
-        </p:spPr>
-        <p:txBody>
-          <a:bodyPr/>
-          <a:lstStyle/>
-          <a:p>
-            <a:endParaRPr lang="en-US"/>
-          </a:p>
-        </p:txBody>
-      </p:sp>
-      <p:sp>
-        <p:nvSpPr>
-          <p:cNvPr id="23" name="Text 21"/>
-          <p:cNvSpPr/>
-          <p:nvPr/>
-        </p:nvSpPr>
-        <p:spPr>
-          <a:xfrm>
-            <a:off x="7104888" y="2066544"/>
-            <a:ext cx="1554480" cy="365760"/>
-          </a:xfrm>
-          <a:prstGeom prst="rect">
-            <a:avLst/>
-          </a:prstGeom>
-          <a:noFill/>
-          <a:ln/>
-        </p:spPr>
-        <p:txBody>
-          <a:bodyPr wrap="square" lIns="0" tIns="0" rIns="0" bIns="0" rtlCol="0" anchor="ctr"/>
-          <a:lstStyle/>
-          <a:p>
-            <a:pPr marL="0" indent="0" algn="l">
-              <a:lnSpc>
-                <a:spcPct val="95000"/>
-              </a:lnSpc>
-              <a:buNone/>
-            </a:pPr>
-            <a:r>
-              <a:rPr lang="en-US" sz="1300" b="1" dirty="0">
-                <a:solidFill>
-                  <a:srgbClr val="FFFFFF"/>
-                </a:solidFill>
-                <a:latin typeface="Trebuchet MS" pitchFamily="34" charset="0"/>
-                <a:ea typeface="Trebuchet MS" pitchFamily="34" charset="-122"/>
-                <a:cs typeface="Trebuchet MS" pitchFamily="34" charset="-120"/>
-              </a:rPr>
-              <a:t>Database</a:t>
-            </a:r>
-            <a:endParaRPr lang="en-US" sz="1300" dirty="0"/>
-          </a:p>
-        </p:txBody>
-      </p:sp>
-      <p:sp>
-        <p:nvSpPr>
-          <p:cNvPr id="24" name="Text 22"/>
-          <p:cNvSpPr/>
-          <p:nvPr/>
-        </p:nvSpPr>
-        <p:spPr>
-          <a:xfrm>
-            <a:off x="7104888" y="2468880"/>
-            <a:ext cx="1554480" cy="411480"/>
-          </a:xfrm>
-          <a:prstGeom prst="rect">
-            <a:avLst/>
-          </a:prstGeom>
-          <a:noFill/>
-          <a:ln/>
-        </p:spPr>
-        <p:txBody>
-          <a:bodyPr wrap="square" lIns="0" tIns="0" rIns="0" bIns="0" rtlCol="0" anchor="t"/>
-          <a:lstStyle/>
-          <a:p>
-            <a:pPr marL="0" indent="0" algn="l">
-              <a:lnSpc>
-                <a:spcPct val="100000"/>
-              </a:lnSpc>
-              <a:buNone/>
-            </a:pPr>
-            <a:r>
-              <a:rPr lang="en-US" sz="1000" dirty="0">
-                <a:solidFill>
-                  <a:srgbClr val="AEB4BC"/>
-                </a:solidFill>
-                <a:latin typeface="Calibri" pitchFamily="34" charset="0"/>
-                <a:ea typeface="Calibri" pitchFamily="34" charset="-122"/>
-                <a:cs typeface="Calibri" pitchFamily="34" charset="-120"/>
-              </a:rPr>
-              <a:t>Managed relational store</a:t>
-            </a:r>
-            <a:endParaRPr lang="en-US" sz="1000" dirty="0"/>
-          </a:p>
-        </p:txBody>
-      </p:sp>
-      <p:sp>
-        <p:nvSpPr>
-          <p:cNvPr id="25" name="Shape 23"/>
-          <p:cNvSpPr/>
-          <p:nvPr/>
-        </p:nvSpPr>
-        <p:spPr>
-          <a:xfrm>
-            <a:off x="548640" y="3337560"/>
-            <a:ext cx="2587752" cy="1097280"/>
-          </a:xfrm>
-          <a:prstGeom prst="rect">
-            <a:avLst/>
-          </a:prstGeom>
-          <a:solidFill>
-            <a:srgbClr val="1B1E23"/>
-          </a:solidFill>
-          <a:ln w="12700">
-            <a:solidFill>
-              <a:srgbClr val="3D434C"/>
-            </a:solidFill>
-            <a:prstDash val="solid"/>
-          </a:ln>
-        </p:spPr>
-        <p:txBody>
-          <a:bodyPr/>
-          <a:lstStyle/>
-          <a:p>
-            <a:endParaRPr lang="en-US"/>
-          </a:p>
-        </p:txBody>
-      </p:sp>
-      <p:sp>
-        <p:nvSpPr>
-          <p:cNvPr id="26" name="Text 24"/>
-          <p:cNvSpPr/>
-          <p:nvPr/>
-        </p:nvSpPr>
-        <p:spPr>
-          <a:xfrm>
-            <a:off x="731520" y="3502152"/>
-            <a:ext cx="2221992" cy="320040"/>
-          </a:xfrm>
-          <a:prstGeom prst="rect">
-            <a:avLst/>
-          </a:prstGeom>
-          <a:noFill/>
-          <a:ln/>
-        </p:spPr>
-        <p:txBody>
-          <a:bodyPr wrap="square" lIns="0" tIns="0" rIns="0" bIns="0" rtlCol="0" anchor="ctr"/>
-          <a:lstStyle/>
-          <a:p>
-            <a:pPr marL="0" indent="0" algn="l">
-              <a:buNone/>
-            </a:pPr>
-            <a:r>
-              <a:rPr lang="en-US" sz="1350" b="1" dirty="0">
-                <a:solidFill>
-                  <a:srgbClr val="FF8A91"/>
-                </a:solidFill>
-                <a:latin typeface="Trebuchet MS" pitchFamily="34" charset="0"/>
-                <a:ea typeface="Trebuchet MS" pitchFamily="34" charset="-122"/>
-                <a:cs typeface="Trebuchet MS" pitchFamily="34" charset="-120"/>
-              </a:rPr>
-              <a:t>Authentication</a:t>
-            </a:r>
-            <a:endParaRPr lang="en-US" sz="1350" dirty="0"/>
-          </a:p>
-        </p:txBody>
-      </p:sp>
-      <p:sp>
-        <p:nvSpPr>
-          <p:cNvPr id="27" name="Text 25"/>
-          <p:cNvSpPr/>
-          <p:nvPr/>
-        </p:nvSpPr>
-        <p:spPr>
-          <a:xfrm>
-            <a:off x="731520" y="3849624"/>
-            <a:ext cx="2221992" cy="457200"/>
-          </a:xfrm>
-          <a:prstGeom prst="rect">
-            <a:avLst/>
-          </a:prstGeom>
-          <a:noFill/>
-          <a:ln/>
-        </p:spPr>
-        <p:txBody>
-          <a:bodyPr wrap="square" lIns="0" tIns="0" rIns="0" bIns="0" rtlCol="0" anchor="t"/>
-          <a:lstStyle/>
-          <a:p>
-            <a:pPr marL="0" indent="0" algn="l">
-              <a:lnSpc>
-                <a:spcPct val="105000"/>
-              </a:lnSpc>
-              <a:buNone/>
-            </a:pPr>
-            <a:r>
-              <a:rPr lang="en-US" sz="1100" dirty="0">
-                <a:solidFill>
-                  <a:srgbClr val="C9CDD3"/>
-                </a:solidFill>
-                <a:latin typeface="Calibri" pitchFamily="34" charset="0"/>
-                <a:ea typeface="Calibri" pitchFamily="34" charset="-122"/>
-                <a:cs typeface="Calibri" pitchFamily="34" charset="-120"/>
-              </a:rPr>
-              <a:t>User identity &amp; role-based access</a:t>
-            </a:r>
-            <a:endParaRPr lang="en-US" sz="1100" dirty="0"/>
-          </a:p>
-        </p:txBody>
-      </p:sp>
-      <p:sp>
-        <p:nvSpPr>
-          <p:cNvPr id="28" name="Shape 26"/>
-          <p:cNvSpPr/>
-          <p:nvPr/>
-        </p:nvSpPr>
-        <p:spPr>
-          <a:xfrm>
-            <a:off x="3410712" y="3337560"/>
-            <a:ext cx="2587752" cy="1097280"/>
-          </a:xfrm>
-          <a:prstGeom prst="rect">
-            <a:avLst/>
-          </a:prstGeom>
-          <a:solidFill>
-            <a:srgbClr val="1B1E23"/>
-          </a:solidFill>
-          <a:ln w="12700">
-            <a:solidFill>
-              <a:srgbClr val="3D434C"/>
-            </a:solidFill>
-            <a:prstDash val="solid"/>
-          </a:ln>
-        </p:spPr>
-        <p:txBody>
-          <a:bodyPr/>
-          <a:lstStyle/>
-          <a:p>
-            <a:endParaRPr lang="en-US"/>
-          </a:p>
-        </p:txBody>
-      </p:sp>
-      <p:sp>
-        <p:nvSpPr>
-          <p:cNvPr id="29" name="Text 27"/>
-          <p:cNvSpPr/>
-          <p:nvPr/>
-        </p:nvSpPr>
-        <p:spPr>
-          <a:xfrm>
-            <a:off x="3593592" y="3502152"/>
-            <a:ext cx="2221992" cy="320040"/>
-          </a:xfrm>
-          <a:prstGeom prst="rect">
-            <a:avLst/>
-          </a:prstGeom>
-          <a:noFill/>
-          <a:ln/>
-        </p:spPr>
-        <p:txBody>
-          <a:bodyPr wrap="square" lIns="0" tIns="0" rIns="0" bIns="0" rtlCol="0" anchor="ctr"/>
-          <a:lstStyle/>
-          <a:p>
-            <a:pPr marL="0" indent="0" algn="l">
-              <a:buNone/>
-            </a:pPr>
-            <a:r>
-              <a:rPr lang="en-US" sz="1350" b="1" dirty="0">
-                <a:solidFill>
-                  <a:srgbClr val="FF8A91"/>
-                </a:solidFill>
-                <a:latin typeface="Trebuchet MS" pitchFamily="34" charset="0"/>
-                <a:ea typeface="Trebuchet MS" pitchFamily="34" charset="-122"/>
-                <a:cs typeface="Trebuchet MS" pitchFamily="34" charset="-120"/>
-              </a:rPr>
-              <a:t>Object storage</a:t>
-            </a:r>
-            <a:endParaRPr lang="en-US" sz="1350" dirty="0"/>
-          </a:p>
-        </p:txBody>
-      </p:sp>
-      <p:sp>
-        <p:nvSpPr>
-          <p:cNvPr id="30" name="Text 28"/>
-          <p:cNvSpPr/>
-          <p:nvPr/>
-        </p:nvSpPr>
-        <p:spPr>
-          <a:xfrm>
-            <a:off x="3593592" y="3849624"/>
-            <a:ext cx="2221992" cy="457200"/>
-          </a:xfrm>
-          <a:prstGeom prst="rect">
-            <a:avLst/>
-          </a:prstGeom>
-          <a:noFill/>
-          <a:ln/>
-        </p:spPr>
-        <p:txBody>
-          <a:bodyPr wrap="square" lIns="0" tIns="0" rIns="0" bIns="0" rtlCol="0" anchor="t"/>
-          <a:lstStyle/>
-          <a:p>
-            <a:pPr marL="0" indent="0" algn="l">
-              <a:lnSpc>
-                <a:spcPct val="105000"/>
-              </a:lnSpc>
-              <a:buNone/>
-            </a:pPr>
-            <a:r>
-              <a:rPr lang="en-US" sz="1100" dirty="0">
-                <a:solidFill>
-                  <a:srgbClr val="C9CDD3"/>
-                </a:solidFill>
-                <a:latin typeface="Calibri" pitchFamily="34" charset="0"/>
-                <a:ea typeface="Calibri" pitchFamily="34" charset="-122"/>
-                <a:cs typeface="Calibri" pitchFamily="34" charset="-120"/>
-              </a:rPr>
-              <a:t>Reports, exports &amp; attachments</a:t>
-            </a:r>
-            <a:endParaRPr lang="en-US" sz="1100" dirty="0"/>
-          </a:p>
-        </p:txBody>
-      </p:sp>
-      <p:sp>
-        <p:nvSpPr>
-          <p:cNvPr id="31" name="Shape 29"/>
-          <p:cNvSpPr/>
-          <p:nvPr/>
-        </p:nvSpPr>
-        <p:spPr>
-          <a:xfrm>
-            <a:off x="6272784" y="3337560"/>
-            <a:ext cx="2587752" cy="1097280"/>
-          </a:xfrm>
-          <a:prstGeom prst="rect">
-            <a:avLst/>
-          </a:prstGeom>
-          <a:solidFill>
-            <a:srgbClr val="1B1E23"/>
-          </a:solidFill>
-          <a:ln w="12700">
-            <a:solidFill>
-              <a:srgbClr val="3D434C"/>
-            </a:solidFill>
-            <a:prstDash val="solid"/>
-          </a:ln>
-        </p:spPr>
-        <p:txBody>
-          <a:bodyPr/>
-          <a:lstStyle/>
-          <a:p>
-            <a:endParaRPr lang="en-US"/>
-          </a:p>
-        </p:txBody>
-      </p:sp>
-      <p:sp>
-        <p:nvSpPr>
-          <p:cNvPr id="32" name="Text 30"/>
-          <p:cNvSpPr/>
-          <p:nvPr/>
-        </p:nvSpPr>
-        <p:spPr>
-          <a:xfrm>
-            <a:off x="6455664" y="3502152"/>
-            <a:ext cx="2221992" cy="320040"/>
-          </a:xfrm>
-          <a:prstGeom prst="rect">
-            <a:avLst/>
-          </a:prstGeom>
-          <a:noFill/>
-          <a:ln/>
-        </p:spPr>
-        <p:txBody>
-          <a:bodyPr wrap="square" lIns="0" tIns="0" rIns="0" bIns="0" rtlCol="0" anchor="ctr"/>
-          <a:lstStyle/>
-          <a:p>
-            <a:pPr marL="0" indent="0" algn="l">
-              <a:buNone/>
-            </a:pPr>
-            <a:r>
-              <a:rPr lang="en-US" sz="1350" b="1" dirty="0">
-                <a:solidFill>
-                  <a:srgbClr val="FF8A91"/>
-                </a:solidFill>
-                <a:latin typeface="Trebuchet MS" pitchFamily="34" charset="0"/>
-                <a:ea typeface="Trebuchet MS" pitchFamily="34" charset="-122"/>
-                <a:cs typeface="Trebuchet MS" pitchFamily="34" charset="-120"/>
-              </a:rPr>
-              <a:t>CI/CD pipeline</a:t>
-            </a:r>
-            <a:endParaRPr lang="en-US" sz="1350" dirty="0"/>
-          </a:p>
-        </p:txBody>
-      </p:sp>
-      <p:sp>
-        <p:nvSpPr>
-          <p:cNvPr id="33" name="Text 31"/>
-          <p:cNvSpPr/>
-          <p:nvPr/>
-        </p:nvSpPr>
-        <p:spPr>
-          <a:xfrm>
-            <a:off x="6455664" y="3849624"/>
-            <a:ext cx="2221992" cy="457200"/>
-          </a:xfrm>
-          <a:prstGeom prst="rect">
-            <a:avLst/>
-          </a:prstGeom>
-          <a:noFill/>
-          <a:ln/>
-        </p:spPr>
-        <p:txBody>
-          <a:bodyPr wrap="square" lIns="0" tIns="0" rIns="0" bIns="0" rtlCol="0" anchor="t"/>
-          <a:lstStyle/>
-          <a:p>
-            <a:pPr marL="0" indent="0" algn="l">
-              <a:lnSpc>
-                <a:spcPct val="105000"/>
-              </a:lnSpc>
-              <a:buNone/>
-            </a:pPr>
-            <a:r>
-              <a:rPr lang="en-US" sz="1100" dirty="0">
-                <a:solidFill>
-                  <a:srgbClr val="C9CDD3"/>
-                </a:solidFill>
-                <a:latin typeface="Calibri" pitchFamily="34" charset="0"/>
-                <a:ea typeface="Calibri" pitchFamily="34" charset="-122"/>
-                <a:cs typeface="Calibri" pitchFamily="34" charset="-120"/>
-              </a:rPr>
-              <a:t>Automated build, test &amp; deploy</a:t>
-            </a:r>
-            <a:endParaRPr lang="en-US" sz="1100" dirty="0"/>
-          </a:p>
-        </p:txBody>
-      </p:sp>
-      <p:sp>
-        <p:nvSpPr>
-          <p:cNvPr id="34" name="Shape 32"/>
-          <p:cNvSpPr/>
-          <p:nvPr/>
-        </p:nvSpPr>
-        <p:spPr>
-          <a:xfrm>
-            <a:off x="548640" y="4855464"/>
-            <a:ext cx="73152" cy="73152"/>
-          </a:xfrm>
-          <a:prstGeom prst="ellipse">
-            <a:avLst/>
-          </a:prstGeom>
-          <a:solidFill>
-            <a:srgbClr val="D81E2C"/>
-          </a:solidFill>
-          <a:ln/>
-        </p:spPr>
-        <p:txBody>
-          <a:bodyPr/>
-          <a:lstStyle/>
-          <a:p>
-            <a:endParaRPr lang="en-US"/>
-          </a:p>
-        </p:txBody>
-      </p:sp>
-      <p:sp>
-        <p:nvSpPr>
-          <p:cNvPr id="35" name="Text 33"/>
-          <p:cNvSpPr/>
-          <p:nvPr/>
-        </p:nvSpPr>
-        <p:spPr>
-          <a:xfrm>
-            <a:off x="676656" y="4736592"/>
-            <a:ext cx="3657600" cy="292608"/>
-          </a:xfrm>
-          <a:prstGeom prst="rect">
-            <a:avLst/>
-          </a:prstGeom>
-          <a:noFill/>
-          <a:ln/>
-        </p:spPr>
-        <p:txBody>
-          <a:bodyPr wrap="square" lIns="0" tIns="0" rIns="0" bIns="0" rtlCol="0" anchor="ctr"/>
-          <a:lstStyle/>
-          <a:p>
-            <a:pPr marL="0" indent="0" algn="l">
-              <a:buNone/>
-            </a:pPr>
-            <a:r>
-              <a:rPr lang="en-US" sz="950" dirty="0">
-                <a:solidFill>
-                  <a:srgbClr val="8A929C"/>
-                </a:solidFill>
-                <a:latin typeface="Calibri" pitchFamily="34" charset="0"/>
-                <a:ea typeface="Calibri" pitchFamily="34" charset="-122"/>
-                <a:cs typeface="Calibri" pitchFamily="34" charset="-120"/>
-              </a:rPr>
-              <a:t>EMS ReadyKit</a:t>
-            </a:r>
-            <a:endParaRPr lang="en-US" sz="950" dirty="0"/>
-          </a:p>
-        </p:txBody>
-      </p:sp>
-      <p:sp>
-        <p:nvSpPr>
-          <p:cNvPr id="36" name="Text 34"/>
-          <p:cNvSpPr/>
-          <p:nvPr/>
-        </p:nvSpPr>
-        <p:spPr>
-          <a:xfrm>
-            <a:off x="8138160" y="4736592"/>
-            <a:ext cx="457200" cy="292608"/>
-          </a:xfrm>
-          <a:prstGeom prst="rect">
-            <a:avLst/>
-          </a:prstGeom>
-          <a:noFill/>
-          <a:ln/>
-        </p:spPr>
-        <p:txBody>
-          <a:bodyPr wrap="square" lIns="0" tIns="0" rIns="0" bIns="0" rtlCol="0" anchor="ctr"/>
-          <a:lstStyle/>
-          <a:p>
-            <a:pPr marL="0" indent="0" algn="r">
-              <a:buNone/>
-            </a:pPr>
-            <a:r>
-              <a:rPr lang="en-US" sz="950" dirty="0">
-                <a:solidFill>
-                  <a:srgbClr val="8A929C"/>
-                </a:solidFill>
-                <a:latin typeface="Consolas" pitchFamily="34" charset="0"/>
-                <a:ea typeface="Consolas" pitchFamily="34" charset="-122"/>
-                <a:cs typeface="Consolas" pitchFamily="34" charset="-120"/>
-              </a:rPr>
-              <a:t>11</a:t>
-            </a:r>
-            <a:endParaRPr lang="en-US" sz="950" dirty="0"/>
-          </a:p>
-        </p:txBody>
-      </p:sp>
+          <a:effectLst>
+            <a:outerShdw blurRad="292100" dist="139700" dir="2700000" algn="tl" rotWithShape="0">
+              <a:srgbClr val="333333">
+                <a:alpha val="65000"/>
+              </a:srgbClr>
+            </a:outerShdw>
+          </a:effectLst>
+        </p:spPr>
+      </p:pic>
     </p:spTree>
+    <p:extLst>
+      <p:ext uri="{BB962C8B-B14F-4D97-AF65-F5344CB8AC3E}">
+        <p14:creationId xmlns:p14="http://schemas.microsoft.com/office/powerpoint/2010/main" val="720503537"/>
+      </p:ext>
+    </p:extLst>
   </p:cSld>
   <p:clrMapOvr>
     <a:masterClrMapping/>
@@ -13796,6 +14721,3964 @@
 
 <file path=ppt/slides/slide20.xml><?xml version="1.0" encoding="utf-8"?>
 <p:sld xmlns:a="http://schemas.openxmlformats.org/drawingml/2006/main" xmlns:r="http://schemas.openxmlformats.org/officeDocument/2006/relationships" xmlns:p="http://schemas.openxmlformats.org/presentationml/2006/main">
+  <p:cSld>
+    <p:bg>
+      <p:bgPr>
+        <a:solidFill>
+          <a:srgbClr val="F6F5F2"/>
+        </a:solidFill>
+        <a:effectLst/>
+      </p:bgPr>
+    </p:bg>
+    <p:spTree>
+      <p:nvGrpSpPr>
+        <p:cNvPr id="1" name="">
+          <a:extLst>
+            <a:ext uri="{FF2B5EF4-FFF2-40B4-BE49-F238E27FC236}">
+              <a16:creationId xmlns:a16="http://schemas.microsoft.com/office/drawing/2014/main" id="{EFB75567-15C1-C33C-06C7-A633FEC54A4C}"/>
+            </a:ext>
+          </a:extLst>
+        </p:cNvPr>
+        <p:cNvGrpSpPr/>
+        <p:nvPr/>
+      </p:nvGrpSpPr>
+      <p:grpSpPr>
+        <a:xfrm>
+          <a:off x="0" y="0"/>
+          <a:ext cx="0" cy="0"/>
+          <a:chOff x="0" y="0"/>
+          <a:chExt cx="0" cy="0"/>
+        </a:xfrm>
+      </p:grpSpPr>
+      <p:sp>
+        <p:nvSpPr>
+          <p:cNvPr id="15" name="Shape 13">
+            <a:extLst>
+              <a:ext uri="{FF2B5EF4-FFF2-40B4-BE49-F238E27FC236}">
+                <a16:creationId xmlns:a16="http://schemas.microsoft.com/office/drawing/2014/main" id="{5957A27E-E8B3-A5E5-DEF2-99CA440F7D71}"/>
+              </a:ext>
+            </a:extLst>
+          </p:cNvPr>
+          <p:cNvSpPr/>
+          <p:nvPr/>
+        </p:nvSpPr>
+        <p:spPr>
+          <a:xfrm>
+            <a:off x="548640" y="4855464"/>
+            <a:ext cx="73152" cy="73152"/>
+          </a:xfrm>
+          <a:prstGeom prst="ellipse">
+            <a:avLst/>
+          </a:prstGeom>
+          <a:solidFill>
+            <a:srgbClr val="D81E2C"/>
+          </a:solidFill>
+          <a:ln/>
+        </p:spPr>
+        <p:txBody>
+          <a:bodyPr/>
+          <a:lstStyle/>
+          <a:p>
+            <a:pPr marL="0" marR="0" lvl="0" indent="0" algn="l" defTabSz="914400" rtl="0" eaLnBrk="1" fontAlgn="auto" latinLnBrk="0" hangingPunct="1">
+              <a:lnSpc>
+                <a:spcPct val="100000"/>
+              </a:lnSpc>
+              <a:spcBef>
+                <a:spcPts val="0"/>
+              </a:spcBef>
+              <a:spcAft>
+                <a:spcPts val="0"/>
+              </a:spcAft>
+              <a:buClrTx/>
+              <a:buSzTx/>
+              <a:buFontTx/>
+              <a:buNone/>
+              <a:tabLst/>
+              <a:defRPr/>
+            </a:pPr>
+            <a:endParaRPr kumimoji="0" lang="en-US" sz="1800" b="0" i="0" u="none" strike="noStrike" kern="1200" cap="none" spc="0" normalizeH="0" baseline="0" noProof="0">
+              <a:ln>
+                <a:noFill/>
+              </a:ln>
+              <a:solidFill>
+                <a:prstClr val="black"/>
+              </a:solidFill>
+              <a:effectLst/>
+              <a:uLnTx/>
+              <a:uFillTx/>
+              <a:latin typeface="Calibri" panose="020F0502020204030204"/>
+              <a:ea typeface="+mn-ea"/>
+              <a:cs typeface="+mn-cs"/>
+            </a:endParaRPr>
+          </a:p>
+        </p:txBody>
+      </p:sp>
+      <p:sp>
+        <p:nvSpPr>
+          <p:cNvPr id="16" name="Text 14">
+            <a:extLst>
+              <a:ext uri="{FF2B5EF4-FFF2-40B4-BE49-F238E27FC236}">
+                <a16:creationId xmlns:a16="http://schemas.microsoft.com/office/drawing/2014/main" id="{25FDEED7-76E7-2CF5-B82A-C2B2231163BA}"/>
+              </a:ext>
+            </a:extLst>
+          </p:cNvPr>
+          <p:cNvSpPr/>
+          <p:nvPr/>
+        </p:nvSpPr>
+        <p:spPr>
+          <a:xfrm>
+            <a:off x="676656" y="4736592"/>
+            <a:ext cx="3657600" cy="292608"/>
+          </a:xfrm>
+          <a:prstGeom prst="rect">
+            <a:avLst/>
+          </a:prstGeom>
+          <a:noFill/>
+          <a:ln/>
+        </p:spPr>
+        <p:txBody>
+          <a:bodyPr wrap="square" lIns="0" tIns="0" rIns="0" bIns="0" rtlCol="0" anchor="ctr"/>
+          <a:lstStyle/>
+          <a:p>
+            <a:pPr marL="0" marR="0" lvl="0" indent="0" algn="l" defTabSz="914400" rtl="0" eaLnBrk="1" fontAlgn="auto" latinLnBrk="0" hangingPunct="1">
+              <a:lnSpc>
+                <a:spcPct val="100000"/>
+              </a:lnSpc>
+              <a:spcBef>
+                <a:spcPts val="0"/>
+              </a:spcBef>
+              <a:spcAft>
+                <a:spcPts val="0"/>
+              </a:spcAft>
+              <a:buClrTx/>
+              <a:buSzTx/>
+              <a:buFontTx/>
+              <a:buNone/>
+              <a:tabLst/>
+              <a:defRPr/>
+            </a:pPr>
+            <a:r>
+              <a:rPr kumimoji="0" lang="en-US" sz="950" b="0" i="0" u="none" strike="noStrike" kern="1200" cap="none" spc="0" normalizeH="0" baseline="0" noProof="0" dirty="0">
+                <a:ln>
+                  <a:noFill/>
+                </a:ln>
+                <a:solidFill>
+                  <a:srgbClr val="8A929C"/>
+                </a:solidFill>
+                <a:effectLst/>
+                <a:uLnTx/>
+                <a:uFillTx/>
+                <a:latin typeface="Calibri" pitchFamily="34" charset="0"/>
+                <a:ea typeface="Calibri" pitchFamily="34" charset="-122"/>
+                <a:cs typeface="Calibri" pitchFamily="34" charset="-120"/>
+              </a:rPr>
+              <a:t>EMS ReadyKit</a:t>
+            </a:r>
+            <a:endParaRPr kumimoji="0" lang="en-US" sz="950" b="0" i="0" u="none" strike="noStrike" kern="1200" cap="none" spc="0" normalizeH="0" baseline="0" noProof="0" dirty="0">
+              <a:ln>
+                <a:noFill/>
+              </a:ln>
+              <a:solidFill>
+                <a:prstClr val="black"/>
+              </a:solidFill>
+              <a:effectLst/>
+              <a:uLnTx/>
+              <a:uFillTx/>
+              <a:latin typeface="Calibri" panose="020F0502020204030204"/>
+              <a:ea typeface="+mn-ea"/>
+              <a:cs typeface="+mn-cs"/>
+            </a:endParaRPr>
+          </a:p>
+        </p:txBody>
+      </p:sp>
+      <p:sp>
+        <p:nvSpPr>
+          <p:cNvPr id="17" name="Text 15">
+            <a:extLst>
+              <a:ext uri="{FF2B5EF4-FFF2-40B4-BE49-F238E27FC236}">
+                <a16:creationId xmlns:a16="http://schemas.microsoft.com/office/drawing/2014/main" id="{0C2C1F25-800E-4BAA-9C41-553C090D564A}"/>
+              </a:ext>
+            </a:extLst>
+          </p:cNvPr>
+          <p:cNvSpPr/>
+          <p:nvPr/>
+        </p:nvSpPr>
+        <p:spPr>
+          <a:xfrm>
+            <a:off x="8138160" y="4736592"/>
+            <a:ext cx="457200" cy="292608"/>
+          </a:xfrm>
+          <a:prstGeom prst="rect">
+            <a:avLst/>
+          </a:prstGeom>
+          <a:noFill/>
+          <a:ln/>
+        </p:spPr>
+        <p:txBody>
+          <a:bodyPr wrap="square" lIns="0" tIns="0" rIns="0" bIns="0" rtlCol="0" anchor="ctr"/>
+          <a:lstStyle/>
+          <a:p>
+            <a:pPr marL="0" marR="0" lvl="0" indent="0" algn="r" defTabSz="914400" rtl="0" eaLnBrk="1" fontAlgn="auto" latinLnBrk="0" hangingPunct="1">
+              <a:lnSpc>
+                <a:spcPct val="100000"/>
+              </a:lnSpc>
+              <a:spcBef>
+                <a:spcPts val="0"/>
+              </a:spcBef>
+              <a:spcAft>
+                <a:spcPts val="0"/>
+              </a:spcAft>
+              <a:buClrTx/>
+              <a:buSzTx/>
+              <a:buFontTx/>
+              <a:buNone/>
+              <a:tabLst/>
+              <a:defRPr/>
+            </a:pPr>
+            <a:r>
+              <a:rPr kumimoji="0" lang="en-US" sz="950" b="0" i="0" u="none" strike="noStrike" kern="1200" cap="none" spc="0" normalizeH="0" baseline="0" noProof="0" dirty="0">
+                <a:ln>
+                  <a:noFill/>
+                </a:ln>
+                <a:solidFill>
+                  <a:srgbClr val="8A929C"/>
+                </a:solidFill>
+                <a:effectLst/>
+                <a:uLnTx/>
+                <a:uFillTx/>
+                <a:latin typeface="Consolas" pitchFamily="34" charset="0"/>
+                <a:ea typeface="Consolas" pitchFamily="34" charset="-122"/>
+                <a:cs typeface="Consolas" pitchFamily="34" charset="-120"/>
+              </a:rPr>
+              <a:t>10</a:t>
+            </a:r>
+            <a:endParaRPr kumimoji="0" lang="en-US" sz="950" b="0" i="0" u="none" strike="noStrike" kern="1200" cap="none" spc="0" normalizeH="0" baseline="0" noProof="0" dirty="0">
+              <a:ln>
+                <a:noFill/>
+              </a:ln>
+              <a:solidFill>
+                <a:prstClr val="black"/>
+              </a:solidFill>
+              <a:effectLst/>
+              <a:uLnTx/>
+              <a:uFillTx/>
+              <a:latin typeface="Calibri" panose="020F0502020204030204"/>
+              <a:ea typeface="+mn-ea"/>
+              <a:cs typeface="+mn-cs"/>
+            </a:endParaRPr>
+          </a:p>
+        </p:txBody>
+      </p:sp>
+      <p:sp>
+        <p:nvSpPr>
+          <p:cNvPr id="10" name="Rectangle: Rounded Corners 9">
+            <a:extLst>
+              <a:ext uri="{FF2B5EF4-FFF2-40B4-BE49-F238E27FC236}">
+                <a16:creationId xmlns:a16="http://schemas.microsoft.com/office/drawing/2014/main" id="{B3F7F140-95D2-A059-E04C-73106B152F55}"/>
+              </a:ext>
+            </a:extLst>
+          </p:cNvPr>
+          <p:cNvSpPr/>
+          <p:nvPr/>
+        </p:nvSpPr>
+        <p:spPr>
+          <a:xfrm>
+            <a:off x="1408363" y="590007"/>
+            <a:ext cx="861391" cy="182880"/>
+          </a:xfrm>
+          <a:prstGeom prst="roundRect">
+            <a:avLst/>
+          </a:prstGeom>
+          <a:solidFill>
+            <a:srgbClr val="D81E2C"/>
+          </a:solidFill>
+          <a:ln>
+            <a:solidFill>
+              <a:schemeClr val="bg1"/>
+            </a:solidFill>
+          </a:ln>
+        </p:spPr>
+        <p:style>
+          <a:lnRef idx="2">
+            <a:schemeClr val="accent1">
+              <a:shade val="15000"/>
+            </a:schemeClr>
+          </a:lnRef>
+          <a:fillRef idx="1">
+            <a:schemeClr val="accent1"/>
+          </a:fillRef>
+          <a:effectRef idx="0">
+            <a:schemeClr val="accent1"/>
+          </a:effectRef>
+          <a:fontRef idx="minor">
+            <a:schemeClr val="lt1"/>
+          </a:fontRef>
+        </p:style>
+        <p:txBody>
+          <a:bodyPr rtlCol="0" anchor="ctr"/>
+          <a:lstStyle/>
+          <a:p>
+            <a:pPr marL="0" marR="0" lvl="0" indent="0" algn="ctr" defTabSz="914400" rtl="0" eaLnBrk="1" fontAlgn="auto" latinLnBrk="0" hangingPunct="1">
+              <a:lnSpc>
+                <a:spcPct val="100000"/>
+              </a:lnSpc>
+              <a:spcBef>
+                <a:spcPts val="0"/>
+              </a:spcBef>
+              <a:spcAft>
+                <a:spcPts val="0"/>
+              </a:spcAft>
+              <a:buClrTx/>
+              <a:buSzTx/>
+              <a:buFontTx/>
+              <a:buNone/>
+              <a:tabLst/>
+              <a:defRPr/>
+            </a:pPr>
+            <a:r>
+              <a:rPr kumimoji="0" lang="en-US" sz="1000" b="0" i="0" u="none" strike="noStrike" kern="1200" cap="none" spc="0" normalizeH="0" baseline="0" noProof="0" dirty="0">
+                <a:ln>
+                  <a:noFill/>
+                </a:ln>
+                <a:solidFill>
+                  <a:prstClr val="white"/>
+                </a:solidFill>
+                <a:effectLst/>
+                <a:uLnTx/>
+                <a:uFillTx/>
+                <a:latin typeface="Calibri" panose="020F0502020204030204"/>
+                <a:ea typeface="+mn-ea"/>
+                <a:cs typeface="+mn-cs"/>
+              </a:rPr>
+              <a:t>Supervisor</a:t>
+            </a:r>
+          </a:p>
+        </p:txBody>
+      </p:sp>
+      <p:sp>
+        <p:nvSpPr>
+          <p:cNvPr id="11" name="Rectangle: Rounded Corners 10">
+            <a:extLst>
+              <a:ext uri="{FF2B5EF4-FFF2-40B4-BE49-F238E27FC236}">
+                <a16:creationId xmlns:a16="http://schemas.microsoft.com/office/drawing/2014/main" id="{AA93DBF3-577E-92B5-F5CC-AE784FA2C709}"/>
+              </a:ext>
+            </a:extLst>
+          </p:cNvPr>
+          <p:cNvSpPr/>
+          <p:nvPr/>
+        </p:nvSpPr>
+        <p:spPr>
+          <a:xfrm>
+            <a:off x="3847137" y="612600"/>
+            <a:ext cx="861391" cy="182880"/>
+          </a:xfrm>
+          <a:prstGeom prst="roundRect">
+            <a:avLst/>
+          </a:prstGeom>
+          <a:solidFill>
+            <a:srgbClr val="D81E2C"/>
+          </a:solidFill>
+          <a:ln>
+            <a:solidFill>
+              <a:schemeClr val="bg1"/>
+            </a:solidFill>
+          </a:ln>
+        </p:spPr>
+        <p:style>
+          <a:lnRef idx="2">
+            <a:schemeClr val="accent1">
+              <a:shade val="15000"/>
+            </a:schemeClr>
+          </a:lnRef>
+          <a:fillRef idx="1">
+            <a:schemeClr val="accent1"/>
+          </a:fillRef>
+          <a:effectRef idx="0">
+            <a:schemeClr val="accent1"/>
+          </a:effectRef>
+          <a:fontRef idx="minor">
+            <a:schemeClr val="lt1"/>
+          </a:fontRef>
+        </p:style>
+        <p:txBody>
+          <a:bodyPr rtlCol="0" anchor="ctr"/>
+          <a:lstStyle/>
+          <a:p>
+            <a:pPr marL="0" marR="0" lvl="0" indent="0" algn="ctr" defTabSz="914400" rtl="0" eaLnBrk="1" fontAlgn="auto" latinLnBrk="0" hangingPunct="1">
+              <a:lnSpc>
+                <a:spcPct val="100000"/>
+              </a:lnSpc>
+              <a:spcBef>
+                <a:spcPts val="0"/>
+              </a:spcBef>
+              <a:spcAft>
+                <a:spcPts val="0"/>
+              </a:spcAft>
+              <a:buClrTx/>
+              <a:buSzTx/>
+              <a:buFontTx/>
+              <a:buNone/>
+              <a:tabLst/>
+              <a:defRPr/>
+            </a:pPr>
+            <a:r>
+              <a:rPr kumimoji="0" lang="en-US" sz="1000" b="0" i="0" u="none" strike="noStrike" kern="1200" cap="none" spc="0" normalizeH="0" baseline="0" noProof="0" dirty="0">
+                <a:ln>
+                  <a:noFill/>
+                </a:ln>
+                <a:solidFill>
+                  <a:prstClr val="white"/>
+                </a:solidFill>
+                <a:effectLst/>
+                <a:uLnTx/>
+                <a:uFillTx/>
+                <a:latin typeface="Calibri" panose="020F0502020204030204"/>
+                <a:ea typeface="+mn-ea"/>
+                <a:cs typeface="+mn-cs"/>
+              </a:rPr>
+              <a:t>Supervisor</a:t>
+            </a:r>
+          </a:p>
+        </p:txBody>
+      </p:sp>
+      <p:sp>
+        <p:nvSpPr>
+          <p:cNvPr id="5" name="Text 1">
+            <a:extLst>
+              <a:ext uri="{FF2B5EF4-FFF2-40B4-BE49-F238E27FC236}">
+                <a16:creationId xmlns:a16="http://schemas.microsoft.com/office/drawing/2014/main" id="{3C854258-965E-298A-2421-5CEB4965B9A4}"/>
+              </a:ext>
+            </a:extLst>
+          </p:cNvPr>
+          <p:cNvSpPr/>
+          <p:nvPr/>
+        </p:nvSpPr>
+        <p:spPr>
+          <a:xfrm>
+            <a:off x="5266201" y="749808"/>
+            <a:ext cx="3291840" cy="868680"/>
+          </a:xfrm>
+          <a:prstGeom prst="rect">
+            <a:avLst/>
+          </a:prstGeom>
+          <a:noFill/>
+          <a:ln/>
+        </p:spPr>
+        <p:txBody>
+          <a:bodyPr wrap="square" lIns="0" tIns="0" rIns="0" bIns="0" rtlCol="0" anchor="t"/>
+          <a:lstStyle/>
+          <a:p>
+            <a:pPr marL="0" marR="0" lvl="0" indent="0" algn="l" defTabSz="914400" rtl="0" eaLnBrk="1" fontAlgn="auto" latinLnBrk="0" hangingPunct="1">
+              <a:lnSpc>
+                <a:spcPct val="100000"/>
+              </a:lnSpc>
+              <a:spcBef>
+                <a:spcPts val="0"/>
+              </a:spcBef>
+              <a:spcAft>
+                <a:spcPts val="0"/>
+              </a:spcAft>
+              <a:buClrTx/>
+              <a:buSzTx/>
+              <a:buFontTx/>
+              <a:buNone/>
+              <a:tabLst/>
+              <a:defRPr/>
+            </a:pPr>
+            <a:r>
+              <a:rPr kumimoji="0" lang="en-US" sz="2500" b="1" i="0" u="none" strike="noStrike" kern="1200" cap="none" spc="0" normalizeH="0" baseline="0" noProof="0" dirty="0">
+                <a:ln>
+                  <a:noFill/>
+                </a:ln>
+                <a:solidFill>
+                  <a:srgbClr val="23262B"/>
+                </a:solidFill>
+                <a:effectLst/>
+                <a:uLnTx/>
+                <a:uFillTx/>
+                <a:latin typeface="Trebuchet MS" pitchFamily="34" charset="0"/>
+                <a:ea typeface="Trebuchet MS" pitchFamily="34" charset="-122"/>
+                <a:cs typeface="Trebuchet MS" pitchFamily="34" charset="-120"/>
+              </a:rPr>
+              <a:t>Portable Locations</a:t>
+            </a:r>
+            <a:endParaRPr kumimoji="0" lang="en-US" sz="2500" b="0" i="0" u="none" strike="noStrike" kern="1200" cap="none" spc="0" normalizeH="0" baseline="0" noProof="0" dirty="0">
+              <a:ln>
+                <a:noFill/>
+              </a:ln>
+              <a:solidFill>
+                <a:prstClr val="black"/>
+              </a:solidFill>
+              <a:effectLst/>
+              <a:uLnTx/>
+              <a:uFillTx/>
+              <a:latin typeface="Calibri" panose="020F0502020204030204"/>
+              <a:ea typeface="+mn-ea"/>
+              <a:cs typeface="+mn-cs"/>
+            </a:endParaRPr>
+          </a:p>
+        </p:txBody>
+      </p:sp>
+      <p:sp>
+        <p:nvSpPr>
+          <p:cNvPr id="6" name="Text 2">
+            <a:extLst>
+              <a:ext uri="{FF2B5EF4-FFF2-40B4-BE49-F238E27FC236}">
+                <a16:creationId xmlns:a16="http://schemas.microsoft.com/office/drawing/2014/main" id="{E2206871-C3FE-81B7-8F70-A3A125ABE0DE}"/>
+              </a:ext>
+            </a:extLst>
+          </p:cNvPr>
+          <p:cNvSpPr/>
+          <p:nvPr/>
+        </p:nvSpPr>
+        <p:spPr>
+          <a:xfrm>
+            <a:off x="5266201" y="1691640"/>
+            <a:ext cx="3291840" cy="685800"/>
+          </a:xfrm>
+          <a:prstGeom prst="rect">
+            <a:avLst/>
+          </a:prstGeom>
+          <a:noFill/>
+          <a:ln/>
+        </p:spPr>
+        <p:txBody>
+          <a:bodyPr wrap="square" lIns="0" tIns="0" rIns="0" bIns="0" rtlCol="0" anchor="t"/>
+          <a:lstStyle/>
+          <a:p>
+            <a:pPr marL="0" marR="0" lvl="0" indent="0" algn="l" defTabSz="914400" rtl="0" eaLnBrk="1" fontAlgn="auto" latinLnBrk="0" hangingPunct="1">
+              <a:lnSpc>
+                <a:spcPct val="112000"/>
+              </a:lnSpc>
+              <a:spcBef>
+                <a:spcPts val="0"/>
+              </a:spcBef>
+              <a:spcAft>
+                <a:spcPts val="0"/>
+              </a:spcAft>
+              <a:buClrTx/>
+              <a:buSzTx/>
+              <a:buFontTx/>
+              <a:buNone/>
+              <a:tabLst/>
+              <a:defRPr/>
+            </a:pPr>
+            <a:r>
+              <a:rPr kumimoji="0" lang="en-US" sz="1300" b="0" i="0" u="none" strike="noStrike" kern="1200" cap="none" spc="0" normalizeH="0" baseline="0" noProof="0" dirty="0">
+                <a:ln>
+                  <a:noFill/>
+                </a:ln>
+                <a:solidFill>
+                  <a:srgbClr val="555E6B"/>
+                </a:solidFill>
+                <a:effectLst/>
+                <a:uLnTx/>
+                <a:uFillTx/>
+                <a:latin typeface="Calibri" pitchFamily="34" charset="0"/>
+                <a:ea typeface="Calibri" pitchFamily="34" charset="-122"/>
+                <a:cs typeface="Calibri" pitchFamily="34" charset="-120"/>
+              </a:rPr>
+              <a:t>Supervisors can add portable locations, such as jump bags from this view.</a:t>
+            </a:r>
+            <a:endParaRPr kumimoji="0" lang="en-US" sz="1300" b="0" i="0" u="none" strike="noStrike" kern="1200" cap="none" spc="0" normalizeH="0" baseline="0" noProof="0" dirty="0">
+              <a:ln>
+                <a:noFill/>
+              </a:ln>
+              <a:solidFill>
+                <a:prstClr val="black"/>
+              </a:solidFill>
+              <a:effectLst/>
+              <a:uLnTx/>
+              <a:uFillTx/>
+              <a:latin typeface="Calibri" panose="020F0502020204030204"/>
+              <a:ea typeface="+mn-ea"/>
+              <a:cs typeface="+mn-cs"/>
+            </a:endParaRPr>
+          </a:p>
+        </p:txBody>
+      </p:sp>
+      <p:sp>
+        <p:nvSpPr>
+          <p:cNvPr id="8" name="Text 3">
+            <a:extLst>
+              <a:ext uri="{FF2B5EF4-FFF2-40B4-BE49-F238E27FC236}">
+                <a16:creationId xmlns:a16="http://schemas.microsoft.com/office/drawing/2014/main" id="{D4F88C5C-32D1-29D5-96F9-85BFBF884C40}"/>
+              </a:ext>
+            </a:extLst>
+          </p:cNvPr>
+          <p:cNvSpPr/>
+          <p:nvPr/>
+        </p:nvSpPr>
+        <p:spPr>
+          <a:xfrm>
+            <a:off x="5266201" y="2468880"/>
+            <a:ext cx="3291840" cy="2011680"/>
+          </a:xfrm>
+          <a:prstGeom prst="rect">
+            <a:avLst/>
+          </a:prstGeom>
+          <a:noFill/>
+          <a:ln/>
+        </p:spPr>
+        <p:txBody>
+          <a:bodyPr wrap="square" lIns="0" tIns="0" rIns="0" bIns="0" rtlCol="0" anchor="t"/>
+          <a:lstStyle/>
+          <a:p>
+            <a:pPr marL="177800" marR="0" lvl="0" indent="-177800" algn="l" defTabSz="914400" rtl="0" eaLnBrk="1" fontAlgn="auto" latinLnBrk="0" hangingPunct="1">
+              <a:lnSpc>
+                <a:spcPct val="100000"/>
+              </a:lnSpc>
+              <a:spcBef>
+                <a:spcPts val="0"/>
+              </a:spcBef>
+              <a:spcAft>
+                <a:spcPts val="800"/>
+              </a:spcAft>
+              <a:buClrTx/>
+              <a:buSzPct val="100000"/>
+              <a:buFontTx/>
+              <a:buChar char="–"/>
+              <a:tabLst/>
+              <a:defRPr/>
+            </a:pPr>
+            <a:r>
+              <a:rPr kumimoji="0" lang="en-US" sz="1250" b="0" i="0" u="none" strike="noStrike" kern="1200" cap="none" spc="0" normalizeH="0" baseline="0" noProof="0" dirty="0">
+                <a:ln>
+                  <a:noFill/>
+                </a:ln>
+                <a:solidFill>
+                  <a:srgbClr val="23262B"/>
+                </a:solidFill>
+                <a:effectLst/>
+                <a:uLnTx/>
+                <a:uFillTx/>
+                <a:latin typeface="Calibri" pitchFamily="34" charset="0"/>
+                <a:ea typeface="Calibri" pitchFamily="34" charset="-122"/>
+                <a:cs typeface="Calibri" pitchFamily="34" charset="-120"/>
+              </a:rPr>
+              <a:t>Bag details can be added or edited</a:t>
+            </a:r>
+            <a:endParaRPr kumimoji="0" lang="en-US" sz="1250" b="0" i="0" u="none" strike="noStrike" kern="1200" cap="none" spc="0" normalizeH="0" baseline="0" noProof="0" dirty="0">
+              <a:ln>
+                <a:noFill/>
+              </a:ln>
+              <a:solidFill>
+                <a:prstClr val="black"/>
+              </a:solidFill>
+              <a:effectLst/>
+              <a:uLnTx/>
+              <a:uFillTx/>
+              <a:latin typeface="Calibri" panose="020F0502020204030204"/>
+              <a:ea typeface="+mn-ea"/>
+              <a:cs typeface="+mn-cs"/>
+            </a:endParaRPr>
+          </a:p>
+          <a:p>
+            <a:pPr marL="177800" marR="0" lvl="0" indent="-177800" algn="l" defTabSz="914400" rtl="0" eaLnBrk="1" fontAlgn="auto" latinLnBrk="0" hangingPunct="1">
+              <a:lnSpc>
+                <a:spcPct val="100000"/>
+              </a:lnSpc>
+              <a:spcBef>
+                <a:spcPts val="0"/>
+              </a:spcBef>
+              <a:spcAft>
+                <a:spcPts val="800"/>
+              </a:spcAft>
+              <a:buClrTx/>
+              <a:buSzPct val="100000"/>
+              <a:buFontTx/>
+              <a:buChar char="–"/>
+              <a:tabLst/>
+              <a:defRPr/>
+            </a:pPr>
+            <a:r>
+              <a:rPr kumimoji="0" lang="en-US" sz="1250" b="0" i="0" u="none" strike="noStrike" kern="1200" cap="none" spc="0" normalizeH="0" baseline="0" noProof="0" dirty="0">
+                <a:ln>
+                  <a:noFill/>
+                </a:ln>
+                <a:solidFill>
+                  <a:srgbClr val="23262B"/>
+                </a:solidFill>
+                <a:effectLst/>
+                <a:uLnTx/>
+                <a:uFillTx/>
+                <a:latin typeface="Calibri" pitchFamily="34" charset="0"/>
+                <a:ea typeface="Calibri" pitchFamily="34" charset="-122"/>
+                <a:cs typeface="Calibri" pitchFamily="34" charset="-120"/>
+              </a:rPr>
+              <a:t>Basic colors assigned</a:t>
+            </a:r>
+          </a:p>
+          <a:p>
+            <a:pPr marL="177800" marR="0" lvl="0" indent="-177800" algn="l" defTabSz="914400" rtl="0" eaLnBrk="1" fontAlgn="auto" latinLnBrk="0" hangingPunct="1">
+              <a:lnSpc>
+                <a:spcPct val="100000"/>
+              </a:lnSpc>
+              <a:spcBef>
+                <a:spcPts val="0"/>
+              </a:spcBef>
+              <a:spcAft>
+                <a:spcPts val="800"/>
+              </a:spcAft>
+              <a:buClrTx/>
+              <a:buSzPct val="100000"/>
+              <a:buFontTx/>
+              <a:buChar char="–"/>
+              <a:tabLst/>
+              <a:defRPr/>
+            </a:pPr>
+            <a:r>
+              <a:rPr kumimoji="0" lang="en-US" sz="1250" b="0" i="0" u="none" strike="noStrike" kern="1200" cap="none" spc="0" normalizeH="0" baseline="0" noProof="0" dirty="0">
+                <a:ln>
+                  <a:noFill/>
+                </a:ln>
+                <a:solidFill>
+                  <a:srgbClr val="23262B"/>
+                </a:solidFill>
+                <a:effectLst/>
+                <a:uLnTx/>
+                <a:uFillTx/>
+                <a:latin typeface="Calibri" pitchFamily="34" charset="0"/>
+                <a:ea typeface="Calibri" pitchFamily="34" charset="-122"/>
+                <a:cs typeface="Calibri" pitchFamily="34" charset="-120"/>
+              </a:rPr>
+              <a:t>Custom compartments created and edited</a:t>
+            </a:r>
+          </a:p>
+          <a:p>
+            <a:pPr marL="177800" marR="0" lvl="0" indent="-177800" algn="l" defTabSz="914400" rtl="0" eaLnBrk="1" fontAlgn="auto" latinLnBrk="0" hangingPunct="1">
+              <a:lnSpc>
+                <a:spcPct val="100000"/>
+              </a:lnSpc>
+              <a:spcBef>
+                <a:spcPts val="0"/>
+              </a:spcBef>
+              <a:spcAft>
+                <a:spcPts val="800"/>
+              </a:spcAft>
+              <a:buClrTx/>
+              <a:buSzPct val="100000"/>
+              <a:buFontTx/>
+              <a:buChar char="–"/>
+              <a:tabLst/>
+              <a:defRPr/>
+            </a:pPr>
+            <a:r>
+              <a:rPr kumimoji="0" lang="en-US" sz="1250" b="0" i="0" u="none" strike="noStrike" kern="1200" cap="none" spc="0" normalizeH="0" baseline="0" noProof="0" dirty="0">
+                <a:ln>
+                  <a:noFill/>
+                </a:ln>
+                <a:solidFill>
+                  <a:srgbClr val="23262B"/>
+                </a:solidFill>
+                <a:effectLst/>
+                <a:uLnTx/>
+                <a:uFillTx/>
+                <a:latin typeface="Calibri" pitchFamily="34" charset="0"/>
+                <a:ea typeface="Calibri" pitchFamily="34" charset="-122"/>
+                <a:cs typeface="Calibri" pitchFamily="34" charset="-120"/>
+              </a:rPr>
+              <a:t>Items added to compartments with custom par levels</a:t>
+            </a:r>
+          </a:p>
+          <a:p>
+            <a:pPr marL="0" marR="0" lvl="0" indent="0" algn="l" defTabSz="914400" rtl="0" eaLnBrk="1" fontAlgn="auto" latinLnBrk="0" hangingPunct="1">
+              <a:lnSpc>
+                <a:spcPct val="100000"/>
+              </a:lnSpc>
+              <a:spcBef>
+                <a:spcPts val="0"/>
+              </a:spcBef>
+              <a:spcAft>
+                <a:spcPts val="800"/>
+              </a:spcAft>
+              <a:buClrTx/>
+              <a:buSzPct val="100000"/>
+              <a:buFontTx/>
+              <a:buNone/>
+              <a:tabLst/>
+              <a:defRPr/>
+            </a:pPr>
+            <a:endParaRPr kumimoji="0" lang="en-US" sz="1250" b="0" i="0" u="none" strike="noStrike" kern="1200" cap="none" spc="0" normalizeH="0" baseline="0" noProof="0" dirty="0">
+              <a:ln>
+                <a:noFill/>
+              </a:ln>
+              <a:solidFill>
+                <a:prstClr val="black"/>
+              </a:solidFill>
+              <a:effectLst/>
+              <a:uLnTx/>
+              <a:uFillTx/>
+              <a:latin typeface="Calibri" panose="020F0502020204030204"/>
+              <a:ea typeface="+mn-ea"/>
+              <a:cs typeface="+mn-cs"/>
+            </a:endParaRPr>
+          </a:p>
+        </p:txBody>
+      </p:sp>
+      <p:pic>
+        <p:nvPicPr>
+          <p:cNvPr id="3" name="Picture 2">
+            <a:extLst>
+              <a:ext uri="{FF2B5EF4-FFF2-40B4-BE49-F238E27FC236}">
+                <a16:creationId xmlns:a16="http://schemas.microsoft.com/office/drawing/2014/main" id="{4B887BDB-9042-51E3-7135-47EA05C259E6}"/>
+              </a:ext>
+            </a:extLst>
+          </p:cNvPr>
+          <p:cNvPicPr>
+            <a:picLocks noChangeAspect="1"/>
+          </p:cNvPicPr>
+          <p:nvPr/>
+        </p:nvPicPr>
+        <p:blipFill>
+          <a:blip r:embed="rId3"/>
+          <a:stretch>
+            <a:fillRect/>
+          </a:stretch>
+        </p:blipFill>
+        <p:spPr>
+          <a:xfrm>
+            <a:off x="279687" y="819471"/>
+            <a:ext cx="1990067" cy="3857814"/>
+          </a:xfrm>
+          <a:prstGeom prst="rect">
+            <a:avLst/>
+          </a:prstGeom>
+          <a:ln>
+            <a:noFill/>
+          </a:ln>
+          <a:effectLst>
+            <a:outerShdw blurRad="292100" dist="139700" dir="2700000" algn="tl" rotWithShape="0">
+              <a:srgbClr val="333333">
+                <a:alpha val="65000"/>
+              </a:srgbClr>
+            </a:outerShdw>
+          </a:effectLst>
+        </p:spPr>
+      </p:pic>
+      <p:pic>
+        <p:nvPicPr>
+          <p:cNvPr id="7" name="Picture 6">
+            <a:extLst>
+              <a:ext uri="{FF2B5EF4-FFF2-40B4-BE49-F238E27FC236}">
+                <a16:creationId xmlns:a16="http://schemas.microsoft.com/office/drawing/2014/main" id="{5FE6B744-9199-0D8E-1877-83B8B9C3A598}"/>
+              </a:ext>
+            </a:extLst>
+          </p:cNvPr>
+          <p:cNvPicPr>
+            <a:picLocks noChangeAspect="1"/>
+          </p:cNvPicPr>
+          <p:nvPr/>
+        </p:nvPicPr>
+        <p:blipFill>
+          <a:blip r:embed="rId4"/>
+          <a:stretch>
+            <a:fillRect/>
+          </a:stretch>
+        </p:blipFill>
+        <p:spPr>
+          <a:xfrm>
+            <a:off x="2731387" y="837129"/>
+            <a:ext cx="1985363" cy="3857814"/>
+          </a:xfrm>
+          <a:prstGeom prst="rect">
+            <a:avLst/>
+          </a:prstGeom>
+          <a:ln>
+            <a:noFill/>
+          </a:ln>
+          <a:effectLst>
+            <a:outerShdw blurRad="292100" dist="139700" dir="2700000" algn="tl" rotWithShape="0">
+              <a:srgbClr val="333333">
+                <a:alpha val="65000"/>
+              </a:srgbClr>
+            </a:outerShdw>
+          </a:effectLst>
+        </p:spPr>
+      </p:pic>
+    </p:spTree>
+    <p:extLst>
+      <p:ext uri="{BB962C8B-B14F-4D97-AF65-F5344CB8AC3E}">
+        <p14:creationId xmlns:p14="http://schemas.microsoft.com/office/powerpoint/2010/main" val="4268201339"/>
+      </p:ext>
+    </p:extLst>
+  </p:cSld>
+  <p:clrMapOvr>
+    <a:masterClrMapping/>
+  </p:clrMapOvr>
+</p:sld>
+</file>
+
+<file path=ppt/slides/slide21.xml><?xml version="1.0" encoding="utf-8"?>
+<p:sld xmlns:a="http://schemas.openxmlformats.org/drawingml/2006/main" xmlns:r="http://schemas.openxmlformats.org/officeDocument/2006/relationships" xmlns:p="http://schemas.openxmlformats.org/presentationml/2006/main">
+  <p:cSld>
+    <p:bg>
+      <p:bgPr>
+        <a:solidFill>
+          <a:srgbClr val="F6F5F2"/>
+        </a:solidFill>
+        <a:effectLst/>
+      </p:bgPr>
+    </p:bg>
+    <p:spTree>
+      <p:nvGrpSpPr>
+        <p:cNvPr id="1" name="">
+          <a:extLst>
+            <a:ext uri="{FF2B5EF4-FFF2-40B4-BE49-F238E27FC236}">
+              <a16:creationId xmlns:a16="http://schemas.microsoft.com/office/drawing/2014/main" id="{FECE545D-73F3-A400-9BA8-8D234CF1AF5E}"/>
+            </a:ext>
+          </a:extLst>
+        </p:cNvPr>
+        <p:cNvGrpSpPr/>
+        <p:nvPr/>
+      </p:nvGrpSpPr>
+      <p:grpSpPr>
+        <a:xfrm>
+          <a:off x="0" y="0"/>
+          <a:ext cx="0" cy="0"/>
+          <a:chOff x="0" y="0"/>
+          <a:chExt cx="0" cy="0"/>
+        </a:xfrm>
+      </p:grpSpPr>
+      <p:sp>
+        <p:nvSpPr>
+          <p:cNvPr id="15" name="Shape 13">
+            <a:extLst>
+              <a:ext uri="{FF2B5EF4-FFF2-40B4-BE49-F238E27FC236}">
+                <a16:creationId xmlns:a16="http://schemas.microsoft.com/office/drawing/2014/main" id="{D7D19D09-DD0F-93E0-1A52-46CFCCFB52BE}"/>
+              </a:ext>
+            </a:extLst>
+          </p:cNvPr>
+          <p:cNvSpPr/>
+          <p:nvPr/>
+        </p:nvSpPr>
+        <p:spPr>
+          <a:xfrm>
+            <a:off x="548640" y="4855464"/>
+            <a:ext cx="73152" cy="73152"/>
+          </a:xfrm>
+          <a:prstGeom prst="ellipse">
+            <a:avLst/>
+          </a:prstGeom>
+          <a:solidFill>
+            <a:srgbClr val="D81E2C"/>
+          </a:solidFill>
+          <a:ln/>
+        </p:spPr>
+        <p:txBody>
+          <a:bodyPr/>
+          <a:lstStyle/>
+          <a:p>
+            <a:pPr marL="0" marR="0" lvl="0" indent="0" algn="l" defTabSz="914400" rtl="0" eaLnBrk="1" fontAlgn="auto" latinLnBrk="0" hangingPunct="1">
+              <a:lnSpc>
+                <a:spcPct val="100000"/>
+              </a:lnSpc>
+              <a:spcBef>
+                <a:spcPts val="0"/>
+              </a:spcBef>
+              <a:spcAft>
+                <a:spcPts val="0"/>
+              </a:spcAft>
+              <a:buClrTx/>
+              <a:buSzTx/>
+              <a:buFontTx/>
+              <a:buNone/>
+              <a:tabLst/>
+              <a:defRPr/>
+            </a:pPr>
+            <a:endParaRPr kumimoji="0" lang="en-US" sz="1800" b="0" i="0" u="none" strike="noStrike" kern="1200" cap="none" spc="0" normalizeH="0" baseline="0" noProof="0">
+              <a:ln>
+                <a:noFill/>
+              </a:ln>
+              <a:solidFill>
+                <a:prstClr val="black"/>
+              </a:solidFill>
+              <a:effectLst/>
+              <a:uLnTx/>
+              <a:uFillTx/>
+              <a:latin typeface="Calibri" panose="020F0502020204030204"/>
+              <a:ea typeface="+mn-ea"/>
+              <a:cs typeface="+mn-cs"/>
+            </a:endParaRPr>
+          </a:p>
+        </p:txBody>
+      </p:sp>
+      <p:sp>
+        <p:nvSpPr>
+          <p:cNvPr id="16" name="Text 14">
+            <a:extLst>
+              <a:ext uri="{FF2B5EF4-FFF2-40B4-BE49-F238E27FC236}">
+                <a16:creationId xmlns:a16="http://schemas.microsoft.com/office/drawing/2014/main" id="{565A729F-CF86-C796-74C5-3B2906F70150}"/>
+              </a:ext>
+            </a:extLst>
+          </p:cNvPr>
+          <p:cNvSpPr/>
+          <p:nvPr/>
+        </p:nvSpPr>
+        <p:spPr>
+          <a:xfrm>
+            <a:off x="676656" y="4736592"/>
+            <a:ext cx="3657600" cy="292608"/>
+          </a:xfrm>
+          <a:prstGeom prst="rect">
+            <a:avLst/>
+          </a:prstGeom>
+          <a:noFill/>
+          <a:ln/>
+        </p:spPr>
+        <p:txBody>
+          <a:bodyPr wrap="square" lIns="0" tIns="0" rIns="0" bIns="0" rtlCol="0" anchor="ctr"/>
+          <a:lstStyle/>
+          <a:p>
+            <a:pPr marL="0" marR="0" lvl="0" indent="0" algn="l" defTabSz="914400" rtl="0" eaLnBrk="1" fontAlgn="auto" latinLnBrk="0" hangingPunct="1">
+              <a:lnSpc>
+                <a:spcPct val="100000"/>
+              </a:lnSpc>
+              <a:spcBef>
+                <a:spcPts val="0"/>
+              </a:spcBef>
+              <a:spcAft>
+                <a:spcPts val="0"/>
+              </a:spcAft>
+              <a:buClrTx/>
+              <a:buSzTx/>
+              <a:buFontTx/>
+              <a:buNone/>
+              <a:tabLst/>
+              <a:defRPr/>
+            </a:pPr>
+            <a:r>
+              <a:rPr kumimoji="0" lang="en-US" sz="950" b="0" i="0" u="none" strike="noStrike" kern="1200" cap="none" spc="0" normalizeH="0" baseline="0" noProof="0" dirty="0">
+                <a:ln>
+                  <a:noFill/>
+                </a:ln>
+                <a:solidFill>
+                  <a:srgbClr val="8A929C"/>
+                </a:solidFill>
+                <a:effectLst/>
+                <a:uLnTx/>
+                <a:uFillTx/>
+                <a:latin typeface="Calibri" pitchFamily="34" charset="0"/>
+                <a:ea typeface="Calibri" pitchFamily="34" charset="-122"/>
+                <a:cs typeface="Calibri" pitchFamily="34" charset="-120"/>
+              </a:rPr>
+              <a:t>EMS ReadyKit</a:t>
+            </a:r>
+            <a:endParaRPr kumimoji="0" lang="en-US" sz="950" b="0" i="0" u="none" strike="noStrike" kern="1200" cap="none" spc="0" normalizeH="0" baseline="0" noProof="0" dirty="0">
+              <a:ln>
+                <a:noFill/>
+              </a:ln>
+              <a:solidFill>
+                <a:prstClr val="black"/>
+              </a:solidFill>
+              <a:effectLst/>
+              <a:uLnTx/>
+              <a:uFillTx/>
+              <a:latin typeface="Calibri" panose="020F0502020204030204"/>
+              <a:ea typeface="+mn-ea"/>
+              <a:cs typeface="+mn-cs"/>
+            </a:endParaRPr>
+          </a:p>
+        </p:txBody>
+      </p:sp>
+      <p:sp>
+        <p:nvSpPr>
+          <p:cNvPr id="17" name="Text 15">
+            <a:extLst>
+              <a:ext uri="{FF2B5EF4-FFF2-40B4-BE49-F238E27FC236}">
+                <a16:creationId xmlns:a16="http://schemas.microsoft.com/office/drawing/2014/main" id="{62C31EAE-2815-76E7-9A66-123D90B94BA4}"/>
+              </a:ext>
+            </a:extLst>
+          </p:cNvPr>
+          <p:cNvSpPr/>
+          <p:nvPr/>
+        </p:nvSpPr>
+        <p:spPr>
+          <a:xfrm>
+            <a:off x="8138160" y="4736592"/>
+            <a:ext cx="457200" cy="292608"/>
+          </a:xfrm>
+          <a:prstGeom prst="rect">
+            <a:avLst/>
+          </a:prstGeom>
+          <a:noFill/>
+          <a:ln/>
+        </p:spPr>
+        <p:txBody>
+          <a:bodyPr wrap="square" lIns="0" tIns="0" rIns="0" bIns="0" rtlCol="0" anchor="ctr"/>
+          <a:lstStyle/>
+          <a:p>
+            <a:pPr marL="0" marR="0" lvl="0" indent="0" algn="r" defTabSz="914400" rtl="0" eaLnBrk="1" fontAlgn="auto" latinLnBrk="0" hangingPunct="1">
+              <a:lnSpc>
+                <a:spcPct val="100000"/>
+              </a:lnSpc>
+              <a:spcBef>
+                <a:spcPts val="0"/>
+              </a:spcBef>
+              <a:spcAft>
+                <a:spcPts val="0"/>
+              </a:spcAft>
+              <a:buClrTx/>
+              <a:buSzTx/>
+              <a:buFontTx/>
+              <a:buNone/>
+              <a:tabLst/>
+              <a:defRPr/>
+            </a:pPr>
+            <a:r>
+              <a:rPr kumimoji="0" lang="en-US" sz="950" b="0" i="0" u="none" strike="noStrike" kern="1200" cap="none" spc="0" normalizeH="0" baseline="0" noProof="0" dirty="0">
+                <a:ln>
+                  <a:noFill/>
+                </a:ln>
+                <a:solidFill>
+                  <a:srgbClr val="8A929C"/>
+                </a:solidFill>
+                <a:effectLst/>
+                <a:uLnTx/>
+                <a:uFillTx/>
+                <a:latin typeface="Consolas" pitchFamily="34" charset="0"/>
+                <a:ea typeface="Consolas" pitchFamily="34" charset="-122"/>
+                <a:cs typeface="Consolas" pitchFamily="34" charset="-120"/>
+              </a:rPr>
+              <a:t>10</a:t>
+            </a:r>
+            <a:endParaRPr kumimoji="0" lang="en-US" sz="950" b="0" i="0" u="none" strike="noStrike" kern="1200" cap="none" spc="0" normalizeH="0" baseline="0" noProof="0" dirty="0">
+              <a:ln>
+                <a:noFill/>
+              </a:ln>
+              <a:solidFill>
+                <a:prstClr val="black"/>
+              </a:solidFill>
+              <a:effectLst/>
+              <a:uLnTx/>
+              <a:uFillTx/>
+              <a:latin typeface="Calibri" panose="020F0502020204030204"/>
+              <a:ea typeface="+mn-ea"/>
+              <a:cs typeface="+mn-cs"/>
+            </a:endParaRPr>
+          </a:p>
+        </p:txBody>
+      </p:sp>
+      <p:sp>
+        <p:nvSpPr>
+          <p:cNvPr id="10" name="Rectangle: Rounded Corners 9">
+            <a:extLst>
+              <a:ext uri="{FF2B5EF4-FFF2-40B4-BE49-F238E27FC236}">
+                <a16:creationId xmlns:a16="http://schemas.microsoft.com/office/drawing/2014/main" id="{FA5F88AC-B069-0377-EF34-8068C7B8C469}"/>
+              </a:ext>
+            </a:extLst>
+          </p:cNvPr>
+          <p:cNvSpPr/>
+          <p:nvPr/>
+        </p:nvSpPr>
+        <p:spPr>
+          <a:xfrm>
+            <a:off x="5299225" y="590007"/>
+            <a:ext cx="861391" cy="182880"/>
+          </a:xfrm>
+          <a:prstGeom prst="roundRect">
+            <a:avLst/>
+          </a:prstGeom>
+          <a:solidFill>
+            <a:srgbClr val="D81E2C"/>
+          </a:solidFill>
+          <a:ln>
+            <a:solidFill>
+              <a:schemeClr val="bg1"/>
+            </a:solidFill>
+          </a:ln>
+        </p:spPr>
+        <p:style>
+          <a:lnRef idx="2">
+            <a:schemeClr val="accent1">
+              <a:shade val="15000"/>
+            </a:schemeClr>
+          </a:lnRef>
+          <a:fillRef idx="1">
+            <a:schemeClr val="accent1"/>
+          </a:fillRef>
+          <a:effectRef idx="0">
+            <a:schemeClr val="accent1"/>
+          </a:effectRef>
+          <a:fontRef idx="minor">
+            <a:schemeClr val="lt1"/>
+          </a:fontRef>
+        </p:style>
+        <p:txBody>
+          <a:bodyPr rtlCol="0" anchor="ctr"/>
+          <a:lstStyle/>
+          <a:p>
+            <a:pPr marL="0" marR="0" lvl="0" indent="0" algn="ctr" defTabSz="914400" rtl="0" eaLnBrk="1" fontAlgn="auto" latinLnBrk="0" hangingPunct="1">
+              <a:lnSpc>
+                <a:spcPct val="100000"/>
+              </a:lnSpc>
+              <a:spcBef>
+                <a:spcPts val="0"/>
+              </a:spcBef>
+              <a:spcAft>
+                <a:spcPts val="0"/>
+              </a:spcAft>
+              <a:buClrTx/>
+              <a:buSzTx/>
+              <a:buFontTx/>
+              <a:buNone/>
+              <a:tabLst/>
+              <a:defRPr/>
+            </a:pPr>
+            <a:r>
+              <a:rPr kumimoji="0" lang="en-US" sz="1000" b="0" i="0" u="none" strike="noStrike" kern="1200" cap="none" spc="0" normalizeH="0" baseline="0" noProof="0" dirty="0">
+                <a:ln>
+                  <a:noFill/>
+                </a:ln>
+                <a:solidFill>
+                  <a:prstClr val="white"/>
+                </a:solidFill>
+                <a:effectLst/>
+                <a:uLnTx/>
+                <a:uFillTx/>
+                <a:latin typeface="Calibri" panose="020F0502020204030204"/>
+                <a:ea typeface="+mn-ea"/>
+                <a:cs typeface="+mn-cs"/>
+              </a:rPr>
+              <a:t>Supervisor</a:t>
+            </a:r>
+          </a:p>
+        </p:txBody>
+      </p:sp>
+      <p:sp>
+        <p:nvSpPr>
+          <p:cNvPr id="11" name="Rectangle: Rounded Corners 10">
+            <a:extLst>
+              <a:ext uri="{FF2B5EF4-FFF2-40B4-BE49-F238E27FC236}">
+                <a16:creationId xmlns:a16="http://schemas.microsoft.com/office/drawing/2014/main" id="{D900500D-4CB9-0D16-240A-249A3F07CE3C}"/>
+              </a:ext>
+            </a:extLst>
+          </p:cNvPr>
+          <p:cNvSpPr/>
+          <p:nvPr/>
+        </p:nvSpPr>
+        <p:spPr>
+          <a:xfrm>
+            <a:off x="7737999" y="612600"/>
+            <a:ext cx="861391" cy="182880"/>
+          </a:xfrm>
+          <a:prstGeom prst="roundRect">
+            <a:avLst/>
+          </a:prstGeom>
+          <a:solidFill>
+            <a:srgbClr val="D81E2C"/>
+          </a:solidFill>
+          <a:ln>
+            <a:solidFill>
+              <a:schemeClr val="bg1"/>
+            </a:solidFill>
+          </a:ln>
+        </p:spPr>
+        <p:style>
+          <a:lnRef idx="2">
+            <a:schemeClr val="accent1">
+              <a:shade val="15000"/>
+            </a:schemeClr>
+          </a:lnRef>
+          <a:fillRef idx="1">
+            <a:schemeClr val="accent1"/>
+          </a:fillRef>
+          <a:effectRef idx="0">
+            <a:schemeClr val="accent1"/>
+          </a:effectRef>
+          <a:fontRef idx="minor">
+            <a:schemeClr val="lt1"/>
+          </a:fontRef>
+        </p:style>
+        <p:txBody>
+          <a:bodyPr rtlCol="0" anchor="ctr"/>
+          <a:lstStyle/>
+          <a:p>
+            <a:pPr marL="0" marR="0" lvl="0" indent="0" algn="ctr" defTabSz="914400" rtl="0" eaLnBrk="1" fontAlgn="auto" latinLnBrk="0" hangingPunct="1">
+              <a:lnSpc>
+                <a:spcPct val="100000"/>
+              </a:lnSpc>
+              <a:spcBef>
+                <a:spcPts val="0"/>
+              </a:spcBef>
+              <a:spcAft>
+                <a:spcPts val="0"/>
+              </a:spcAft>
+              <a:buClrTx/>
+              <a:buSzTx/>
+              <a:buFontTx/>
+              <a:buNone/>
+              <a:tabLst/>
+              <a:defRPr/>
+            </a:pPr>
+            <a:r>
+              <a:rPr kumimoji="0" lang="en-US" sz="1000" b="0" i="0" u="none" strike="noStrike" kern="1200" cap="none" spc="0" normalizeH="0" baseline="0" noProof="0" dirty="0">
+                <a:ln>
+                  <a:noFill/>
+                </a:ln>
+                <a:solidFill>
+                  <a:prstClr val="white"/>
+                </a:solidFill>
+                <a:effectLst/>
+                <a:uLnTx/>
+                <a:uFillTx/>
+                <a:latin typeface="Calibri" panose="020F0502020204030204"/>
+                <a:ea typeface="+mn-ea"/>
+                <a:cs typeface="+mn-cs"/>
+              </a:rPr>
+              <a:t>Supervisor</a:t>
+            </a:r>
+          </a:p>
+        </p:txBody>
+      </p:sp>
+      <p:sp>
+        <p:nvSpPr>
+          <p:cNvPr id="5" name="Text 1">
+            <a:extLst>
+              <a:ext uri="{FF2B5EF4-FFF2-40B4-BE49-F238E27FC236}">
+                <a16:creationId xmlns:a16="http://schemas.microsoft.com/office/drawing/2014/main" id="{0CE39CFC-1A6F-D151-D906-375837E64DF6}"/>
+              </a:ext>
+            </a:extLst>
+          </p:cNvPr>
+          <p:cNvSpPr/>
+          <p:nvPr/>
+        </p:nvSpPr>
+        <p:spPr>
+          <a:xfrm>
+            <a:off x="302311" y="749808"/>
+            <a:ext cx="3291840" cy="868680"/>
+          </a:xfrm>
+          <a:prstGeom prst="rect">
+            <a:avLst/>
+          </a:prstGeom>
+          <a:noFill/>
+          <a:ln/>
+        </p:spPr>
+        <p:txBody>
+          <a:bodyPr wrap="square" lIns="0" tIns="0" rIns="0" bIns="0" rtlCol="0" anchor="t"/>
+          <a:lstStyle/>
+          <a:p>
+            <a:pPr marL="0" marR="0" lvl="0" indent="0" algn="l" defTabSz="914400" rtl="0" eaLnBrk="1" fontAlgn="auto" latinLnBrk="0" hangingPunct="1">
+              <a:lnSpc>
+                <a:spcPct val="100000"/>
+              </a:lnSpc>
+              <a:spcBef>
+                <a:spcPts val="0"/>
+              </a:spcBef>
+              <a:spcAft>
+                <a:spcPts val="0"/>
+              </a:spcAft>
+              <a:buClrTx/>
+              <a:buSzTx/>
+              <a:buFontTx/>
+              <a:buNone/>
+              <a:tabLst/>
+              <a:defRPr/>
+            </a:pPr>
+            <a:r>
+              <a:rPr kumimoji="0" lang="en-US" sz="2500" b="1" i="0" u="none" strike="noStrike" kern="1200" cap="none" spc="0" normalizeH="0" baseline="0" noProof="0" dirty="0">
+                <a:ln>
+                  <a:noFill/>
+                </a:ln>
+                <a:solidFill>
+                  <a:srgbClr val="23262B"/>
+                </a:solidFill>
+                <a:effectLst/>
+                <a:uLnTx/>
+                <a:uFillTx/>
+                <a:latin typeface="Trebuchet MS" pitchFamily="34" charset="0"/>
+                <a:ea typeface="Trebuchet MS" pitchFamily="34" charset="-122"/>
+                <a:cs typeface="Trebuchet MS" pitchFamily="34" charset="-120"/>
+              </a:rPr>
+              <a:t>Station Supplies</a:t>
+            </a:r>
+            <a:endParaRPr kumimoji="0" lang="en-US" sz="2500" b="0" i="0" u="none" strike="noStrike" kern="1200" cap="none" spc="0" normalizeH="0" baseline="0" noProof="0" dirty="0">
+              <a:ln>
+                <a:noFill/>
+              </a:ln>
+              <a:solidFill>
+                <a:prstClr val="black"/>
+              </a:solidFill>
+              <a:effectLst/>
+              <a:uLnTx/>
+              <a:uFillTx/>
+              <a:latin typeface="Calibri" panose="020F0502020204030204"/>
+              <a:ea typeface="+mn-ea"/>
+              <a:cs typeface="+mn-cs"/>
+            </a:endParaRPr>
+          </a:p>
+        </p:txBody>
+      </p:sp>
+      <p:sp>
+        <p:nvSpPr>
+          <p:cNvPr id="6" name="Text 2">
+            <a:extLst>
+              <a:ext uri="{FF2B5EF4-FFF2-40B4-BE49-F238E27FC236}">
+                <a16:creationId xmlns:a16="http://schemas.microsoft.com/office/drawing/2014/main" id="{EEBE0659-6901-3F1E-E619-D281A16D0603}"/>
+              </a:ext>
+            </a:extLst>
+          </p:cNvPr>
+          <p:cNvSpPr/>
+          <p:nvPr/>
+        </p:nvSpPr>
+        <p:spPr>
+          <a:xfrm>
+            <a:off x="302311" y="1691640"/>
+            <a:ext cx="3291840" cy="685800"/>
+          </a:xfrm>
+          <a:prstGeom prst="rect">
+            <a:avLst/>
+          </a:prstGeom>
+          <a:noFill/>
+          <a:ln/>
+        </p:spPr>
+        <p:txBody>
+          <a:bodyPr wrap="square" lIns="0" tIns="0" rIns="0" bIns="0" rtlCol="0" anchor="t"/>
+          <a:lstStyle/>
+          <a:p>
+            <a:pPr marL="0" marR="0" lvl="0" indent="0" algn="l" defTabSz="914400" rtl="0" eaLnBrk="1" fontAlgn="auto" latinLnBrk="0" hangingPunct="1">
+              <a:lnSpc>
+                <a:spcPct val="112000"/>
+              </a:lnSpc>
+              <a:spcBef>
+                <a:spcPts val="0"/>
+              </a:spcBef>
+              <a:spcAft>
+                <a:spcPts val="0"/>
+              </a:spcAft>
+              <a:buClrTx/>
+              <a:buSzTx/>
+              <a:buFontTx/>
+              <a:buNone/>
+              <a:tabLst/>
+              <a:defRPr/>
+            </a:pPr>
+            <a:r>
+              <a:rPr kumimoji="0" lang="en-US" sz="1300" b="0" i="0" u="none" strike="noStrike" kern="1200" cap="none" spc="0" normalizeH="0" baseline="0" noProof="0" dirty="0">
+                <a:ln>
+                  <a:noFill/>
+                </a:ln>
+                <a:solidFill>
+                  <a:srgbClr val="555E6B"/>
+                </a:solidFill>
+                <a:effectLst/>
+                <a:uLnTx/>
+                <a:uFillTx/>
+                <a:latin typeface="Calibri" pitchFamily="34" charset="0"/>
+                <a:ea typeface="Calibri" pitchFamily="34" charset="-122"/>
+                <a:cs typeface="Calibri" pitchFamily="34" charset="-120"/>
+              </a:rPr>
+              <a:t>Supervisors can setup the station supply room from here</a:t>
+            </a:r>
+            <a:endParaRPr kumimoji="0" lang="en-US" sz="1300" b="0" i="0" u="none" strike="noStrike" kern="1200" cap="none" spc="0" normalizeH="0" baseline="0" noProof="0" dirty="0">
+              <a:ln>
+                <a:noFill/>
+              </a:ln>
+              <a:solidFill>
+                <a:prstClr val="black"/>
+              </a:solidFill>
+              <a:effectLst/>
+              <a:uLnTx/>
+              <a:uFillTx/>
+              <a:latin typeface="Calibri" panose="020F0502020204030204"/>
+              <a:ea typeface="+mn-ea"/>
+              <a:cs typeface="+mn-cs"/>
+            </a:endParaRPr>
+          </a:p>
+        </p:txBody>
+      </p:sp>
+      <p:sp>
+        <p:nvSpPr>
+          <p:cNvPr id="8" name="Text 3">
+            <a:extLst>
+              <a:ext uri="{FF2B5EF4-FFF2-40B4-BE49-F238E27FC236}">
+                <a16:creationId xmlns:a16="http://schemas.microsoft.com/office/drawing/2014/main" id="{CF19F8A4-6AC4-DDA5-21E6-E7EBADD57B2C}"/>
+              </a:ext>
+            </a:extLst>
+          </p:cNvPr>
+          <p:cNvSpPr/>
+          <p:nvPr/>
+        </p:nvSpPr>
+        <p:spPr>
+          <a:xfrm>
+            <a:off x="302311" y="2468880"/>
+            <a:ext cx="3291840" cy="2011680"/>
+          </a:xfrm>
+          <a:prstGeom prst="rect">
+            <a:avLst/>
+          </a:prstGeom>
+          <a:noFill/>
+          <a:ln/>
+        </p:spPr>
+        <p:txBody>
+          <a:bodyPr wrap="square" lIns="0" tIns="0" rIns="0" bIns="0" rtlCol="0" anchor="t"/>
+          <a:lstStyle/>
+          <a:p>
+            <a:pPr marL="177800" marR="0" lvl="0" indent="-177800" algn="l" defTabSz="914400" rtl="0" eaLnBrk="1" fontAlgn="auto" latinLnBrk="0" hangingPunct="1">
+              <a:lnSpc>
+                <a:spcPct val="100000"/>
+              </a:lnSpc>
+              <a:spcBef>
+                <a:spcPts val="0"/>
+              </a:spcBef>
+              <a:spcAft>
+                <a:spcPts val="800"/>
+              </a:spcAft>
+              <a:buClrTx/>
+              <a:buSzPct val="100000"/>
+              <a:buFontTx/>
+              <a:buChar char="–"/>
+              <a:tabLst/>
+              <a:defRPr/>
+            </a:pPr>
+            <a:r>
+              <a:rPr kumimoji="0" lang="en-US" sz="1250" b="0" i="0" u="none" strike="noStrike" kern="1200" cap="none" spc="0" normalizeH="0" baseline="0" noProof="0" dirty="0">
+                <a:ln>
+                  <a:noFill/>
+                </a:ln>
+                <a:solidFill>
+                  <a:srgbClr val="23262B"/>
+                </a:solidFill>
+                <a:effectLst/>
+                <a:uLnTx/>
+                <a:uFillTx/>
+                <a:latin typeface="Calibri" pitchFamily="34" charset="0"/>
+                <a:ea typeface="Calibri" pitchFamily="34" charset="-122"/>
+                <a:cs typeface="Calibri" pitchFamily="34" charset="-120"/>
+              </a:rPr>
+              <a:t>Custom shelves can be added</a:t>
+            </a:r>
+          </a:p>
+          <a:p>
+            <a:pPr marL="177800" marR="0" lvl="0" indent="-177800" algn="l" defTabSz="914400" rtl="0" eaLnBrk="1" fontAlgn="auto" latinLnBrk="0" hangingPunct="1">
+              <a:lnSpc>
+                <a:spcPct val="100000"/>
+              </a:lnSpc>
+              <a:spcBef>
+                <a:spcPts val="0"/>
+              </a:spcBef>
+              <a:spcAft>
+                <a:spcPts val="800"/>
+              </a:spcAft>
+              <a:buClrTx/>
+              <a:buSzPct val="100000"/>
+              <a:buFontTx/>
+              <a:buChar char="–"/>
+              <a:tabLst/>
+              <a:defRPr/>
+            </a:pPr>
+            <a:r>
+              <a:rPr lang="en-US" sz="1250" dirty="0">
+                <a:solidFill>
+                  <a:srgbClr val="23262B"/>
+                </a:solidFill>
+                <a:latin typeface="Calibri" pitchFamily="34" charset="0"/>
+                <a:ea typeface="Calibri" pitchFamily="34" charset="-122"/>
+                <a:cs typeface="Calibri" pitchFamily="34" charset="-120"/>
+              </a:rPr>
+              <a:t>Items can be assigned</a:t>
+            </a:r>
+          </a:p>
+          <a:p>
+            <a:pPr marL="177800" marR="0" lvl="0" indent="-177800" algn="l" defTabSz="914400" rtl="0" eaLnBrk="1" fontAlgn="auto" latinLnBrk="0" hangingPunct="1">
+              <a:lnSpc>
+                <a:spcPct val="100000"/>
+              </a:lnSpc>
+              <a:spcBef>
+                <a:spcPts val="0"/>
+              </a:spcBef>
+              <a:spcAft>
+                <a:spcPts val="800"/>
+              </a:spcAft>
+              <a:buClrTx/>
+              <a:buSzPct val="100000"/>
+              <a:buFontTx/>
+              <a:buChar char="–"/>
+              <a:tabLst/>
+              <a:defRPr/>
+            </a:pPr>
+            <a:r>
+              <a:rPr kumimoji="0" lang="en-US" sz="1250" b="0" i="0" u="none" strike="noStrike" kern="1200" cap="none" spc="0" normalizeH="0" baseline="0" noProof="0" dirty="0">
+                <a:ln>
+                  <a:noFill/>
+                </a:ln>
+                <a:solidFill>
+                  <a:srgbClr val="23262B"/>
+                </a:solidFill>
+                <a:effectLst/>
+                <a:uLnTx/>
+                <a:uFillTx/>
+                <a:latin typeface="Calibri" pitchFamily="34" charset="0"/>
+                <a:ea typeface="Calibri" pitchFamily="34" charset="-122"/>
+                <a:cs typeface="Calibri" pitchFamily="34" charset="-120"/>
+              </a:rPr>
+              <a:t>Custom pa</a:t>
+            </a:r>
+            <a:r>
+              <a:rPr lang="en-US" sz="1250" dirty="0">
+                <a:solidFill>
+                  <a:srgbClr val="23262B"/>
+                </a:solidFill>
+                <a:latin typeface="Calibri" pitchFamily="34" charset="0"/>
+                <a:ea typeface="Calibri" pitchFamily="34" charset="-122"/>
+                <a:cs typeface="Calibri" pitchFamily="34" charset="-120"/>
+              </a:rPr>
+              <a:t>r levels can be assigned.</a:t>
+            </a:r>
+          </a:p>
+          <a:p>
+            <a:pPr marL="177800" marR="0" lvl="0" indent="-177800" algn="l" defTabSz="914400" rtl="0" eaLnBrk="1" fontAlgn="auto" latinLnBrk="0" hangingPunct="1">
+              <a:lnSpc>
+                <a:spcPct val="100000"/>
+              </a:lnSpc>
+              <a:spcBef>
+                <a:spcPts val="0"/>
+              </a:spcBef>
+              <a:spcAft>
+                <a:spcPts val="800"/>
+              </a:spcAft>
+              <a:buClrTx/>
+              <a:buSzPct val="100000"/>
+              <a:buFontTx/>
+              <a:buChar char="–"/>
+              <a:tabLst/>
+              <a:defRPr/>
+            </a:pPr>
+            <a:r>
+              <a:rPr kumimoji="0" lang="en-US" sz="1250" b="0" i="0" u="none" strike="noStrike" kern="1200" cap="none" spc="0" normalizeH="0" baseline="0" noProof="0" dirty="0">
+                <a:ln>
+                  <a:noFill/>
+                </a:ln>
+                <a:solidFill>
+                  <a:srgbClr val="23262B"/>
+                </a:solidFill>
+                <a:effectLst/>
+                <a:uLnTx/>
+                <a:uFillTx/>
+                <a:latin typeface="Calibri" pitchFamily="34" charset="0"/>
+                <a:ea typeface="Calibri" pitchFamily="34" charset="-122"/>
+                <a:cs typeface="Calibri" pitchFamily="34" charset="-120"/>
+              </a:rPr>
+              <a:t>This data feed the Station Supply interface that is on the homepage</a:t>
+            </a:r>
+          </a:p>
+          <a:p>
+            <a:pPr marL="0" marR="0" lvl="0" indent="0" algn="l" defTabSz="914400" rtl="0" eaLnBrk="1" fontAlgn="auto" latinLnBrk="0" hangingPunct="1">
+              <a:lnSpc>
+                <a:spcPct val="100000"/>
+              </a:lnSpc>
+              <a:spcBef>
+                <a:spcPts val="0"/>
+              </a:spcBef>
+              <a:spcAft>
+                <a:spcPts val="800"/>
+              </a:spcAft>
+              <a:buClrTx/>
+              <a:buSzPct val="100000"/>
+              <a:buFontTx/>
+              <a:buNone/>
+              <a:tabLst/>
+              <a:defRPr/>
+            </a:pPr>
+            <a:endParaRPr kumimoji="0" lang="en-US" sz="1250" b="0" i="0" u="none" strike="noStrike" kern="1200" cap="none" spc="0" normalizeH="0" baseline="0" noProof="0" dirty="0">
+              <a:ln>
+                <a:noFill/>
+              </a:ln>
+              <a:solidFill>
+                <a:prstClr val="black"/>
+              </a:solidFill>
+              <a:effectLst/>
+              <a:uLnTx/>
+              <a:uFillTx/>
+              <a:latin typeface="Calibri" panose="020F0502020204030204"/>
+              <a:ea typeface="+mn-ea"/>
+              <a:cs typeface="+mn-cs"/>
+            </a:endParaRPr>
+          </a:p>
+        </p:txBody>
+      </p:sp>
+      <p:pic>
+        <p:nvPicPr>
+          <p:cNvPr id="3" name="Picture 2">
+            <a:extLst>
+              <a:ext uri="{FF2B5EF4-FFF2-40B4-BE49-F238E27FC236}">
+                <a16:creationId xmlns:a16="http://schemas.microsoft.com/office/drawing/2014/main" id="{C0A6AAAC-651E-61D6-1062-78C39628CF68}"/>
+              </a:ext>
+            </a:extLst>
+          </p:cNvPr>
+          <p:cNvPicPr>
+            <a:picLocks noChangeAspect="1"/>
+          </p:cNvPicPr>
+          <p:nvPr/>
+        </p:nvPicPr>
+        <p:blipFill>
+          <a:blip r:embed="rId3"/>
+          <a:stretch>
+            <a:fillRect/>
+          </a:stretch>
+        </p:blipFill>
+        <p:spPr>
+          <a:xfrm>
+            <a:off x="4181205" y="819469"/>
+            <a:ext cx="1980658" cy="3857815"/>
+          </a:xfrm>
+          <a:prstGeom prst="rect">
+            <a:avLst/>
+          </a:prstGeom>
+          <a:ln>
+            <a:noFill/>
+          </a:ln>
+          <a:effectLst>
+            <a:outerShdw blurRad="292100" dist="139700" dir="2700000" algn="tl" rotWithShape="0">
+              <a:srgbClr val="333333">
+                <a:alpha val="65000"/>
+              </a:srgbClr>
+            </a:outerShdw>
+          </a:effectLst>
+        </p:spPr>
+      </p:pic>
+      <p:pic>
+        <p:nvPicPr>
+          <p:cNvPr id="7" name="Picture 6">
+            <a:extLst>
+              <a:ext uri="{FF2B5EF4-FFF2-40B4-BE49-F238E27FC236}">
+                <a16:creationId xmlns:a16="http://schemas.microsoft.com/office/drawing/2014/main" id="{94E64FDC-92D5-8FB4-29BD-5D970F632652}"/>
+              </a:ext>
+            </a:extLst>
+          </p:cNvPr>
+          <p:cNvPicPr>
+            <a:picLocks noChangeAspect="1"/>
+          </p:cNvPicPr>
+          <p:nvPr/>
+        </p:nvPicPr>
+        <p:blipFill>
+          <a:blip r:embed="rId4"/>
+          <a:stretch>
+            <a:fillRect/>
+          </a:stretch>
+        </p:blipFill>
+        <p:spPr>
+          <a:xfrm>
+            <a:off x="6624214" y="837128"/>
+            <a:ext cx="1971146" cy="3857815"/>
+          </a:xfrm>
+          <a:prstGeom prst="rect">
+            <a:avLst/>
+          </a:prstGeom>
+          <a:ln>
+            <a:noFill/>
+          </a:ln>
+          <a:effectLst>
+            <a:outerShdw blurRad="292100" dist="139700" dir="2700000" algn="tl" rotWithShape="0">
+              <a:srgbClr val="333333">
+                <a:alpha val="65000"/>
+              </a:srgbClr>
+            </a:outerShdw>
+          </a:effectLst>
+        </p:spPr>
+      </p:pic>
+    </p:spTree>
+    <p:extLst>
+      <p:ext uri="{BB962C8B-B14F-4D97-AF65-F5344CB8AC3E}">
+        <p14:creationId xmlns:p14="http://schemas.microsoft.com/office/powerpoint/2010/main" val="2010357104"/>
+      </p:ext>
+    </p:extLst>
+  </p:cSld>
+  <p:clrMapOvr>
+    <a:masterClrMapping/>
+  </p:clrMapOvr>
+</p:sld>
+</file>
+
+<file path=ppt/slides/slide22.xml><?xml version="1.0" encoding="utf-8"?>
+<p:sld xmlns:a="http://schemas.openxmlformats.org/drawingml/2006/main" xmlns:r="http://schemas.openxmlformats.org/officeDocument/2006/relationships" xmlns:p="http://schemas.openxmlformats.org/presentationml/2006/main">
+  <p:cSld>
+    <p:bg>
+      <p:bgPr>
+        <a:solidFill>
+          <a:srgbClr val="F6F5F2"/>
+        </a:solidFill>
+        <a:effectLst/>
+      </p:bgPr>
+    </p:bg>
+    <p:spTree>
+      <p:nvGrpSpPr>
+        <p:cNvPr id="1" name="">
+          <a:extLst>
+            <a:ext uri="{FF2B5EF4-FFF2-40B4-BE49-F238E27FC236}">
+              <a16:creationId xmlns:a16="http://schemas.microsoft.com/office/drawing/2014/main" id="{705C7F1F-F129-7892-3261-C5395E37D17D}"/>
+            </a:ext>
+          </a:extLst>
+        </p:cNvPr>
+        <p:cNvGrpSpPr/>
+        <p:nvPr/>
+      </p:nvGrpSpPr>
+      <p:grpSpPr>
+        <a:xfrm>
+          <a:off x="0" y="0"/>
+          <a:ext cx="0" cy="0"/>
+          <a:chOff x="0" y="0"/>
+          <a:chExt cx="0" cy="0"/>
+        </a:xfrm>
+      </p:grpSpPr>
+      <p:sp>
+        <p:nvSpPr>
+          <p:cNvPr id="2" name="Text 0">
+            <a:extLst>
+              <a:ext uri="{FF2B5EF4-FFF2-40B4-BE49-F238E27FC236}">
+                <a16:creationId xmlns:a16="http://schemas.microsoft.com/office/drawing/2014/main" id="{9B1D847F-ECD5-BEE7-8B1B-47F94AC17110}"/>
+              </a:ext>
+            </a:extLst>
+          </p:cNvPr>
+          <p:cNvSpPr/>
+          <p:nvPr/>
+        </p:nvSpPr>
+        <p:spPr>
+          <a:xfrm>
+            <a:off x="5303520" y="457200"/>
+            <a:ext cx="3566160" cy="274320"/>
+          </a:xfrm>
+          <a:prstGeom prst="rect">
+            <a:avLst/>
+          </a:prstGeom>
+          <a:noFill/>
+          <a:ln/>
+        </p:spPr>
+        <p:txBody>
+          <a:bodyPr wrap="square" lIns="0" tIns="0" rIns="0" bIns="0" rtlCol="0" anchor="ctr"/>
+          <a:lstStyle/>
+          <a:p>
+            <a:pPr marL="0" marR="0" lvl="0" indent="0" algn="l" defTabSz="914400" rtl="0" eaLnBrk="1" fontAlgn="auto" latinLnBrk="0" hangingPunct="1">
+              <a:lnSpc>
+                <a:spcPct val="100000"/>
+              </a:lnSpc>
+              <a:spcBef>
+                <a:spcPts val="0"/>
+              </a:spcBef>
+              <a:spcAft>
+                <a:spcPts val="0"/>
+              </a:spcAft>
+              <a:buClrTx/>
+              <a:buSzTx/>
+              <a:buFontTx/>
+              <a:buNone/>
+              <a:tabLst/>
+              <a:defRPr/>
+            </a:pPr>
+            <a:r>
+              <a:rPr kumimoji="0" lang="en-US" sz="1100" b="1" i="0" u="none" strike="noStrike" kern="0" cap="none" spc="300" normalizeH="0" baseline="0" noProof="0" dirty="0">
+                <a:ln>
+                  <a:noFill/>
+                </a:ln>
+                <a:solidFill>
+                  <a:srgbClr val="D81E2C"/>
+                </a:solidFill>
+                <a:effectLst/>
+                <a:uLnTx/>
+                <a:uFillTx/>
+                <a:latin typeface="Consolas" pitchFamily="34" charset="0"/>
+                <a:ea typeface="Consolas" pitchFamily="34" charset="-122"/>
+                <a:cs typeface="Consolas" pitchFamily="34" charset="-120"/>
+              </a:rPr>
+              <a:t>FEATURE 07</a:t>
+            </a:r>
+            <a:endParaRPr kumimoji="0" lang="en-US" sz="1100" b="0" i="0" u="none" strike="noStrike" kern="1200" cap="none" spc="0" normalizeH="0" baseline="0" noProof="0" dirty="0">
+              <a:ln>
+                <a:noFill/>
+              </a:ln>
+              <a:solidFill>
+                <a:prstClr val="black"/>
+              </a:solidFill>
+              <a:effectLst/>
+              <a:uLnTx/>
+              <a:uFillTx/>
+              <a:latin typeface="Calibri" panose="020F0502020204030204"/>
+              <a:ea typeface="+mn-ea"/>
+              <a:cs typeface="+mn-cs"/>
+            </a:endParaRPr>
+          </a:p>
+        </p:txBody>
+      </p:sp>
+      <p:sp>
+        <p:nvSpPr>
+          <p:cNvPr id="3" name="Text 1">
+            <a:extLst>
+              <a:ext uri="{FF2B5EF4-FFF2-40B4-BE49-F238E27FC236}">
+                <a16:creationId xmlns:a16="http://schemas.microsoft.com/office/drawing/2014/main" id="{81D5EB50-E3BD-D641-4D74-708CF33EAA19}"/>
+              </a:ext>
+            </a:extLst>
+          </p:cNvPr>
+          <p:cNvSpPr/>
+          <p:nvPr/>
+        </p:nvSpPr>
+        <p:spPr>
+          <a:xfrm>
+            <a:off x="5303520" y="749808"/>
+            <a:ext cx="3291840" cy="868680"/>
+          </a:xfrm>
+          <a:prstGeom prst="rect">
+            <a:avLst/>
+          </a:prstGeom>
+          <a:noFill/>
+          <a:ln/>
+        </p:spPr>
+        <p:txBody>
+          <a:bodyPr wrap="square" lIns="0" tIns="0" rIns="0" bIns="0" rtlCol="0" anchor="t"/>
+          <a:lstStyle/>
+          <a:p>
+            <a:pPr marL="0" marR="0" lvl="0" indent="0" algn="l" defTabSz="914400" rtl="0" eaLnBrk="1" fontAlgn="auto" latinLnBrk="0" hangingPunct="1">
+              <a:lnSpc>
+                <a:spcPct val="100000"/>
+              </a:lnSpc>
+              <a:spcBef>
+                <a:spcPts val="0"/>
+              </a:spcBef>
+              <a:spcAft>
+                <a:spcPts val="0"/>
+              </a:spcAft>
+              <a:buClrTx/>
+              <a:buSzTx/>
+              <a:buFontTx/>
+              <a:buNone/>
+              <a:tabLst/>
+              <a:defRPr/>
+            </a:pPr>
+            <a:r>
+              <a:rPr kumimoji="0" lang="en-US" sz="2500" b="1" i="0" u="none" strike="noStrike" kern="1200" cap="none" spc="0" normalizeH="0" baseline="0" noProof="0" dirty="0">
+                <a:ln>
+                  <a:noFill/>
+                </a:ln>
+                <a:solidFill>
+                  <a:srgbClr val="23262B"/>
+                </a:solidFill>
+                <a:effectLst/>
+                <a:uLnTx/>
+                <a:uFillTx/>
+                <a:latin typeface="Trebuchet MS" pitchFamily="34" charset="0"/>
+                <a:ea typeface="Trebuchet MS" pitchFamily="34" charset="-122"/>
+                <a:cs typeface="Trebuchet MS" pitchFamily="34" charset="-120"/>
+              </a:rPr>
+              <a:t>Help &amp; Tutorial</a:t>
+            </a:r>
+            <a:endParaRPr kumimoji="0" lang="en-US" sz="2500" b="0" i="0" u="none" strike="noStrike" kern="1200" cap="none" spc="0" normalizeH="0" baseline="0" noProof="0" dirty="0">
+              <a:ln>
+                <a:noFill/>
+              </a:ln>
+              <a:solidFill>
+                <a:prstClr val="black"/>
+              </a:solidFill>
+              <a:effectLst/>
+              <a:uLnTx/>
+              <a:uFillTx/>
+              <a:latin typeface="Calibri" panose="020F0502020204030204"/>
+              <a:ea typeface="+mn-ea"/>
+              <a:cs typeface="+mn-cs"/>
+            </a:endParaRPr>
+          </a:p>
+        </p:txBody>
+      </p:sp>
+      <p:sp>
+        <p:nvSpPr>
+          <p:cNvPr id="4" name="Text 2">
+            <a:extLst>
+              <a:ext uri="{FF2B5EF4-FFF2-40B4-BE49-F238E27FC236}">
+                <a16:creationId xmlns:a16="http://schemas.microsoft.com/office/drawing/2014/main" id="{455DEBAA-4F3B-3ABC-9FDB-AD936C7C71DD}"/>
+              </a:ext>
+            </a:extLst>
+          </p:cNvPr>
+          <p:cNvSpPr/>
+          <p:nvPr/>
+        </p:nvSpPr>
+        <p:spPr>
+          <a:xfrm>
+            <a:off x="5303520" y="1691640"/>
+            <a:ext cx="3291840" cy="685800"/>
+          </a:xfrm>
+          <a:prstGeom prst="rect">
+            <a:avLst/>
+          </a:prstGeom>
+          <a:noFill/>
+          <a:ln/>
+        </p:spPr>
+        <p:txBody>
+          <a:bodyPr wrap="square" lIns="0" tIns="0" rIns="0" bIns="0" rtlCol="0" anchor="t"/>
+          <a:lstStyle/>
+          <a:p>
+            <a:pPr marL="0" marR="0" lvl="0" indent="0" algn="l" defTabSz="914400" rtl="0" eaLnBrk="1" fontAlgn="auto" latinLnBrk="0" hangingPunct="1">
+              <a:lnSpc>
+                <a:spcPct val="112000"/>
+              </a:lnSpc>
+              <a:spcBef>
+                <a:spcPts val="0"/>
+              </a:spcBef>
+              <a:spcAft>
+                <a:spcPts val="0"/>
+              </a:spcAft>
+              <a:buClrTx/>
+              <a:buSzTx/>
+              <a:buFontTx/>
+              <a:buNone/>
+              <a:tabLst/>
+              <a:defRPr/>
+            </a:pPr>
+            <a:r>
+              <a:rPr kumimoji="0" lang="en-US" sz="1300" b="0" i="0" u="none" strike="noStrike" kern="1200" cap="none" spc="0" normalizeH="0" baseline="0" noProof="0" dirty="0">
+                <a:ln>
+                  <a:noFill/>
+                </a:ln>
+                <a:solidFill>
+                  <a:srgbClr val="555E6B"/>
+                </a:solidFill>
+                <a:effectLst/>
+                <a:uLnTx/>
+                <a:uFillTx/>
+                <a:latin typeface="Calibri" pitchFamily="34" charset="0"/>
+                <a:ea typeface="Calibri" pitchFamily="34" charset="-122"/>
+                <a:cs typeface="Calibri" pitchFamily="34" charset="-120"/>
+              </a:rPr>
+              <a:t>Quick and easy help file for the most common questions</a:t>
+            </a:r>
+            <a:endParaRPr kumimoji="0" lang="en-US" sz="1300" b="0" i="0" u="none" strike="noStrike" kern="1200" cap="none" spc="0" normalizeH="0" baseline="0" noProof="0" dirty="0">
+              <a:ln>
+                <a:noFill/>
+              </a:ln>
+              <a:solidFill>
+                <a:prstClr val="black"/>
+              </a:solidFill>
+              <a:effectLst/>
+              <a:uLnTx/>
+              <a:uFillTx/>
+              <a:latin typeface="Calibri" panose="020F0502020204030204"/>
+              <a:ea typeface="+mn-ea"/>
+              <a:cs typeface="+mn-cs"/>
+            </a:endParaRPr>
+          </a:p>
+        </p:txBody>
+      </p:sp>
+      <p:sp>
+        <p:nvSpPr>
+          <p:cNvPr id="5" name="Text 3">
+            <a:extLst>
+              <a:ext uri="{FF2B5EF4-FFF2-40B4-BE49-F238E27FC236}">
+                <a16:creationId xmlns:a16="http://schemas.microsoft.com/office/drawing/2014/main" id="{F4E87ED7-D981-2897-FC0E-A0003C447533}"/>
+              </a:ext>
+            </a:extLst>
+          </p:cNvPr>
+          <p:cNvSpPr/>
+          <p:nvPr/>
+        </p:nvSpPr>
+        <p:spPr>
+          <a:xfrm>
+            <a:off x="5303520" y="2468880"/>
+            <a:ext cx="3291840" cy="2011680"/>
+          </a:xfrm>
+          <a:prstGeom prst="rect">
+            <a:avLst/>
+          </a:prstGeom>
+          <a:noFill/>
+          <a:ln/>
+        </p:spPr>
+        <p:txBody>
+          <a:bodyPr wrap="square" lIns="0" tIns="0" rIns="0" bIns="0" rtlCol="0" anchor="t"/>
+          <a:lstStyle/>
+          <a:p>
+            <a:pPr marL="177800" marR="0" lvl="0" indent="-177800" algn="l" defTabSz="914400" rtl="0" eaLnBrk="1" fontAlgn="auto" latinLnBrk="0" hangingPunct="1">
+              <a:lnSpc>
+                <a:spcPct val="100000"/>
+              </a:lnSpc>
+              <a:spcBef>
+                <a:spcPts val="0"/>
+              </a:spcBef>
+              <a:spcAft>
+                <a:spcPts val="800"/>
+              </a:spcAft>
+              <a:buClrTx/>
+              <a:buSzPct val="100000"/>
+              <a:buFontTx/>
+              <a:buChar char="–"/>
+              <a:tabLst/>
+              <a:defRPr/>
+            </a:pPr>
+            <a:r>
+              <a:rPr kumimoji="0" lang="en-US" sz="1250" b="0" i="0" u="none" strike="noStrike" kern="1200" cap="none" spc="0" normalizeH="0" baseline="0" noProof="0" dirty="0">
+                <a:ln>
+                  <a:noFill/>
+                </a:ln>
+                <a:solidFill>
+                  <a:srgbClr val="23262B"/>
+                </a:solidFill>
+                <a:effectLst/>
+                <a:uLnTx/>
+                <a:uFillTx/>
+                <a:latin typeface="Calibri" pitchFamily="34" charset="0"/>
+                <a:ea typeface="Calibri" pitchFamily="34" charset="-122"/>
+                <a:cs typeface="Calibri" pitchFamily="34" charset="-120"/>
+              </a:rPr>
+              <a:t>Help focused by role</a:t>
+            </a:r>
+            <a:endParaRPr kumimoji="0" lang="en-US" sz="1250" b="0" i="0" u="none" strike="noStrike" kern="1200" cap="none" spc="0" normalizeH="0" baseline="0" noProof="0" dirty="0">
+              <a:ln>
+                <a:noFill/>
+              </a:ln>
+              <a:solidFill>
+                <a:prstClr val="black"/>
+              </a:solidFill>
+              <a:effectLst/>
+              <a:uLnTx/>
+              <a:uFillTx/>
+              <a:latin typeface="Calibri" panose="020F0502020204030204"/>
+              <a:ea typeface="+mn-ea"/>
+              <a:cs typeface="+mn-cs"/>
+            </a:endParaRPr>
+          </a:p>
+          <a:p>
+            <a:pPr marL="177800" marR="0" lvl="0" indent="-177800" algn="l" defTabSz="914400" rtl="0" eaLnBrk="1" fontAlgn="auto" latinLnBrk="0" hangingPunct="1">
+              <a:lnSpc>
+                <a:spcPct val="100000"/>
+              </a:lnSpc>
+              <a:spcBef>
+                <a:spcPts val="0"/>
+              </a:spcBef>
+              <a:spcAft>
+                <a:spcPts val="800"/>
+              </a:spcAft>
+              <a:buClrTx/>
+              <a:buSzPct val="100000"/>
+              <a:buFontTx/>
+              <a:buChar char="–"/>
+              <a:tabLst/>
+              <a:defRPr/>
+            </a:pPr>
+            <a:r>
+              <a:rPr kumimoji="0" lang="en-US" sz="1250" b="0" i="0" u="none" strike="noStrike" kern="1200" cap="none" spc="0" normalizeH="0" baseline="0" noProof="0" dirty="0">
+                <a:ln>
+                  <a:noFill/>
+                </a:ln>
+                <a:solidFill>
+                  <a:srgbClr val="23262B"/>
+                </a:solidFill>
+                <a:effectLst/>
+                <a:uLnTx/>
+                <a:uFillTx/>
+                <a:latin typeface="Calibri" pitchFamily="34" charset="0"/>
+                <a:ea typeface="Calibri" pitchFamily="34" charset="-122"/>
+                <a:cs typeface="Calibri" pitchFamily="34" charset="-120"/>
+              </a:rPr>
+              <a:t>Quick reference for buttons</a:t>
+            </a:r>
+            <a:endParaRPr kumimoji="0" lang="en-US" sz="1250" b="0" i="0" u="none" strike="noStrike" kern="1200" cap="none" spc="0" normalizeH="0" baseline="0" noProof="0" dirty="0">
+              <a:ln>
+                <a:noFill/>
+              </a:ln>
+              <a:solidFill>
+                <a:prstClr val="black"/>
+              </a:solidFill>
+              <a:effectLst/>
+              <a:uLnTx/>
+              <a:uFillTx/>
+              <a:latin typeface="Calibri" panose="020F0502020204030204"/>
+              <a:ea typeface="+mn-ea"/>
+              <a:cs typeface="+mn-cs"/>
+            </a:endParaRPr>
+          </a:p>
+        </p:txBody>
+      </p:sp>
+      <p:sp>
+        <p:nvSpPr>
+          <p:cNvPr id="15" name="Shape 13">
+            <a:extLst>
+              <a:ext uri="{FF2B5EF4-FFF2-40B4-BE49-F238E27FC236}">
+                <a16:creationId xmlns:a16="http://schemas.microsoft.com/office/drawing/2014/main" id="{B5463CD3-07C4-90DE-D0FC-5C77B555FB6A}"/>
+              </a:ext>
+            </a:extLst>
+          </p:cNvPr>
+          <p:cNvSpPr/>
+          <p:nvPr/>
+        </p:nvSpPr>
+        <p:spPr>
+          <a:xfrm>
+            <a:off x="548640" y="4855464"/>
+            <a:ext cx="73152" cy="73152"/>
+          </a:xfrm>
+          <a:prstGeom prst="ellipse">
+            <a:avLst/>
+          </a:prstGeom>
+          <a:solidFill>
+            <a:srgbClr val="D81E2C"/>
+          </a:solidFill>
+          <a:ln/>
+        </p:spPr>
+        <p:txBody>
+          <a:bodyPr/>
+          <a:lstStyle/>
+          <a:p>
+            <a:pPr marL="0" marR="0" lvl="0" indent="0" algn="l" defTabSz="914400" rtl="0" eaLnBrk="1" fontAlgn="auto" latinLnBrk="0" hangingPunct="1">
+              <a:lnSpc>
+                <a:spcPct val="100000"/>
+              </a:lnSpc>
+              <a:spcBef>
+                <a:spcPts val="0"/>
+              </a:spcBef>
+              <a:spcAft>
+                <a:spcPts val="0"/>
+              </a:spcAft>
+              <a:buClrTx/>
+              <a:buSzTx/>
+              <a:buFontTx/>
+              <a:buNone/>
+              <a:tabLst/>
+              <a:defRPr/>
+            </a:pPr>
+            <a:endParaRPr kumimoji="0" lang="en-US" sz="1800" b="0" i="0" u="none" strike="noStrike" kern="1200" cap="none" spc="0" normalizeH="0" baseline="0" noProof="0">
+              <a:ln>
+                <a:noFill/>
+              </a:ln>
+              <a:solidFill>
+                <a:prstClr val="black"/>
+              </a:solidFill>
+              <a:effectLst/>
+              <a:uLnTx/>
+              <a:uFillTx/>
+              <a:latin typeface="Calibri" panose="020F0502020204030204"/>
+              <a:ea typeface="+mn-ea"/>
+              <a:cs typeface="+mn-cs"/>
+            </a:endParaRPr>
+          </a:p>
+        </p:txBody>
+      </p:sp>
+      <p:sp>
+        <p:nvSpPr>
+          <p:cNvPr id="16" name="Text 14">
+            <a:extLst>
+              <a:ext uri="{FF2B5EF4-FFF2-40B4-BE49-F238E27FC236}">
+                <a16:creationId xmlns:a16="http://schemas.microsoft.com/office/drawing/2014/main" id="{6B5D0F8A-0897-71D8-F06B-E837A084D2CA}"/>
+              </a:ext>
+            </a:extLst>
+          </p:cNvPr>
+          <p:cNvSpPr/>
+          <p:nvPr/>
+        </p:nvSpPr>
+        <p:spPr>
+          <a:xfrm>
+            <a:off x="676656" y="4736592"/>
+            <a:ext cx="3657600" cy="292608"/>
+          </a:xfrm>
+          <a:prstGeom prst="rect">
+            <a:avLst/>
+          </a:prstGeom>
+          <a:noFill/>
+          <a:ln/>
+        </p:spPr>
+        <p:txBody>
+          <a:bodyPr wrap="square" lIns="0" tIns="0" rIns="0" bIns="0" rtlCol="0" anchor="ctr"/>
+          <a:lstStyle/>
+          <a:p>
+            <a:pPr marL="0" marR="0" lvl="0" indent="0" algn="l" defTabSz="914400" rtl="0" eaLnBrk="1" fontAlgn="auto" latinLnBrk="0" hangingPunct="1">
+              <a:lnSpc>
+                <a:spcPct val="100000"/>
+              </a:lnSpc>
+              <a:spcBef>
+                <a:spcPts val="0"/>
+              </a:spcBef>
+              <a:spcAft>
+                <a:spcPts val="0"/>
+              </a:spcAft>
+              <a:buClrTx/>
+              <a:buSzTx/>
+              <a:buFontTx/>
+              <a:buNone/>
+              <a:tabLst/>
+              <a:defRPr/>
+            </a:pPr>
+            <a:r>
+              <a:rPr kumimoji="0" lang="en-US" sz="950" b="0" i="0" u="none" strike="noStrike" kern="1200" cap="none" spc="0" normalizeH="0" baseline="0" noProof="0" dirty="0">
+                <a:ln>
+                  <a:noFill/>
+                </a:ln>
+                <a:solidFill>
+                  <a:srgbClr val="8A929C"/>
+                </a:solidFill>
+                <a:effectLst/>
+                <a:uLnTx/>
+                <a:uFillTx/>
+                <a:latin typeface="Calibri" pitchFamily="34" charset="0"/>
+                <a:ea typeface="Calibri" pitchFamily="34" charset="-122"/>
+                <a:cs typeface="Calibri" pitchFamily="34" charset="-120"/>
+              </a:rPr>
+              <a:t>EMS ReadyKit</a:t>
+            </a:r>
+            <a:endParaRPr kumimoji="0" lang="en-US" sz="950" b="0" i="0" u="none" strike="noStrike" kern="1200" cap="none" spc="0" normalizeH="0" baseline="0" noProof="0" dirty="0">
+              <a:ln>
+                <a:noFill/>
+              </a:ln>
+              <a:solidFill>
+                <a:prstClr val="black"/>
+              </a:solidFill>
+              <a:effectLst/>
+              <a:uLnTx/>
+              <a:uFillTx/>
+              <a:latin typeface="Calibri" panose="020F0502020204030204"/>
+              <a:ea typeface="+mn-ea"/>
+              <a:cs typeface="+mn-cs"/>
+            </a:endParaRPr>
+          </a:p>
+        </p:txBody>
+      </p:sp>
+      <p:sp>
+        <p:nvSpPr>
+          <p:cNvPr id="17" name="Text 15">
+            <a:extLst>
+              <a:ext uri="{FF2B5EF4-FFF2-40B4-BE49-F238E27FC236}">
+                <a16:creationId xmlns:a16="http://schemas.microsoft.com/office/drawing/2014/main" id="{0C6EC75D-5D8A-498C-E3B8-4053B3C6D299}"/>
+              </a:ext>
+            </a:extLst>
+          </p:cNvPr>
+          <p:cNvSpPr/>
+          <p:nvPr/>
+        </p:nvSpPr>
+        <p:spPr>
+          <a:xfrm>
+            <a:off x="8138160" y="4736592"/>
+            <a:ext cx="457200" cy="292608"/>
+          </a:xfrm>
+          <a:prstGeom prst="rect">
+            <a:avLst/>
+          </a:prstGeom>
+          <a:noFill/>
+          <a:ln/>
+        </p:spPr>
+        <p:txBody>
+          <a:bodyPr wrap="square" lIns="0" tIns="0" rIns="0" bIns="0" rtlCol="0" anchor="ctr"/>
+          <a:lstStyle/>
+          <a:p>
+            <a:pPr marL="0" marR="0" lvl="0" indent="0" algn="r" defTabSz="914400" rtl="0" eaLnBrk="1" fontAlgn="auto" latinLnBrk="0" hangingPunct="1">
+              <a:lnSpc>
+                <a:spcPct val="100000"/>
+              </a:lnSpc>
+              <a:spcBef>
+                <a:spcPts val="0"/>
+              </a:spcBef>
+              <a:spcAft>
+                <a:spcPts val="0"/>
+              </a:spcAft>
+              <a:buClrTx/>
+              <a:buSzTx/>
+              <a:buFontTx/>
+              <a:buNone/>
+              <a:tabLst/>
+              <a:defRPr/>
+            </a:pPr>
+            <a:r>
+              <a:rPr kumimoji="0" lang="en-US" sz="950" b="0" i="0" u="none" strike="noStrike" kern="1200" cap="none" spc="0" normalizeH="0" baseline="0" noProof="0" dirty="0">
+                <a:ln>
+                  <a:noFill/>
+                </a:ln>
+                <a:solidFill>
+                  <a:srgbClr val="8A929C"/>
+                </a:solidFill>
+                <a:effectLst/>
+                <a:uLnTx/>
+                <a:uFillTx/>
+                <a:latin typeface="Consolas" pitchFamily="34" charset="0"/>
+                <a:ea typeface="Consolas" pitchFamily="34" charset="-122"/>
+                <a:cs typeface="Consolas" pitchFamily="34" charset="-120"/>
+              </a:rPr>
+              <a:t>10</a:t>
+            </a:r>
+            <a:endParaRPr kumimoji="0" lang="en-US" sz="950" b="0" i="0" u="none" strike="noStrike" kern="1200" cap="none" spc="0" normalizeH="0" baseline="0" noProof="0" dirty="0">
+              <a:ln>
+                <a:noFill/>
+              </a:ln>
+              <a:solidFill>
+                <a:prstClr val="black"/>
+              </a:solidFill>
+              <a:effectLst/>
+              <a:uLnTx/>
+              <a:uFillTx/>
+              <a:latin typeface="Calibri" panose="020F0502020204030204"/>
+              <a:ea typeface="+mn-ea"/>
+              <a:cs typeface="+mn-cs"/>
+            </a:endParaRPr>
+          </a:p>
+        </p:txBody>
+      </p:sp>
+      <p:sp>
+        <p:nvSpPr>
+          <p:cNvPr id="20" name="Rectangle: Rounded Corners 19">
+            <a:extLst>
+              <a:ext uri="{FF2B5EF4-FFF2-40B4-BE49-F238E27FC236}">
+                <a16:creationId xmlns:a16="http://schemas.microsoft.com/office/drawing/2014/main" id="{58DCFBF2-650B-A568-6C09-A8615EDC5F76}"/>
+              </a:ext>
+            </a:extLst>
+          </p:cNvPr>
+          <p:cNvSpPr/>
+          <p:nvPr/>
+        </p:nvSpPr>
+        <p:spPr>
+          <a:xfrm>
+            <a:off x="1507383" y="522798"/>
+            <a:ext cx="861391" cy="182880"/>
+          </a:xfrm>
+          <a:prstGeom prst="roundRect">
+            <a:avLst/>
+          </a:prstGeom>
+          <a:solidFill>
+            <a:srgbClr val="D81E2C"/>
+          </a:solidFill>
+          <a:ln>
+            <a:solidFill>
+              <a:schemeClr val="bg1"/>
+            </a:solidFill>
+          </a:ln>
+        </p:spPr>
+        <p:style>
+          <a:lnRef idx="2">
+            <a:schemeClr val="accent1">
+              <a:shade val="15000"/>
+            </a:schemeClr>
+          </a:lnRef>
+          <a:fillRef idx="1">
+            <a:schemeClr val="accent1"/>
+          </a:fillRef>
+          <a:effectRef idx="0">
+            <a:schemeClr val="accent1"/>
+          </a:effectRef>
+          <a:fontRef idx="minor">
+            <a:schemeClr val="lt1"/>
+          </a:fontRef>
+        </p:style>
+        <p:txBody>
+          <a:bodyPr rtlCol="0" anchor="ctr"/>
+          <a:lstStyle/>
+          <a:p>
+            <a:pPr marL="0" marR="0" lvl="0" indent="0" algn="ctr" defTabSz="914400" rtl="0" eaLnBrk="1" fontAlgn="auto" latinLnBrk="0" hangingPunct="1">
+              <a:lnSpc>
+                <a:spcPct val="100000"/>
+              </a:lnSpc>
+              <a:spcBef>
+                <a:spcPts val="0"/>
+              </a:spcBef>
+              <a:spcAft>
+                <a:spcPts val="0"/>
+              </a:spcAft>
+              <a:buClrTx/>
+              <a:buSzTx/>
+              <a:buFontTx/>
+              <a:buNone/>
+              <a:tabLst/>
+              <a:defRPr/>
+            </a:pPr>
+            <a:r>
+              <a:rPr kumimoji="0" lang="en-US" sz="1000" b="0" i="0" u="none" strike="noStrike" kern="1200" cap="none" spc="0" normalizeH="0" baseline="0" noProof="0" dirty="0">
+                <a:ln>
+                  <a:noFill/>
+                </a:ln>
+                <a:solidFill>
+                  <a:prstClr val="white"/>
+                </a:solidFill>
+                <a:effectLst/>
+                <a:uLnTx/>
+                <a:uFillTx/>
+                <a:latin typeface="Calibri" panose="020F0502020204030204"/>
+                <a:ea typeface="+mn-ea"/>
+                <a:cs typeface="+mn-cs"/>
+              </a:rPr>
+              <a:t>Supervisor</a:t>
+            </a:r>
+          </a:p>
+        </p:txBody>
+      </p:sp>
+      <p:sp>
+        <p:nvSpPr>
+          <p:cNvPr id="23" name="Rectangle: Rounded Corners 22">
+            <a:extLst>
+              <a:ext uri="{FF2B5EF4-FFF2-40B4-BE49-F238E27FC236}">
+                <a16:creationId xmlns:a16="http://schemas.microsoft.com/office/drawing/2014/main" id="{0270248C-E1B8-5BA7-87ED-C65D83964628}"/>
+              </a:ext>
+            </a:extLst>
+          </p:cNvPr>
+          <p:cNvSpPr/>
+          <p:nvPr/>
+        </p:nvSpPr>
+        <p:spPr>
+          <a:xfrm>
+            <a:off x="3987034" y="522798"/>
+            <a:ext cx="861391" cy="182880"/>
+          </a:xfrm>
+          <a:prstGeom prst="roundRect">
+            <a:avLst/>
+          </a:prstGeom>
+          <a:solidFill>
+            <a:srgbClr val="D81E2C"/>
+          </a:solidFill>
+          <a:ln>
+            <a:solidFill>
+              <a:schemeClr val="bg1"/>
+            </a:solidFill>
+          </a:ln>
+        </p:spPr>
+        <p:style>
+          <a:lnRef idx="2">
+            <a:schemeClr val="accent1">
+              <a:shade val="15000"/>
+            </a:schemeClr>
+          </a:lnRef>
+          <a:fillRef idx="1">
+            <a:schemeClr val="accent1"/>
+          </a:fillRef>
+          <a:effectRef idx="0">
+            <a:schemeClr val="accent1"/>
+          </a:effectRef>
+          <a:fontRef idx="minor">
+            <a:schemeClr val="lt1"/>
+          </a:fontRef>
+        </p:style>
+        <p:txBody>
+          <a:bodyPr rtlCol="0" anchor="ctr"/>
+          <a:lstStyle/>
+          <a:p>
+            <a:pPr marL="0" marR="0" lvl="0" indent="0" algn="ctr" defTabSz="914400" rtl="0" eaLnBrk="1" fontAlgn="auto" latinLnBrk="0" hangingPunct="1">
+              <a:lnSpc>
+                <a:spcPct val="100000"/>
+              </a:lnSpc>
+              <a:spcBef>
+                <a:spcPts val="0"/>
+              </a:spcBef>
+              <a:spcAft>
+                <a:spcPts val="0"/>
+              </a:spcAft>
+              <a:buClrTx/>
+              <a:buSzTx/>
+              <a:buFontTx/>
+              <a:buNone/>
+              <a:tabLst/>
+              <a:defRPr/>
+            </a:pPr>
+            <a:r>
+              <a:rPr kumimoji="0" lang="en-US" sz="1000" b="0" i="0" u="none" strike="noStrike" kern="1200" cap="none" spc="0" normalizeH="0" baseline="0" noProof="0" dirty="0">
+                <a:ln>
+                  <a:noFill/>
+                </a:ln>
+                <a:solidFill>
+                  <a:prstClr val="white"/>
+                </a:solidFill>
+                <a:effectLst/>
+                <a:uLnTx/>
+                <a:uFillTx/>
+                <a:latin typeface="Calibri" panose="020F0502020204030204"/>
+                <a:ea typeface="+mn-ea"/>
+                <a:cs typeface="+mn-cs"/>
+              </a:rPr>
+              <a:t>Supervisor</a:t>
+            </a:r>
+          </a:p>
+        </p:txBody>
+      </p:sp>
+      <p:pic>
+        <p:nvPicPr>
+          <p:cNvPr id="7" name="Picture 6">
+            <a:extLst>
+              <a:ext uri="{FF2B5EF4-FFF2-40B4-BE49-F238E27FC236}">
+                <a16:creationId xmlns:a16="http://schemas.microsoft.com/office/drawing/2014/main" id="{07DE7202-D479-8125-3CC2-FDE1F54A86CE}"/>
+              </a:ext>
+            </a:extLst>
+          </p:cNvPr>
+          <p:cNvPicPr>
+            <a:picLocks noChangeAspect="1"/>
+          </p:cNvPicPr>
+          <p:nvPr/>
+        </p:nvPicPr>
+        <p:blipFill>
+          <a:blip r:embed="rId3"/>
+          <a:stretch>
+            <a:fillRect/>
+          </a:stretch>
+        </p:blipFill>
+        <p:spPr>
+          <a:xfrm>
+            <a:off x="387954" y="749807"/>
+            <a:ext cx="1989488" cy="3893713"/>
+          </a:xfrm>
+          <a:prstGeom prst="rect">
+            <a:avLst/>
+          </a:prstGeom>
+          <a:ln>
+            <a:noFill/>
+          </a:ln>
+          <a:effectLst>
+            <a:outerShdw blurRad="292100" dist="139700" dir="2700000" algn="tl" rotWithShape="0">
+              <a:srgbClr val="333333">
+                <a:alpha val="65000"/>
+              </a:srgbClr>
+            </a:outerShdw>
+          </a:effectLst>
+        </p:spPr>
+      </p:pic>
+      <p:pic>
+        <p:nvPicPr>
+          <p:cNvPr id="9" name="Picture 8">
+            <a:extLst>
+              <a:ext uri="{FF2B5EF4-FFF2-40B4-BE49-F238E27FC236}">
+                <a16:creationId xmlns:a16="http://schemas.microsoft.com/office/drawing/2014/main" id="{05C84724-A4E7-258A-B83A-AF25238B8D55}"/>
+              </a:ext>
+            </a:extLst>
+          </p:cNvPr>
+          <p:cNvPicPr>
+            <a:picLocks noChangeAspect="1"/>
+          </p:cNvPicPr>
+          <p:nvPr/>
+        </p:nvPicPr>
+        <p:blipFill>
+          <a:blip r:embed="rId4"/>
+          <a:stretch>
+            <a:fillRect/>
+          </a:stretch>
+        </p:blipFill>
+        <p:spPr>
+          <a:xfrm>
+            <a:off x="2849336" y="749807"/>
+            <a:ext cx="1999089" cy="3893714"/>
+          </a:xfrm>
+          <a:prstGeom prst="rect">
+            <a:avLst/>
+          </a:prstGeom>
+          <a:ln>
+            <a:noFill/>
+          </a:ln>
+          <a:effectLst>
+            <a:outerShdw blurRad="292100" dist="139700" dir="2700000" algn="tl" rotWithShape="0">
+              <a:srgbClr val="333333">
+                <a:alpha val="65000"/>
+              </a:srgbClr>
+            </a:outerShdw>
+          </a:effectLst>
+        </p:spPr>
+      </p:pic>
+    </p:spTree>
+    <p:extLst>
+      <p:ext uri="{BB962C8B-B14F-4D97-AF65-F5344CB8AC3E}">
+        <p14:creationId xmlns:p14="http://schemas.microsoft.com/office/powerpoint/2010/main" val="402364641"/>
+      </p:ext>
+    </p:extLst>
+  </p:cSld>
+  <p:clrMapOvr>
+    <a:masterClrMapping/>
+  </p:clrMapOvr>
+</p:sld>
+</file>
+
+<file path=ppt/slides/slide23.xml><?xml version="1.0" encoding="utf-8"?>
+<p:sld xmlns:a="http://schemas.openxmlformats.org/drawingml/2006/main" xmlns:r="http://schemas.openxmlformats.org/officeDocument/2006/relationships" xmlns:p="http://schemas.openxmlformats.org/presentationml/2006/main">
+  <p:cSld name="Slide 11">
+    <p:bg>
+      <p:bgPr>
+        <a:solidFill>
+          <a:srgbClr val="23262B"/>
+        </a:solidFill>
+        <a:effectLst/>
+      </p:bgPr>
+    </p:bg>
+    <p:spTree>
+      <p:nvGrpSpPr>
+        <p:cNvPr id="1" name=""/>
+        <p:cNvGrpSpPr/>
+        <p:nvPr/>
+      </p:nvGrpSpPr>
+      <p:grpSpPr>
+        <a:xfrm>
+          <a:off x="0" y="0"/>
+          <a:ext cx="0" cy="0"/>
+          <a:chOff x="0" y="0"/>
+          <a:chExt cx="0" cy="0"/>
+        </a:xfrm>
+      </p:grpSpPr>
+      <p:sp>
+        <p:nvSpPr>
+          <p:cNvPr id="2" name="Shape 0"/>
+          <p:cNvSpPr/>
+          <p:nvPr/>
+        </p:nvSpPr>
+        <p:spPr>
+          <a:xfrm>
+            <a:off x="0" y="0"/>
+            <a:ext cx="164592" cy="5143500"/>
+          </a:xfrm>
+          <a:prstGeom prst="rect">
+            <a:avLst/>
+          </a:prstGeom>
+          <a:solidFill>
+            <a:srgbClr val="D81E2C"/>
+          </a:solidFill>
+          <a:ln/>
+        </p:spPr>
+        <p:txBody>
+          <a:bodyPr/>
+          <a:lstStyle/>
+          <a:p>
+            <a:endParaRPr lang="en-US"/>
+          </a:p>
+        </p:txBody>
+      </p:sp>
+      <p:sp>
+        <p:nvSpPr>
+          <p:cNvPr id="3" name="Text 1"/>
+          <p:cNvSpPr/>
+          <p:nvPr/>
+        </p:nvSpPr>
+        <p:spPr>
+          <a:xfrm>
+            <a:off x="548640" y="457200"/>
+            <a:ext cx="4572000" cy="274320"/>
+          </a:xfrm>
+          <a:prstGeom prst="rect">
+            <a:avLst/>
+          </a:prstGeom>
+          <a:noFill/>
+          <a:ln/>
+        </p:spPr>
+        <p:txBody>
+          <a:bodyPr wrap="square" lIns="0" tIns="0" rIns="0" bIns="0" rtlCol="0" anchor="ctr"/>
+          <a:lstStyle/>
+          <a:p>
+            <a:pPr marL="0" indent="0" algn="l">
+              <a:buNone/>
+            </a:pPr>
+            <a:r>
+              <a:rPr lang="en-US" sz="1100" b="1" kern="0" spc="300" dirty="0">
+                <a:solidFill>
+                  <a:srgbClr val="FF8A91"/>
+                </a:solidFill>
+                <a:latin typeface="Consolas" pitchFamily="34" charset="0"/>
+                <a:ea typeface="Consolas" pitchFamily="34" charset="-122"/>
+                <a:cs typeface="Consolas" pitchFamily="34" charset="-120"/>
+              </a:rPr>
+              <a:t>UNDER THE HOOD</a:t>
+            </a:r>
+            <a:endParaRPr lang="en-US" sz="1100" dirty="0"/>
+          </a:p>
+        </p:txBody>
+      </p:sp>
+      <p:sp>
+        <p:nvSpPr>
+          <p:cNvPr id="4" name="Text 2"/>
+          <p:cNvSpPr/>
+          <p:nvPr/>
+        </p:nvSpPr>
+        <p:spPr>
+          <a:xfrm>
+            <a:off x="548640" y="749808"/>
+            <a:ext cx="8229600" cy="548640"/>
+          </a:xfrm>
+          <a:prstGeom prst="rect">
+            <a:avLst/>
+          </a:prstGeom>
+          <a:noFill/>
+          <a:ln/>
+        </p:spPr>
+        <p:txBody>
+          <a:bodyPr wrap="square" lIns="0" tIns="0" rIns="0" bIns="0" rtlCol="0" anchor="ctr"/>
+          <a:lstStyle/>
+          <a:p>
+            <a:pPr marL="0" indent="0" algn="l">
+              <a:buNone/>
+            </a:pPr>
+            <a:r>
+              <a:rPr lang="en-US" sz="2800" b="1" dirty="0">
+                <a:solidFill>
+                  <a:srgbClr val="FFFFFF"/>
+                </a:solidFill>
+                <a:latin typeface="Trebuchet MS" pitchFamily="34" charset="0"/>
+                <a:ea typeface="Trebuchet MS" pitchFamily="34" charset="-122"/>
+                <a:cs typeface="Trebuchet MS" pitchFamily="34" charset="-120"/>
+              </a:rPr>
+              <a:t>Cloud architecture</a:t>
+            </a:r>
+            <a:endParaRPr lang="en-US" sz="2800" dirty="0"/>
+          </a:p>
+        </p:txBody>
+      </p:sp>
+      <p:sp>
+        <p:nvSpPr>
+          <p:cNvPr id="5" name="Text 3"/>
+          <p:cNvSpPr/>
+          <p:nvPr/>
+        </p:nvSpPr>
+        <p:spPr>
+          <a:xfrm>
+            <a:off x="548640" y="1298448"/>
+            <a:ext cx="8229600" cy="320040"/>
+          </a:xfrm>
+          <a:prstGeom prst="rect">
+            <a:avLst/>
+          </a:prstGeom>
+          <a:noFill/>
+          <a:ln/>
+        </p:spPr>
+        <p:txBody>
+          <a:bodyPr wrap="square" lIns="0" tIns="0" rIns="0" bIns="0" rtlCol="0" anchor="ctr"/>
+          <a:lstStyle/>
+          <a:p>
+            <a:pPr marL="0" indent="0" algn="l">
+              <a:buNone/>
+            </a:pPr>
+            <a:r>
+              <a:rPr lang="en-US" sz="1250" i="1" dirty="0">
+                <a:solidFill>
+                  <a:srgbClr val="AEB4BC"/>
+                </a:solidFill>
+                <a:latin typeface="Calibri" pitchFamily="34" charset="0"/>
+                <a:ea typeface="Calibri" pitchFamily="34" charset="-122"/>
+                <a:cs typeface="Calibri" pitchFamily="34" charset="-120"/>
+              </a:rPr>
+              <a:t>Representative architecture for a secure, multi-user web app.</a:t>
+            </a:r>
+            <a:endParaRPr lang="en-US" sz="1250" dirty="0"/>
+          </a:p>
+        </p:txBody>
+      </p:sp>
+      <p:sp>
+        <p:nvSpPr>
+          <p:cNvPr id="6" name="Shape 4"/>
+          <p:cNvSpPr/>
+          <p:nvPr/>
+        </p:nvSpPr>
+        <p:spPr>
+          <a:xfrm>
+            <a:off x="548640" y="1920240"/>
+            <a:ext cx="1828800" cy="1051560"/>
+          </a:xfrm>
+          <a:prstGeom prst="rect">
+            <a:avLst/>
+          </a:prstGeom>
+          <a:solidFill>
+            <a:srgbClr val="2E333B"/>
+          </a:solidFill>
+          <a:ln w="12700">
+            <a:solidFill>
+              <a:srgbClr val="3D434C"/>
+            </a:solidFill>
+            <a:prstDash val="solid"/>
+          </a:ln>
+        </p:spPr>
+        <p:txBody>
+          <a:bodyPr/>
+          <a:lstStyle/>
+          <a:p>
+            <a:endParaRPr lang="en-US"/>
+          </a:p>
+        </p:txBody>
+      </p:sp>
+      <p:sp>
+        <p:nvSpPr>
+          <p:cNvPr id="7" name="Shape 5"/>
+          <p:cNvSpPr/>
+          <p:nvPr/>
+        </p:nvSpPr>
+        <p:spPr>
+          <a:xfrm>
+            <a:off x="548640" y="1920240"/>
+            <a:ext cx="64008" cy="1051560"/>
+          </a:xfrm>
+          <a:prstGeom prst="rect">
+            <a:avLst/>
+          </a:prstGeom>
+          <a:solidFill>
+            <a:srgbClr val="D81E2C"/>
+          </a:solidFill>
+          <a:ln/>
+        </p:spPr>
+        <p:txBody>
+          <a:bodyPr/>
+          <a:lstStyle/>
+          <a:p>
+            <a:endParaRPr lang="en-US"/>
+          </a:p>
+        </p:txBody>
+      </p:sp>
+      <p:sp>
+        <p:nvSpPr>
+          <p:cNvPr id="8" name="Text 6"/>
+          <p:cNvSpPr/>
+          <p:nvPr/>
+        </p:nvSpPr>
+        <p:spPr>
+          <a:xfrm>
+            <a:off x="713232" y="2066544"/>
+            <a:ext cx="1554480" cy="365760"/>
+          </a:xfrm>
+          <a:prstGeom prst="rect">
+            <a:avLst/>
+          </a:prstGeom>
+          <a:noFill/>
+          <a:ln/>
+        </p:spPr>
+        <p:txBody>
+          <a:bodyPr wrap="square" lIns="0" tIns="0" rIns="0" bIns="0" rtlCol="0" anchor="ctr"/>
+          <a:lstStyle/>
+          <a:p>
+            <a:pPr marL="0" indent="0" algn="l">
+              <a:lnSpc>
+                <a:spcPct val="95000"/>
+              </a:lnSpc>
+              <a:buNone/>
+            </a:pPr>
+            <a:r>
+              <a:rPr lang="en-US" sz="1300" b="1" dirty="0">
+                <a:solidFill>
+                  <a:srgbClr val="FFFFFF"/>
+                </a:solidFill>
+                <a:latin typeface="Trebuchet MS" pitchFamily="34" charset="0"/>
+                <a:ea typeface="Trebuchet MS" pitchFamily="34" charset="-122"/>
+                <a:cs typeface="Trebuchet MS" pitchFamily="34" charset="-120"/>
+              </a:rPr>
+              <a:t>Crews &amp; supervisors</a:t>
+            </a:r>
+            <a:endParaRPr lang="en-US" sz="1300" dirty="0"/>
+          </a:p>
+        </p:txBody>
+      </p:sp>
+      <p:sp>
+        <p:nvSpPr>
+          <p:cNvPr id="9" name="Text 7"/>
+          <p:cNvSpPr/>
+          <p:nvPr/>
+        </p:nvSpPr>
+        <p:spPr>
+          <a:xfrm>
+            <a:off x="713232" y="2468880"/>
+            <a:ext cx="1554480" cy="411480"/>
+          </a:xfrm>
+          <a:prstGeom prst="rect">
+            <a:avLst/>
+          </a:prstGeom>
+          <a:noFill/>
+          <a:ln/>
+        </p:spPr>
+        <p:txBody>
+          <a:bodyPr wrap="square" lIns="0" tIns="0" rIns="0" bIns="0" rtlCol="0" anchor="t"/>
+          <a:lstStyle/>
+          <a:p>
+            <a:pPr marL="0" indent="0" algn="l">
+              <a:lnSpc>
+                <a:spcPct val="100000"/>
+              </a:lnSpc>
+              <a:buNone/>
+            </a:pPr>
+            <a:r>
+              <a:rPr lang="en-US" sz="1000" dirty="0">
+                <a:solidFill>
+                  <a:srgbClr val="AEB4BC"/>
+                </a:solidFill>
+                <a:latin typeface="Calibri" pitchFamily="34" charset="0"/>
+                <a:ea typeface="Calibri" pitchFamily="34" charset="-122"/>
+                <a:cs typeface="Calibri" pitchFamily="34" charset="-120"/>
+              </a:rPr>
+              <a:t>Browser / mobile web</a:t>
+            </a:r>
+            <a:endParaRPr lang="en-US" sz="1000" dirty="0"/>
+          </a:p>
+        </p:txBody>
+      </p:sp>
+      <p:sp>
+        <p:nvSpPr>
+          <p:cNvPr id="10" name="Text 8"/>
+          <p:cNvSpPr/>
+          <p:nvPr/>
+        </p:nvSpPr>
+        <p:spPr>
+          <a:xfrm>
+            <a:off x="2359152" y="1920240"/>
+            <a:ext cx="338328" cy="1051560"/>
+          </a:xfrm>
+          <a:prstGeom prst="rect">
+            <a:avLst/>
+          </a:prstGeom>
+          <a:noFill/>
+          <a:ln/>
+        </p:spPr>
+        <p:txBody>
+          <a:bodyPr wrap="square" lIns="0" tIns="0" rIns="0" bIns="0" rtlCol="0" anchor="ctr"/>
+          <a:lstStyle/>
+          <a:p>
+            <a:pPr marL="0" indent="0" algn="ctr">
+              <a:buNone/>
+            </a:pPr>
+            <a:r>
+              <a:rPr lang="en-US" sz="2000" b="1" dirty="0">
+                <a:solidFill>
+                  <a:srgbClr val="D81E2C"/>
+                </a:solidFill>
+                <a:latin typeface="Trebuchet MS" pitchFamily="34" charset="0"/>
+                <a:ea typeface="Trebuchet MS" pitchFamily="34" charset="-122"/>
+                <a:cs typeface="Trebuchet MS" pitchFamily="34" charset="-120"/>
+              </a:rPr>
+              <a:t>→</a:t>
+            </a:r>
+            <a:endParaRPr lang="en-US" sz="2000" dirty="0"/>
+          </a:p>
+        </p:txBody>
+      </p:sp>
+      <p:sp>
+        <p:nvSpPr>
+          <p:cNvPr id="11" name="Shape 9"/>
+          <p:cNvSpPr/>
+          <p:nvPr/>
+        </p:nvSpPr>
+        <p:spPr>
+          <a:xfrm>
+            <a:off x="2679192" y="1920240"/>
+            <a:ext cx="1828800" cy="1051560"/>
+          </a:xfrm>
+          <a:prstGeom prst="rect">
+            <a:avLst/>
+          </a:prstGeom>
+          <a:solidFill>
+            <a:srgbClr val="2E333B"/>
+          </a:solidFill>
+          <a:ln w="12700">
+            <a:solidFill>
+              <a:srgbClr val="3D434C"/>
+            </a:solidFill>
+            <a:prstDash val="solid"/>
+          </a:ln>
+        </p:spPr>
+        <p:txBody>
+          <a:bodyPr/>
+          <a:lstStyle/>
+          <a:p>
+            <a:endParaRPr lang="en-US"/>
+          </a:p>
+        </p:txBody>
+      </p:sp>
+      <p:sp>
+        <p:nvSpPr>
+          <p:cNvPr id="12" name="Shape 10"/>
+          <p:cNvSpPr/>
+          <p:nvPr/>
+        </p:nvSpPr>
+        <p:spPr>
+          <a:xfrm>
+            <a:off x="2679192" y="1920240"/>
+            <a:ext cx="64008" cy="1051560"/>
+          </a:xfrm>
+          <a:prstGeom prst="rect">
+            <a:avLst/>
+          </a:prstGeom>
+          <a:solidFill>
+            <a:srgbClr val="D81E2C"/>
+          </a:solidFill>
+          <a:ln/>
+        </p:spPr>
+        <p:txBody>
+          <a:bodyPr/>
+          <a:lstStyle/>
+          <a:p>
+            <a:endParaRPr lang="en-US"/>
+          </a:p>
+        </p:txBody>
+      </p:sp>
+      <p:sp>
+        <p:nvSpPr>
+          <p:cNvPr id="13" name="Text 11"/>
+          <p:cNvSpPr/>
+          <p:nvPr/>
+        </p:nvSpPr>
+        <p:spPr>
+          <a:xfrm>
+            <a:off x="2843784" y="2066544"/>
+            <a:ext cx="1554480" cy="365760"/>
+          </a:xfrm>
+          <a:prstGeom prst="rect">
+            <a:avLst/>
+          </a:prstGeom>
+          <a:noFill/>
+          <a:ln/>
+        </p:spPr>
+        <p:txBody>
+          <a:bodyPr wrap="square" lIns="0" tIns="0" rIns="0" bIns="0" rtlCol="0" anchor="ctr"/>
+          <a:lstStyle/>
+          <a:p>
+            <a:pPr marL="0" indent="0" algn="l">
+              <a:lnSpc>
+                <a:spcPct val="95000"/>
+              </a:lnSpc>
+              <a:buNone/>
+            </a:pPr>
+            <a:r>
+              <a:rPr lang="en-US" sz="1300" b="1" dirty="0">
+                <a:solidFill>
+                  <a:srgbClr val="FFFFFF"/>
+                </a:solidFill>
+                <a:latin typeface="Trebuchet MS" pitchFamily="34" charset="0"/>
+                <a:ea typeface="Trebuchet MS" pitchFamily="34" charset="-122"/>
+                <a:cs typeface="Trebuchet MS" pitchFamily="34" charset="-120"/>
+              </a:rPr>
+              <a:t>Frontend</a:t>
+            </a:r>
+            <a:endParaRPr lang="en-US" sz="1300" dirty="0"/>
+          </a:p>
+        </p:txBody>
+      </p:sp>
+      <p:sp>
+        <p:nvSpPr>
+          <p:cNvPr id="14" name="Text 12"/>
+          <p:cNvSpPr/>
+          <p:nvPr/>
+        </p:nvSpPr>
+        <p:spPr>
+          <a:xfrm>
+            <a:off x="2843784" y="2468880"/>
+            <a:ext cx="1554480" cy="411480"/>
+          </a:xfrm>
+          <a:prstGeom prst="rect">
+            <a:avLst/>
+          </a:prstGeom>
+          <a:noFill/>
+          <a:ln/>
+        </p:spPr>
+        <p:txBody>
+          <a:bodyPr wrap="square" lIns="0" tIns="0" rIns="0" bIns="0" rtlCol="0" anchor="t"/>
+          <a:lstStyle/>
+          <a:p>
+            <a:pPr marL="0" indent="0" algn="l">
+              <a:lnSpc>
+                <a:spcPct val="100000"/>
+              </a:lnSpc>
+              <a:buNone/>
+            </a:pPr>
+            <a:r>
+              <a:rPr lang="en-US" sz="1000" dirty="0">
+                <a:solidFill>
+                  <a:srgbClr val="AEB4BC"/>
+                </a:solidFill>
+                <a:latin typeface="Calibri" pitchFamily="34" charset="0"/>
+                <a:ea typeface="Calibri" pitchFamily="34" charset="-122"/>
+                <a:cs typeface="Calibri" pitchFamily="34" charset="-120"/>
+              </a:rPr>
+              <a:t>Single-page web app</a:t>
+            </a:r>
+            <a:endParaRPr lang="en-US" sz="1000" dirty="0"/>
+          </a:p>
+        </p:txBody>
+      </p:sp>
+      <p:sp>
+        <p:nvSpPr>
+          <p:cNvPr id="15" name="Text 13"/>
+          <p:cNvSpPr/>
+          <p:nvPr/>
+        </p:nvSpPr>
+        <p:spPr>
+          <a:xfrm>
+            <a:off x="4489704" y="1920240"/>
+            <a:ext cx="338328" cy="1051560"/>
+          </a:xfrm>
+          <a:prstGeom prst="rect">
+            <a:avLst/>
+          </a:prstGeom>
+          <a:noFill/>
+          <a:ln/>
+        </p:spPr>
+        <p:txBody>
+          <a:bodyPr wrap="square" lIns="0" tIns="0" rIns="0" bIns="0" rtlCol="0" anchor="ctr"/>
+          <a:lstStyle/>
+          <a:p>
+            <a:pPr marL="0" indent="0" algn="ctr">
+              <a:buNone/>
+            </a:pPr>
+            <a:r>
+              <a:rPr lang="en-US" sz="2000" b="1" dirty="0">
+                <a:solidFill>
+                  <a:srgbClr val="D81E2C"/>
+                </a:solidFill>
+                <a:latin typeface="Trebuchet MS" pitchFamily="34" charset="0"/>
+                <a:ea typeface="Trebuchet MS" pitchFamily="34" charset="-122"/>
+                <a:cs typeface="Trebuchet MS" pitchFamily="34" charset="-120"/>
+              </a:rPr>
+              <a:t>→</a:t>
+            </a:r>
+            <a:endParaRPr lang="en-US" sz="2000" dirty="0"/>
+          </a:p>
+        </p:txBody>
+      </p:sp>
+      <p:sp>
+        <p:nvSpPr>
+          <p:cNvPr id="16" name="Shape 14"/>
+          <p:cNvSpPr/>
+          <p:nvPr/>
+        </p:nvSpPr>
+        <p:spPr>
+          <a:xfrm>
+            <a:off x="4809744" y="1920240"/>
+            <a:ext cx="1828800" cy="1051560"/>
+          </a:xfrm>
+          <a:prstGeom prst="rect">
+            <a:avLst/>
+          </a:prstGeom>
+          <a:solidFill>
+            <a:srgbClr val="2E333B"/>
+          </a:solidFill>
+          <a:ln w="12700">
+            <a:solidFill>
+              <a:srgbClr val="3D434C"/>
+            </a:solidFill>
+            <a:prstDash val="solid"/>
+          </a:ln>
+        </p:spPr>
+        <p:txBody>
+          <a:bodyPr/>
+          <a:lstStyle/>
+          <a:p>
+            <a:endParaRPr lang="en-US"/>
+          </a:p>
+        </p:txBody>
+      </p:sp>
+      <p:sp>
+        <p:nvSpPr>
+          <p:cNvPr id="17" name="Shape 15"/>
+          <p:cNvSpPr/>
+          <p:nvPr/>
+        </p:nvSpPr>
+        <p:spPr>
+          <a:xfrm>
+            <a:off x="4809744" y="1920240"/>
+            <a:ext cx="64008" cy="1051560"/>
+          </a:xfrm>
+          <a:prstGeom prst="rect">
+            <a:avLst/>
+          </a:prstGeom>
+          <a:solidFill>
+            <a:srgbClr val="D81E2C"/>
+          </a:solidFill>
+          <a:ln/>
+        </p:spPr>
+        <p:txBody>
+          <a:bodyPr/>
+          <a:lstStyle/>
+          <a:p>
+            <a:endParaRPr lang="en-US"/>
+          </a:p>
+        </p:txBody>
+      </p:sp>
+      <p:sp>
+        <p:nvSpPr>
+          <p:cNvPr id="18" name="Text 16"/>
+          <p:cNvSpPr/>
+          <p:nvPr/>
+        </p:nvSpPr>
+        <p:spPr>
+          <a:xfrm>
+            <a:off x="4974336" y="2066544"/>
+            <a:ext cx="1554480" cy="365760"/>
+          </a:xfrm>
+          <a:prstGeom prst="rect">
+            <a:avLst/>
+          </a:prstGeom>
+          <a:noFill/>
+          <a:ln/>
+        </p:spPr>
+        <p:txBody>
+          <a:bodyPr wrap="square" lIns="0" tIns="0" rIns="0" bIns="0" rtlCol="0" anchor="ctr"/>
+          <a:lstStyle/>
+          <a:p>
+            <a:pPr marL="0" indent="0" algn="l">
+              <a:lnSpc>
+                <a:spcPct val="95000"/>
+              </a:lnSpc>
+              <a:buNone/>
+            </a:pPr>
+            <a:r>
+              <a:rPr lang="en-US" sz="1300" b="1" dirty="0">
+                <a:solidFill>
+                  <a:srgbClr val="FFFFFF"/>
+                </a:solidFill>
+                <a:latin typeface="Trebuchet MS" pitchFamily="34" charset="0"/>
+                <a:ea typeface="Trebuchet MS" pitchFamily="34" charset="-122"/>
+                <a:cs typeface="Trebuchet MS" pitchFamily="34" charset="-120"/>
+              </a:rPr>
+              <a:t>API service</a:t>
+            </a:r>
+            <a:endParaRPr lang="en-US" sz="1300" dirty="0"/>
+          </a:p>
+        </p:txBody>
+      </p:sp>
+      <p:sp>
+        <p:nvSpPr>
+          <p:cNvPr id="19" name="Text 17"/>
+          <p:cNvSpPr/>
+          <p:nvPr/>
+        </p:nvSpPr>
+        <p:spPr>
+          <a:xfrm>
+            <a:off x="4974336" y="2468880"/>
+            <a:ext cx="1554480" cy="411480"/>
+          </a:xfrm>
+          <a:prstGeom prst="rect">
+            <a:avLst/>
+          </a:prstGeom>
+          <a:noFill/>
+          <a:ln/>
+        </p:spPr>
+        <p:txBody>
+          <a:bodyPr wrap="square" lIns="0" tIns="0" rIns="0" bIns="0" rtlCol="0" anchor="t"/>
+          <a:lstStyle/>
+          <a:p>
+            <a:pPr marL="0" indent="0" algn="l">
+              <a:lnSpc>
+                <a:spcPct val="100000"/>
+              </a:lnSpc>
+              <a:buNone/>
+            </a:pPr>
+            <a:r>
+              <a:rPr lang="en-US" sz="1000" dirty="0">
+                <a:solidFill>
+                  <a:srgbClr val="AEB4BC"/>
+                </a:solidFill>
+                <a:latin typeface="Calibri" pitchFamily="34" charset="0"/>
+                <a:ea typeface="Calibri" pitchFamily="34" charset="-122"/>
+                <a:cs typeface="Calibri" pitchFamily="34" charset="-120"/>
+              </a:rPr>
+              <a:t>Application &amp; business logic</a:t>
+            </a:r>
+            <a:endParaRPr lang="en-US" sz="1000" dirty="0"/>
+          </a:p>
+        </p:txBody>
+      </p:sp>
+      <p:sp>
+        <p:nvSpPr>
+          <p:cNvPr id="20" name="Text 18"/>
+          <p:cNvSpPr/>
+          <p:nvPr/>
+        </p:nvSpPr>
+        <p:spPr>
+          <a:xfrm>
+            <a:off x="6620256" y="1920240"/>
+            <a:ext cx="338328" cy="1051560"/>
+          </a:xfrm>
+          <a:prstGeom prst="rect">
+            <a:avLst/>
+          </a:prstGeom>
+          <a:noFill/>
+          <a:ln/>
+        </p:spPr>
+        <p:txBody>
+          <a:bodyPr wrap="square" lIns="0" tIns="0" rIns="0" bIns="0" rtlCol="0" anchor="ctr"/>
+          <a:lstStyle/>
+          <a:p>
+            <a:pPr marL="0" indent="0" algn="ctr">
+              <a:buNone/>
+            </a:pPr>
+            <a:r>
+              <a:rPr lang="en-US" sz="2000" b="1" dirty="0">
+                <a:solidFill>
+                  <a:srgbClr val="D81E2C"/>
+                </a:solidFill>
+                <a:latin typeface="Trebuchet MS" pitchFamily="34" charset="0"/>
+                <a:ea typeface="Trebuchet MS" pitchFamily="34" charset="-122"/>
+                <a:cs typeface="Trebuchet MS" pitchFamily="34" charset="-120"/>
+              </a:rPr>
+              <a:t>→</a:t>
+            </a:r>
+            <a:endParaRPr lang="en-US" sz="2000" dirty="0"/>
+          </a:p>
+        </p:txBody>
+      </p:sp>
+      <p:sp>
+        <p:nvSpPr>
+          <p:cNvPr id="21" name="Shape 19"/>
+          <p:cNvSpPr/>
+          <p:nvPr/>
+        </p:nvSpPr>
+        <p:spPr>
+          <a:xfrm>
+            <a:off x="6940296" y="1920240"/>
+            <a:ext cx="1828800" cy="1051560"/>
+          </a:xfrm>
+          <a:prstGeom prst="rect">
+            <a:avLst/>
+          </a:prstGeom>
+          <a:solidFill>
+            <a:srgbClr val="2E333B"/>
+          </a:solidFill>
+          <a:ln w="12700">
+            <a:solidFill>
+              <a:srgbClr val="3D434C"/>
+            </a:solidFill>
+            <a:prstDash val="solid"/>
+          </a:ln>
+        </p:spPr>
+        <p:txBody>
+          <a:bodyPr/>
+          <a:lstStyle/>
+          <a:p>
+            <a:endParaRPr lang="en-US"/>
+          </a:p>
+        </p:txBody>
+      </p:sp>
+      <p:sp>
+        <p:nvSpPr>
+          <p:cNvPr id="22" name="Shape 20"/>
+          <p:cNvSpPr/>
+          <p:nvPr/>
+        </p:nvSpPr>
+        <p:spPr>
+          <a:xfrm>
+            <a:off x="6940296" y="1920240"/>
+            <a:ext cx="64008" cy="1051560"/>
+          </a:xfrm>
+          <a:prstGeom prst="rect">
+            <a:avLst/>
+          </a:prstGeom>
+          <a:solidFill>
+            <a:srgbClr val="D81E2C"/>
+          </a:solidFill>
+          <a:ln/>
+        </p:spPr>
+        <p:txBody>
+          <a:bodyPr/>
+          <a:lstStyle/>
+          <a:p>
+            <a:endParaRPr lang="en-US"/>
+          </a:p>
+        </p:txBody>
+      </p:sp>
+      <p:sp>
+        <p:nvSpPr>
+          <p:cNvPr id="23" name="Text 21"/>
+          <p:cNvSpPr/>
+          <p:nvPr/>
+        </p:nvSpPr>
+        <p:spPr>
+          <a:xfrm>
+            <a:off x="7104888" y="2066544"/>
+            <a:ext cx="1554480" cy="365760"/>
+          </a:xfrm>
+          <a:prstGeom prst="rect">
+            <a:avLst/>
+          </a:prstGeom>
+          <a:noFill/>
+          <a:ln/>
+        </p:spPr>
+        <p:txBody>
+          <a:bodyPr wrap="square" lIns="0" tIns="0" rIns="0" bIns="0" rtlCol="0" anchor="ctr"/>
+          <a:lstStyle/>
+          <a:p>
+            <a:pPr marL="0" indent="0" algn="l">
+              <a:lnSpc>
+                <a:spcPct val="95000"/>
+              </a:lnSpc>
+              <a:buNone/>
+            </a:pPr>
+            <a:r>
+              <a:rPr lang="en-US" sz="1300" b="1" dirty="0">
+                <a:solidFill>
+                  <a:srgbClr val="FFFFFF"/>
+                </a:solidFill>
+                <a:latin typeface="Trebuchet MS" pitchFamily="34" charset="0"/>
+                <a:ea typeface="Trebuchet MS" pitchFamily="34" charset="-122"/>
+                <a:cs typeface="Trebuchet MS" pitchFamily="34" charset="-120"/>
+              </a:rPr>
+              <a:t>Database</a:t>
+            </a:r>
+            <a:endParaRPr lang="en-US" sz="1300" dirty="0"/>
+          </a:p>
+        </p:txBody>
+      </p:sp>
+      <p:sp>
+        <p:nvSpPr>
+          <p:cNvPr id="24" name="Text 22"/>
+          <p:cNvSpPr/>
+          <p:nvPr/>
+        </p:nvSpPr>
+        <p:spPr>
+          <a:xfrm>
+            <a:off x="7104888" y="2468880"/>
+            <a:ext cx="1554480" cy="411480"/>
+          </a:xfrm>
+          <a:prstGeom prst="rect">
+            <a:avLst/>
+          </a:prstGeom>
+          <a:noFill/>
+          <a:ln/>
+        </p:spPr>
+        <p:txBody>
+          <a:bodyPr wrap="square" lIns="0" tIns="0" rIns="0" bIns="0" rtlCol="0" anchor="t"/>
+          <a:lstStyle/>
+          <a:p>
+            <a:pPr marL="0" indent="0" algn="l">
+              <a:lnSpc>
+                <a:spcPct val="100000"/>
+              </a:lnSpc>
+              <a:buNone/>
+            </a:pPr>
+            <a:r>
+              <a:rPr lang="en-US" sz="1000" dirty="0">
+                <a:solidFill>
+                  <a:srgbClr val="AEB4BC"/>
+                </a:solidFill>
+                <a:latin typeface="Calibri" pitchFamily="34" charset="0"/>
+                <a:ea typeface="Calibri" pitchFamily="34" charset="-122"/>
+                <a:cs typeface="Calibri" pitchFamily="34" charset="-120"/>
+              </a:rPr>
+              <a:t>Managed relational store</a:t>
+            </a:r>
+            <a:endParaRPr lang="en-US" sz="1000" dirty="0"/>
+          </a:p>
+        </p:txBody>
+      </p:sp>
+      <p:sp>
+        <p:nvSpPr>
+          <p:cNvPr id="25" name="Shape 23"/>
+          <p:cNvSpPr/>
+          <p:nvPr/>
+        </p:nvSpPr>
+        <p:spPr>
+          <a:xfrm>
+            <a:off x="548640" y="3337560"/>
+            <a:ext cx="2587752" cy="1097280"/>
+          </a:xfrm>
+          <a:prstGeom prst="rect">
+            <a:avLst/>
+          </a:prstGeom>
+          <a:solidFill>
+            <a:srgbClr val="1B1E23"/>
+          </a:solidFill>
+          <a:ln w="12700">
+            <a:solidFill>
+              <a:srgbClr val="3D434C"/>
+            </a:solidFill>
+            <a:prstDash val="solid"/>
+          </a:ln>
+        </p:spPr>
+        <p:txBody>
+          <a:bodyPr/>
+          <a:lstStyle/>
+          <a:p>
+            <a:endParaRPr lang="en-US"/>
+          </a:p>
+        </p:txBody>
+      </p:sp>
+      <p:sp>
+        <p:nvSpPr>
+          <p:cNvPr id="26" name="Text 24"/>
+          <p:cNvSpPr/>
+          <p:nvPr/>
+        </p:nvSpPr>
+        <p:spPr>
+          <a:xfrm>
+            <a:off x="731520" y="3502152"/>
+            <a:ext cx="2221992" cy="320040"/>
+          </a:xfrm>
+          <a:prstGeom prst="rect">
+            <a:avLst/>
+          </a:prstGeom>
+          <a:noFill/>
+          <a:ln/>
+        </p:spPr>
+        <p:txBody>
+          <a:bodyPr wrap="square" lIns="0" tIns="0" rIns="0" bIns="0" rtlCol="0" anchor="ctr"/>
+          <a:lstStyle/>
+          <a:p>
+            <a:pPr marL="0" indent="0" algn="l">
+              <a:buNone/>
+            </a:pPr>
+            <a:r>
+              <a:rPr lang="en-US" sz="1350" b="1" dirty="0">
+                <a:solidFill>
+                  <a:srgbClr val="FF8A91"/>
+                </a:solidFill>
+                <a:latin typeface="Trebuchet MS" pitchFamily="34" charset="0"/>
+                <a:ea typeface="Trebuchet MS" pitchFamily="34" charset="-122"/>
+                <a:cs typeface="Trebuchet MS" pitchFamily="34" charset="-120"/>
+              </a:rPr>
+              <a:t>Authentication</a:t>
+            </a:r>
+            <a:endParaRPr lang="en-US" sz="1350" dirty="0"/>
+          </a:p>
+        </p:txBody>
+      </p:sp>
+      <p:sp>
+        <p:nvSpPr>
+          <p:cNvPr id="27" name="Text 25"/>
+          <p:cNvSpPr/>
+          <p:nvPr/>
+        </p:nvSpPr>
+        <p:spPr>
+          <a:xfrm>
+            <a:off x="731520" y="3849624"/>
+            <a:ext cx="2221992" cy="457200"/>
+          </a:xfrm>
+          <a:prstGeom prst="rect">
+            <a:avLst/>
+          </a:prstGeom>
+          <a:noFill/>
+          <a:ln/>
+        </p:spPr>
+        <p:txBody>
+          <a:bodyPr wrap="square" lIns="0" tIns="0" rIns="0" bIns="0" rtlCol="0" anchor="t"/>
+          <a:lstStyle/>
+          <a:p>
+            <a:pPr marL="0" indent="0" algn="l">
+              <a:lnSpc>
+                <a:spcPct val="105000"/>
+              </a:lnSpc>
+              <a:buNone/>
+            </a:pPr>
+            <a:r>
+              <a:rPr lang="en-US" sz="1100" dirty="0">
+                <a:solidFill>
+                  <a:srgbClr val="C9CDD3"/>
+                </a:solidFill>
+                <a:latin typeface="Calibri" pitchFamily="34" charset="0"/>
+                <a:ea typeface="Calibri" pitchFamily="34" charset="-122"/>
+                <a:cs typeface="Calibri" pitchFamily="34" charset="-120"/>
+              </a:rPr>
+              <a:t>User identity &amp; role-based access</a:t>
+            </a:r>
+            <a:endParaRPr lang="en-US" sz="1100" dirty="0"/>
+          </a:p>
+        </p:txBody>
+      </p:sp>
+      <p:sp>
+        <p:nvSpPr>
+          <p:cNvPr id="28" name="Shape 26"/>
+          <p:cNvSpPr/>
+          <p:nvPr/>
+        </p:nvSpPr>
+        <p:spPr>
+          <a:xfrm>
+            <a:off x="3410712" y="3337560"/>
+            <a:ext cx="2587752" cy="1097280"/>
+          </a:xfrm>
+          <a:prstGeom prst="rect">
+            <a:avLst/>
+          </a:prstGeom>
+          <a:solidFill>
+            <a:srgbClr val="1B1E23"/>
+          </a:solidFill>
+          <a:ln w="12700">
+            <a:solidFill>
+              <a:srgbClr val="3D434C"/>
+            </a:solidFill>
+            <a:prstDash val="solid"/>
+          </a:ln>
+        </p:spPr>
+        <p:txBody>
+          <a:bodyPr/>
+          <a:lstStyle/>
+          <a:p>
+            <a:endParaRPr lang="en-US"/>
+          </a:p>
+        </p:txBody>
+      </p:sp>
+      <p:sp>
+        <p:nvSpPr>
+          <p:cNvPr id="29" name="Text 27"/>
+          <p:cNvSpPr/>
+          <p:nvPr/>
+        </p:nvSpPr>
+        <p:spPr>
+          <a:xfrm>
+            <a:off x="3593592" y="3502152"/>
+            <a:ext cx="2221992" cy="320040"/>
+          </a:xfrm>
+          <a:prstGeom prst="rect">
+            <a:avLst/>
+          </a:prstGeom>
+          <a:noFill/>
+          <a:ln/>
+        </p:spPr>
+        <p:txBody>
+          <a:bodyPr wrap="square" lIns="0" tIns="0" rIns="0" bIns="0" rtlCol="0" anchor="ctr"/>
+          <a:lstStyle/>
+          <a:p>
+            <a:pPr marL="0" indent="0" algn="l">
+              <a:buNone/>
+            </a:pPr>
+            <a:r>
+              <a:rPr lang="en-US" sz="1350" b="1" dirty="0">
+                <a:solidFill>
+                  <a:srgbClr val="FF8A91"/>
+                </a:solidFill>
+                <a:latin typeface="Trebuchet MS" pitchFamily="34" charset="0"/>
+                <a:ea typeface="Trebuchet MS" pitchFamily="34" charset="-122"/>
+                <a:cs typeface="Trebuchet MS" pitchFamily="34" charset="-120"/>
+              </a:rPr>
+              <a:t>Storage</a:t>
+            </a:r>
+            <a:endParaRPr lang="en-US" sz="1350" dirty="0"/>
+          </a:p>
+        </p:txBody>
+      </p:sp>
+      <p:sp>
+        <p:nvSpPr>
+          <p:cNvPr id="30" name="Text 28"/>
+          <p:cNvSpPr/>
+          <p:nvPr/>
+        </p:nvSpPr>
+        <p:spPr>
+          <a:xfrm>
+            <a:off x="3593592" y="3849624"/>
+            <a:ext cx="2221992" cy="457200"/>
+          </a:xfrm>
+          <a:prstGeom prst="rect">
+            <a:avLst/>
+          </a:prstGeom>
+          <a:noFill/>
+          <a:ln/>
+        </p:spPr>
+        <p:txBody>
+          <a:bodyPr wrap="square" lIns="0" tIns="0" rIns="0" bIns="0" rtlCol="0" anchor="t"/>
+          <a:lstStyle/>
+          <a:p>
+            <a:pPr marL="0" indent="0" algn="l">
+              <a:lnSpc>
+                <a:spcPct val="105000"/>
+              </a:lnSpc>
+              <a:buNone/>
+            </a:pPr>
+            <a:r>
+              <a:rPr lang="en-US" sz="1100" dirty="0">
+                <a:solidFill>
+                  <a:srgbClr val="C9CDD3"/>
+                </a:solidFill>
+                <a:latin typeface="Calibri" pitchFamily="34" charset="0"/>
+                <a:ea typeface="Calibri" pitchFamily="34" charset="-122"/>
+                <a:cs typeface="Calibri" pitchFamily="34" charset="-120"/>
+              </a:rPr>
+              <a:t>Daily check, items and relationships</a:t>
+            </a:r>
+            <a:endParaRPr lang="en-US" sz="1100" dirty="0"/>
+          </a:p>
+        </p:txBody>
+      </p:sp>
+      <p:sp>
+        <p:nvSpPr>
+          <p:cNvPr id="31" name="Shape 29"/>
+          <p:cNvSpPr/>
+          <p:nvPr/>
+        </p:nvSpPr>
+        <p:spPr>
+          <a:xfrm>
+            <a:off x="6272784" y="3337560"/>
+            <a:ext cx="2587752" cy="1097280"/>
+          </a:xfrm>
+          <a:prstGeom prst="rect">
+            <a:avLst/>
+          </a:prstGeom>
+          <a:solidFill>
+            <a:srgbClr val="1B1E23"/>
+          </a:solidFill>
+          <a:ln w="12700">
+            <a:solidFill>
+              <a:srgbClr val="3D434C"/>
+            </a:solidFill>
+            <a:prstDash val="solid"/>
+          </a:ln>
+        </p:spPr>
+        <p:txBody>
+          <a:bodyPr/>
+          <a:lstStyle/>
+          <a:p>
+            <a:endParaRPr lang="en-US"/>
+          </a:p>
+        </p:txBody>
+      </p:sp>
+      <p:sp>
+        <p:nvSpPr>
+          <p:cNvPr id="32" name="Text 30"/>
+          <p:cNvSpPr/>
+          <p:nvPr/>
+        </p:nvSpPr>
+        <p:spPr>
+          <a:xfrm>
+            <a:off x="6455664" y="3502152"/>
+            <a:ext cx="2221992" cy="320040"/>
+          </a:xfrm>
+          <a:prstGeom prst="rect">
+            <a:avLst/>
+          </a:prstGeom>
+          <a:noFill/>
+          <a:ln/>
+        </p:spPr>
+        <p:txBody>
+          <a:bodyPr wrap="square" lIns="0" tIns="0" rIns="0" bIns="0" rtlCol="0" anchor="ctr"/>
+          <a:lstStyle/>
+          <a:p>
+            <a:pPr marL="0" indent="0" algn="l">
+              <a:buNone/>
+            </a:pPr>
+            <a:r>
+              <a:rPr lang="en-US" sz="1350" b="1" dirty="0">
+                <a:solidFill>
+                  <a:srgbClr val="FF8A91"/>
+                </a:solidFill>
+                <a:latin typeface="Trebuchet MS" pitchFamily="34" charset="0"/>
+                <a:ea typeface="Trebuchet MS" pitchFamily="34" charset="-122"/>
+                <a:cs typeface="Trebuchet MS" pitchFamily="34" charset="-120"/>
+              </a:rPr>
+              <a:t>CI/CD pipeline</a:t>
+            </a:r>
+            <a:endParaRPr lang="en-US" sz="1350" dirty="0"/>
+          </a:p>
+        </p:txBody>
+      </p:sp>
+      <p:sp>
+        <p:nvSpPr>
+          <p:cNvPr id="33" name="Text 31"/>
+          <p:cNvSpPr/>
+          <p:nvPr/>
+        </p:nvSpPr>
+        <p:spPr>
+          <a:xfrm>
+            <a:off x="6455664" y="3849624"/>
+            <a:ext cx="2221992" cy="457200"/>
+          </a:xfrm>
+          <a:prstGeom prst="rect">
+            <a:avLst/>
+          </a:prstGeom>
+          <a:noFill/>
+          <a:ln/>
+        </p:spPr>
+        <p:txBody>
+          <a:bodyPr wrap="square" lIns="0" tIns="0" rIns="0" bIns="0" rtlCol="0" anchor="t"/>
+          <a:lstStyle/>
+          <a:p>
+            <a:pPr marL="0" indent="0" algn="l">
+              <a:lnSpc>
+                <a:spcPct val="105000"/>
+              </a:lnSpc>
+              <a:buNone/>
+            </a:pPr>
+            <a:r>
+              <a:rPr lang="en-US" sz="1100" dirty="0">
+                <a:solidFill>
+                  <a:srgbClr val="C9CDD3"/>
+                </a:solidFill>
+                <a:latin typeface="Calibri" pitchFamily="34" charset="0"/>
+                <a:ea typeface="Calibri" pitchFamily="34" charset="-122"/>
+                <a:cs typeface="Calibri" pitchFamily="34" charset="-120"/>
+              </a:rPr>
+              <a:t>Automated build, test &amp; deploy</a:t>
+            </a:r>
+            <a:endParaRPr lang="en-US" sz="1100" dirty="0"/>
+          </a:p>
+        </p:txBody>
+      </p:sp>
+      <p:sp>
+        <p:nvSpPr>
+          <p:cNvPr id="34" name="Shape 32"/>
+          <p:cNvSpPr/>
+          <p:nvPr/>
+        </p:nvSpPr>
+        <p:spPr>
+          <a:xfrm>
+            <a:off x="548640" y="4855464"/>
+            <a:ext cx="73152" cy="73152"/>
+          </a:xfrm>
+          <a:prstGeom prst="ellipse">
+            <a:avLst/>
+          </a:prstGeom>
+          <a:solidFill>
+            <a:srgbClr val="D81E2C"/>
+          </a:solidFill>
+          <a:ln/>
+        </p:spPr>
+        <p:txBody>
+          <a:bodyPr/>
+          <a:lstStyle/>
+          <a:p>
+            <a:endParaRPr lang="en-US"/>
+          </a:p>
+        </p:txBody>
+      </p:sp>
+      <p:sp>
+        <p:nvSpPr>
+          <p:cNvPr id="35" name="Text 33"/>
+          <p:cNvSpPr/>
+          <p:nvPr/>
+        </p:nvSpPr>
+        <p:spPr>
+          <a:xfrm>
+            <a:off x="676656" y="4736592"/>
+            <a:ext cx="3657600" cy="292608"/>
+          </a:xfrm>
+          <a:prstGeom prst="rect">
+            <a:avLst/>
+          </a:prstGeom>
+          <a:noFill/>
+          <a:ln/>
+        </p:spPr>
+        <p:txBody>
+          <a:bodyPr wrap="square" lIns="0" tIns="0" rIns="0" bIns="0" rtlCol="0" anchor="ctr"/>
+          <a:lstStyle/>
+          <a:p>
+            <a:pPr marL="0" indent="0" algn="l">
+              <a:buNone/>
+            </a:pPr>
+            <a:r>
+              <a:rPr lang="en-US" sz="950" dirty="0">
+                <a:solidFill>
+                  <a:srgbClr val="8A929C"/>
+                </a:solidFill>
+                <a:latin typeface="Calibri" pitchFamily="34" charset="0"/>
+                <a:ea typeface="Calibri" pitchFamily="34" charset="-122"/>
+                <a:cs typeface="Calibri" pitchFamily="34" charset="-120"/>
+              </a:rPr>
+              <a:t>EMS ReadyKit</a:t>
+            </a:r>
+            <a:endParaRPr lang="en-US" sz="950" dirty="0"/>
+          </a:p>
+        </p:txBody>
+      </p:sp>
+      <p:sp>
+        <p:nvSpPr>
+          <p:cNvPr id="36" name="Text 34"/>
+          <p:cNvSpPr/>
+          <p:nvPr/>
+        </p:nvSpPr>
+        <p:spPr>
+          <a:xfrm>
+            <a:off x="8138160" y="4736592"/>
+            <a:ext cx="457200" cy="292608"/>
+          </a:xfrm>
+          <a:prstGeom prst="rect">
+            <a:avLst/>
+          </a:prstGeom>
+          <a:noFill/>
+          <a:ln/>
+        </p:spPr>
+        <p:txBody>
+          <a:bodyPr wrap="square" lIns="0" tIns="0" rIns="0" bIns="0" rtlCol="0" anchor="ctr"/>
+          <a:lstStyle/>
+          <a:p>
+            <a:pPr marL="0" indent="0" algn="r">
+              <a:buNone/>
+            </a:pPr>
+            <a:r>
+              <a:rPr lang="en-US" sz="950" dirty="0">
+                <a:solidFill>
+                  <a:srgbClr val="8A929C"/>
+                </a:solidFill>
+                <a:latin typeface="Consolas" pitchFamily="34" charset="0"/>
+                <a:ea typeface="Consolas" pitchFamily="34" charset="-122"/>
+                <a:cs typeface="Consolas" pitchFamily="34" charset="-120"/>
+              </a:rPr>
+              <a:t>11</a:t>
+            </a:r>
+            <a:endParaRPr lang="en-US" sz="950" dirty="0"/>
+          </a:p>
+        </p:txBody>
+      </p:sp>
+    </p:spTree>
+  </p:cSld>
+  <p:clrMapOvr>
+    <a:masterClrMapping/>
+  </p:clrMapOvr>
+</p:sld>
+</file>
+
+<file path=ppt/slides/slide24.xml><?xml version="1.0" encoding="utf-8"?>
+<p:sld xmlns:a="http://schemas.openxmlformats.org/drawingml/2006/main" xmlns:r="http://schemas.openxmlformats.org/officeDocument/2006/relationships" xmlns:p="http://schemas.openxmlformats.org/presentationml/2006/main">
   <p:cSld name="Slide 12">
     <p:bg>
       <p:bgPr>
@@ -14931,7 +19814,7 @@
 </p:sld>
 </file>
 
-<file path=ppt/slides/slide21.xml><?xml version="1.0" encoding="utf-8"?>
+<file path=ppt/slides/slide25.xml><?xml version="1.0" encoding="utf-8"?>
 <p:sld xmlns:a="http://schemas.openxmlformats.org/drawingml/2006/main" xmlns:r="http://schemas.openxmlformats.org/officeDocument/2006/relationships" xmlns:p="http://schemas.openxmlformats.org/presentationml/2006/main">
   <p:cSld name="Slide 13">
     <p:bg>
@@ -15162,91 +20045,13 @@
       </p:sp>
       <p:sp>
         <p:nvSpPr>
-          <p:cNvPr id="8" name="Text 6"/>
-          <p:cNvSpPr/>
-          <p:nvPr/>
-        </p:nvSpPr>
-        <p:spPr>
-          <a:xfrm>
-            <a:off x="640080" y="3611880"/>
-            <a:ext cx="2587752" cy="256032"/>
-          </a:xfrm>
-          <a:prstGeom prst="rect">
-            <a:avLst/>
-          </a:prstGeom>
-          <a:noFill/>
-          <a:ln/>
-        </p:spPr>
-        <p:txBody>
-          <a:bodyPr wrap="square" lIns="0" tIns="0" rIns="0" bIns="0" rtlCol="0" anchor="ctr"/>
-          <a:lstStyle/>
-          <a:p>
-            <a:pPr marL="0" indent="0" algn="l">
-              <a:buNone/>
-            </a:pPr>
-            <a:r>
-              <a:rPr lang="en-US" sz="1000" b="1" kern="0" spc="200" dirty="0">
-                <a:solidFill>
-                  <a:srgbClr val="FF8A91"/>
-                </a:solidFill>
-                <a:latin typeface="Consolas" pitchFamily="34" charset="0"/>
-                <a:ea typeface="Consolas" pitchFamily="34" charset="-122"/>
-                <a:cs typeface="Consolas" pitchFamily="34" charset="-120"/>
-              </a:rPr>
-              <a:t>PORTFOLIO</a:t>
-            </a:r>
-            <a:endParaRPr lang="en-US" sz="1000" dirty="0"/>
-          </a:p>
-        </p:txBody>
-      </p:sp>
-      <p:sp>
-        <p:nvSpPr>
-          <p:cNvPr id="9" name="Text 7"/>
-          <p:cNvSpPr/>
-          <p:nvPr/>
-        </p:nvSpPr>
-        <p:spPr>
-          <a:xfrm>
-            <a:off x="640080" y="3886200"/>
-            <a:ext cx="2587752" cy="320040"/>
-          </a:xfrm>
-          <a:prstGeom prst="rect">
-            <a:avLst/>
-          </a:prstGeom>
-          <a:noFill/>
-          <a:ln/>
-        </p:spPr>
-        <p:txBody>
-          <a:bodyPr wrap="square" lIns="0" tIns="0" rIns="0" bIns="0" rtlCol="0" anchor="ctr"/>
-          <a:lstStyle/>
-          <a:p>
-            <a:pPr marL="0" indent="0" algn="l">
-              <a:buNone/>
-            </a:pPr>
-            <a:r>
-              <a:rPr lang="en-US" sz="1350" dirty="0">
-                <a:solidFill>
-                  <a:srgbClr val="FFFFFF"/>
-                </a:solidFill>
-                <a:latin typeface="Calibri" pitchFamily="34" charset="0"/>
-                <a:ea typeface="Calibri" pitchFamily="34" charset="-122"/>
-                <a:cs typeface="Calibri" pitchFamily="34" charset="-120"/>
-              </a:rPr>
-              <a:t>your-portfolio.dev</a:t>
-            </a:r>
-            <a:endParaRPr lang="en-US" sz="1350" dirty="0"/>
-          </a:p>
-        </p:txBody>
-      </p:sp>
-      <p:sp>
-        <p:nvSpPr>
           <p:cNvPr id="10" name="Text 8"/>
           <p:cNvSpPr/>
           <p:nvPr/>
         </p:nvSpPr>
         <p:spPr>
           <a:xfrm>
-            <a:off x="3502152" y="3611880"/>
+            <a:off x="676656" y="3630168"/>
             <a:ext cx="2587752" cy="256032"/>
           </a:xfrm>
           <a:prstGeom prst="rect">
@@ -15285,7 +20090,7 @@
         </p:nvSpPr>
         <p:spPr>
           <a:xfrm>
-            <a:off x="3502152" y="3886200"/>
+            <a:off x="676656" y="3904488"/>
             <a:ext cx="2587752" cy="320040"/>
           </a:xfrm>
           <a:prstGeom prst="rect">
@@ -15310,7 +20115,7 @@
                 <a:ea typeface="Calibri" pitchFamily="34" charset="-122"/>
                 <a:cs typeface="Calibri" pitchFamily="34" charset="-120"/>
               </a:rPr>
-              <a:t>you@email.com</a:t>
+              <a:t>jinniyah@gmail.com</a:t>
             </a:r>
             <a:endParaRPr lang="en-US" sz="1350" dirty="0"/>
           </a:p>
@@ -15324,7 +20129,7 @@
         </p:nvSpPr>
         <p:spPr>
           <a:xfrm>
-            <a:off x="6364224" y="3611880"/>
+            <a:off x="3264408" y="3612067"/>
             <a:ext cx="2587752" cy="256032"/>
           </a:xfrm>
           <a:prstGeom prst="rect">
@@ -15363,8 +20168,8 @@
         </p:nvSpPr>
         <p:spPr>
           <a:xfrm>
-            <a:off x="6364224" y="3886200"/>
-            <a:ext cx="2587752" cy="320040"/>
+            <a:off x="3264408" y="3886387"/>
+            <a:ext cx="3229698" cy="320040"/>
           </a:xfrm>
           <a:prstGeom prst="rect">
             <a:avLst/>
@@ -15376,9 +20181,6 @@
           <a:bodyPr wrap="square" lIns="0" tIns="0" rIns="0" bIns="0" rtlCol="0" anchor="ctr"/>
           <a:lstStyle/>
           <a:p>
-            <a:pPr marL="0" indent="0" algn="l">
-              <a:buNone/>
-            </a:pPr>
             <a:r>
               <a:rPr lang="en-US" sz="1350" dirty="0">
                 <a:solidFill>
@@ -15388,7 +20190,7 @@
                 <a:ea typeface="Calibri" pitchFamily="34" charset="-122"/>
                 <a:cs typeface="Calibri" pitchFamily="34" charset="-120"/>
               </a:rPr>
-              <a:t>github.com/yourhandle</a:t>
+              <a:t>https://github.com/Jinniyah/EMS_ReadyKit</a:t>
             </a:r>
             <a:endParaRPr lang="en-US" sz="1350" dirty="0"/>
           </a:p>
@@ -15620,7 +20422,7 @@
                 <a:ea typeface="Calibri" pitchFamily="34" charset="-122"/>
                 <a:cs typeface="Calibri" pitchFamily="34" charset="-120"/>
               </a:rPr>
-              <a:t>Manual paper checks are slow and easy to misplace</a:t>
+              <a:t>Manual paper checks can be slow</a:t>
             </a:r>
           </a:p>
           <a:p>
@@ -15640,7 +20442,7 @@
                 <a:ea typeface="Calibri" pitchFamily="34" charset="-122"/>
                 <a:cs typeface="Calibri" pitchFamily="34" charset="-120"/>
               </a:rPr>
-              <a:t>They can be hard to verify and take storage space</a:t>
+              <a:t>They can be hard to verify and find</a:t>
             </a:r>
             <a:endParaRPr lang="en-US" sz="1350" dirty="0"/>
           </a:p>
@@ -15661,7 +20463,7 @@
                 <a:ea typeface="Calibri" pitchFamily="34" charset="-122"/>
                 <a:cs typeface="Calibri" pitchFamily="34" charset="-120"/>
               </a:rPr>
-              <a:t>No automated notification of low or expired stock</a:t>
+              <a:t>No notification of low or expired stock</a:t>
             </a:r>
             <a:endParaRPr lang="en-US" sz="1350" dirty="0"/>
           </a:p>
@@ -19172,7 +23974,7 @@
                 <a:ea typeface="Calibri" pitchFamily="34" charset="-122"/>
                 <a:cs typeface="Calibri" pitchFamily="34" charset="-120"/>
               </a:rPr>
-              <a:t>Tap to confirm, flag, or note a shortage</a:t>
+              <a:t>Tap to confirm, flag, or note a shortage or damaged item</a:t>
             </a:r>
             <a:endParaRPr lang="en-US" sz="1250" dirty="0"/>
           </a:p>
